--- a/assets/pitch.pptx
+++ b/assets/pitch.pptx
@@ -5,7 +5,7 @@
     <p:sldMasterId id="2147483648" r:id="rId1"/>
   </p:sldMasterIdLst>
   <p:notesMasterIdLst>
-    <p:notesMasterId r:id="rId18"/>
+    <p:notesMasterId r:id="rId20"/>
   </p:notesMasterIdLst>
   <p:sldIdLst>
     <p:sldId id="256" r:id="rId2"/>
@@ -15,15 +15,17 @@
     <p:sldId id="260" r:id="rId6"/>
     <p:sldId id="259" r:id="rId7"/>
     <p:sldId id="261" r:id="rId8"/>
-    <p:sldId id="262" r:id="rId9"/>
-    <p:sldId id="271" r:id="rId10"/>
-    <p:sldId id="263" r:id="rId11"/>
-    <p:sldId id="272" r:id="rId12"/>
-    <p:sldId id="264" r:id="rId13"/>
-    <p:sldId id="265" r:id="rId14"/>
-    <p:sldId id="266" r:id="rId15"/>
-    <p:sldId id="267" r:id="rId16"/>
-    <p:sldId id="268" r:id="rId17"/>
+    <p:sldId id="273" r:id="rId9"/>
+    <p:sldId id="262" r:id="rId10"/>
+    <p:sldId id="271" r:id="rId11"/>
+    <p:sldId id="274" r:id="rId12"/>
+    <p:sldId id="263" r:id="rId13"/>
+    <p:sldId id="272" r:id="rId14"/>
+    <p:sldId id="264" r:id="rId15"/>
+    <p:sldId id="265" r:id="rId16"/>
+    <p:sldId id="266" r:id="rId17"/>
+    <p:sldId id="267" r:id="rId18"/>
+    <p:sldId id="268" r:id="rId19"/>
   </p:sldIdLst>
   <p:sldSz cx="12192000" cy="6858000"/>
   <p:notesSz cx="6858000" cy="12192000"/>
@@ -142,8 +144,10 @@
         <p14:section name="Business" id="{4AF2868E-4734-AD7F-2B4B-8C2D2AD6563D}">
           <p14:sldIdLst>
             <p14:sldId id="261"/>
+            <p14:sldId id="273"/>
             <p14:sldId id="262"/>
             <p14:sldId id="271"/>
+            <p14:sldId id="274"/>
             <p14:sldId id="263"/>
           </p14:sldIdLst>
         </p14:section>
@@ -179,7 +183,7 @@
 <file path=ppt/charts/chart1.xml><?xml version="1.0" encoding="utf-8"?>
 <c:chartSpace xmlns:c="http://schemas.openxmlformats.org/drawingml/2006/chart" xmlns:a="http://schemas.openxmlformats.org/drawingml/2006/main" xmlns:r="http://schemas.openxmlformats.org/officeDocument/2006/relationships" xmlns:c16r2="http://schemas.microsoft.com/office/drawing/2015/06/chart">
   <c:date1904 val="0"/>
-  <c:lang val="en-GB"/>
+  <c:lang val="en-US"/>
   <c:roundedCorners val="1"/>
   <c:style val="2"/>
   <c:chart>
@@ -198,7 +202,7 @@
               </a:defRPr>
             </a:pPr>
             <a:r>
-              <a:rPr lang="en-IN" sz="1500" b="0" i="0" u="none" strike="noStrike">
+              <a:rPr lang="en-IN" sz="2000" b="1" i="0" u="none" strike="noStrike" dirty="0">
                 <a:solidFill>
                   <a:srgbClr val="15110E"/>
                 </a:solidFill>
@@ -213,7 +217,17 @@
     </c:title>
     <c:autoTitleDeleted val="0"/>
     <c:plotArea>
-      <c:layout/>
+      <c:layout>
+        <c:manualLayout>
+          <c:layoutTarget val="inner"/>
+          <c:xMode val="edge"/>
+          <c:yMode val="edge"/>
+          <c:x val="0.3316716855152313"/>
+          <c:y val="0.11228654519309744"/>
+          <c:w val="0.6683283144847687"/>
+          <c:h val="0.84853958873890156"/>
+        </c:manualLayout>
+      </c:layout>
       <c:barChart>
         <c:barDir val="bar"/>
         <c:grouping val="clustered"/>
@@ -240,6 +254,187 @@
           </c:spPr>
           <c:invertIfNegative val="0"/>
           <c:dLbls>
+            <c:dLbl>
+              <c:idx val="0"/>
+              <c:numFmt formatCode="&quot;€&quot;0&quot;k&quot;" sourceLinked="0"/>
+              <c:spPr>
+                <a:noFill/>
+                <a:ln>
+                  <a:noFill/>
+                </a:ln>
+                <a:effectLst/>
+              </c:spPr>
+              <c:txPr>
+                <a:bodyPr/>
+                <a:lstStyle/>
+                <a:p>
+                  <a:pPr>
+                    <a:defRPr sz="1400" b="1" i="0" u="none" strike="noStrike">
+                      <a:solidFill>
+                        <a:schemeClr val="tx1"/>
+                      </a:solidFill>
+                      <a:latin typeface="+mn-lt"/>
+                    </a:defRPr>
+                  </a:pPr>
+                  <a:endParaRPr lang="en-US"/>
+                </a:p>
+              </c:txPr>
+              <c:showLegendKey val="0"/>
+              <c:showVal val="1"/>
+              <c:showCatName val="0"/>
+              <c:showSerName val="0"/>
+              <c:showPercent val="0"/>
+              <c:showBubbleSize val="0"/>
+              <c:extLst>
+                <c:ext xmlns:c16="http://schemas.microsoft.com/office/drawing/2014/chart" uri="{C3380CC4-5D6E-409C-BE32-E72D297353CC}">
+                  <c16:uniqueId val="{00000000-6F6C-4AB9-A219-EFCD9DFBB307}"/>
+                </c:ext>
+              </c:extLst>
+            </c:dLbl>
+            <c:dLbl>
+              <c:idx val="1"/>
+              <c:tx>
+                <c:rich>
+                  <a:bodyPr/>
+                  <a:lstStyle/>
+                  <a:p>
+                    <a:fld id="{CBFE094C-43A5-4180-9FEB-F993D98C49EE}" type="VALUE">
+                      <a:rPr lang="en-US">
+                        <a:solidFill>
+                          <a:schemeClr val="tx1"/>
+                        </a:solidFill>
+                      </a:rPr>
+                      <a:pPr/>
+                      <a:t>[VALUE]</a:t>
+                    </a:fld>
+                    <a:endParaRPr lang="en-IN"/>
+                  </a:p>
+                </c:rich>
+              </c:tx>
+              <c:showLegendKey val="0"/>
+              <c:showVal val="1"/>
+              <c:showCatName val="0"/>
+              <c:showSerName val="0"/>
+              <c:showPercent val="0"/>
+              <c:showBubbleSize val="0"/>
+              <c:extLst>
+                <c:ext xmlns:c15="http://schemas.microsoft.com/office/drawing/2012/chart" uri="{CE6537A1-D6FC-4f65-9D91-7224C49458BB}">
+                  <c15:dlblFieldTable/>
+                  <c15:showDataLabelsRange val="0"/>
+                </c:ext>
+                <c:ext xmlns:c16="http://schemas.microsoft.com/office/drawing/2014/chart" uri="{C3380CC4-5D6E-409C-BE32-E72D297353CC}">
+                  <c16:uniqueId val="{00000001-6F6C-4AB9-A219-EFCD9DFBB307}"/>
+                </c:ext>
+              </c:extLst>
+            </c:dLbl>
+            <c:dLbl>
+              <c:idx val="2"/>
+              <c:tx>
+                <c:rich>
+                  <a:bodyPr/>
+                  <a:lstStyle/>
+                  <a:p>
+                    <a:fld id="{2A95C5EC-18D8-4D9A-8C9D-09466BE812DD}" type="VALUE">
+                      <a:rPr lang="en-US">
+                        <a:solidFill>
+                          <a:schemeClr val="tx1"/>
+                        </a:solidFill>
+                      </a:rPr>
+                      <a:pPr/>
+                      <a:t>[VALUE]</a:t>
+                    </a:fld>
+                    <a:endParaRPr lang="en-IN"/>
+                  </a:p>
+                </c:rich>
+              </c:tx>
+              <c:showLegendKey val="0"/>
+              <c:showVal val="1"/>
+              <c:showCatName val="0"/>
+              <c:showSerName val="0"/>
+              <c:showPercent val="0"/>
+              <c:showBubbleSize val="0"/>
+              <c:extLst>
+                <c:ext xmlns:c15="http://schemas.microsoft.com/office/drawing/2012/chart" uri="{CE6537A1-D6FC-4f65-9D91-7224C49458BB}">
+                  <c15:dlblFieldTable/>
+                  <c15:showDataLabelsRange val="0"/>
+                </c:ext>
+                <c:ext xmlns:c16="http://schemas.microsoft.com/office/drawing/2014/chart" uri="{C3380CC4-5D6E-409C-BE32-E72D297353CC}">
+                  <c16:uniqueId val="{00000002-6F6C-4AB9-A219-EFCD9DFBB307}"/>
+                </c:ext>
+              </c:extLst>
+            </c:dLbl>
+            <c:dLbl>
+              <c:idx val="3"/>
+              <c:tx>
+                <c:rich>
+                  <a:bodyPr/>
+                  <a:lstStyle/>
+                  <a:p>
+                    <a:fld id="{16B1E49E-7C39-4ABD-B897-1F5C11F320A5}" type="VALUE">
+                      <a:rPr lang="en-US">
+                        <a:solidFill>
+                          <a:schemeClr val="tx1"/>
+                        </a:solidFill>
+                      </a:rPr>
+                      <a:pPr/>
+                      <a:t>[VALUE]</a:t>
+                    </a:fld>
+                    <a:endParaRPr lang="en-IN"/>
+                  </a:p>
+                </c:rich>
+              </c:tx>
+              <c:showLegendKey val="0"/>
+              <c:showVal val="1"/>
+              <c:showCatName val="0"/>
+              <c:showSerName val="0"/>
+              <c:showPercent val="0"/>
+              <c:showBubbleSize val="0"/>
+              <c:extLst>
+                <c:ext xmlns:c15="http://schemas.microsoft.com/office/drawing/2012/chart" uri="{CE6537A1-D6FC-4f65-9D91-7224C49458BB}">
+                  <c15:dlblFieldTable/>
+                  <c15:showDataLabelsRange val="0"/>
+                </c:ext>
+                <c:ext xmlns:c16="http://schemas.microsoft.com/office/drawing/2014/chart" uri="{C3380CC4-5D6E-409C-BE32-E72D297353CC}">
+                  <c16:uniqueId val="{00000003-6F6C-4AB9-A219-EFCD9DFBB307}"/>
+                </c:ext>
+              </c:extLst>
+            </c:dLbl>
+            <c:dLbl>
+              <c:idx val="4"/>
+              <c:tx>
+                <c:rich>
+                  <a:bodyPr/>
+                  <a:lstStyle/>
+                  <a:p>
+                    <a:fld id="{A3A49ACE-4657-45F9-8199-17A27398D560}" type="VALUE">
+                      <a:rPr lang="en-US">
+                        <a:solidFill>
+                          <a:schemeClr val="tx1"/>
+                        </a:solidFill>
+                      </a:rPr>
+                      <a:pPr/>
+                      <a:t>[VALUE]</a:t>
+                    </a:fld>
+                    <a:endParaRPr lang="en-IN"/>
+                  </a:p>
+                </c:rich>
+              </c:tx>
+              <c:showLegendKey val="0"/>
+              <c:showVal val="1"/>
+              <c:showCatName val="0"/>
+              <c:showSerName val="0"/>
+              <c:showPercent val="0"/>
+              <c:showBubbleSize val="0"/>
+              <c:extLst>
+                <c:ext xmlns:c15="http://schemas.microsoft.com/office/drawing/2012/chart" uri="{CE6537A1-D6FC-4f65-9D91-7224C49458BB}">
+                  <c15:dlblFieldTable/>
+                  <c15:showDataLabelsRange val="0"/>
+                </c:ext>
+                <c:ext xmlns:c16="http://schemas.microsoft.com/office/drawing/2014/chart" uri="{C3380CC4-5D6E-409C-BE32-E72D297353CC}">
+                  <c16:uniqueId val="{00000004-6F6C-4AB9-A219-EFCD9DFBB307}"/>
+                </c:ext>
+              </c:extLst>
+            </c:dLbl>
             <c:numFmt formatCode="&quot;€&quot;0&quot;k&quot;" sourceLinked="0"/>
             <c:spPr>
               <a:noFill/>
@@ -418,7 +613,6 @@
   <c:externalData r:id="rId1">
     <c:autoUpdate val="0"/>
   </c:externalData>
-  <c:userShapes r:id="rId2"/>
 </c:chartSpace>
 </file>
 
@@ -483,50 +677,6 @@
     </p188:txBody>
   </p188:cm>
 </p188:cmLst>
-</file>
-
-<file path=ppt/drawings/drawing1.xml><?xml version="1.0" encoding="utf-8"?>
-<c:userShapes xmlns:c="http://schemas.openxmlformats.org/drawingml/2006/chart">
-  <cdr:relSizeAnchor xmlns:cdr="http://schemas.openxmlformats.org/drawingml/2006/chartDrawing">
-    <cdr:from>
-      <cdr:x>0.33708</cdr:x>
-      <cdr:y>0.10278</cdr:y>
-    </cdr:from>
-    <cdr:to>
-      <cdr:x>0.99713</cdr:x>
-      <cdr:y>1</cdr:y>
-    </cdr:to>
-    <cdr:pic>
-      <cdr:nvPicPr>
-        <cdr:cNvPr id="2" name="chart">
-          <a:extLst xmlns:a="http://schemas.openxmlformats.org/drawingml/2006/main">
-            <a:ext uri="{FF2B5EF4-FFF2-40B4-BE49-F238E27FC236}">
-              <a16:creationId xmlns:a16="http://schemas.microsoft.com/office/drawing/2014/main" id="{21F1B86A-5AA5-F0EB-B73E-8EDADE16250D}"/>
-            </a:ext>
-          </a:extLst>
-        </cdr:cNvPr>
-        <cdr:cNvPicPr>
-          <a:picLocks xmlns:a="http://schemas.openxmlformats.org/drawingml/2006/main" noChangeAspect="1"/>
-        </cdr:cNvPicPr>
-      </cdr:nvPicPr>
-      <cdr:blipFill>
-        <a:blip xmlns:a="http://schemas.openxmlformats.org/drawingml/2006/main" xmlns:r="http://schemas.openxmlformats.org/officeDocument/2006/relationships" r:embed="rId1"/>
-        <a:stretch xmlns:a="http://schemas.openxmlformats.org/drawingml/2006/main">
-          <a:fillRect/>
-        </a:stretch>
-      </cdr:blipFill>
-      <cdr:spPr>
-        <a:xfrm xmlns:a="http://schemas.openxmlformats.org/drawingml/2006/main">
-          <a:off x="2266722" y="366521"/>
-          <a:ext cx="4438650" cy="3199632"/>
-        </a:xfrm>
-        <a:prstGeom xmlns:a="http://schemas.openxmlformats.org/drawingml/2006/main" prst="rect">
-          <a:avLst/>
-        </a:prstGeom>
-      </cdr:spPr>
-    </cdr:pic>
-  </cdr:relSizeAnchor>
-</c:userShapes>
 </file>
 
 <file path=ppt/notesMasters/notesMaster1.xml><?xml version="1.0" encoding="utf-8"?>
@@ -746,7 +896,13 @@
   <p:cSld>
     <p:spTree>
       <p:nvGrpSpPr>
-        <p:cNvPr id="1" name=""/>
+        <p:cNvPr id="1" name="">
+          <a:extLst>
+            <a:ext uri="{FF2B5EF4-FFF2-40B4-BE49-F238E27FC236}">
+              <a16:creationId xmlns:a16="http://schemas.microsoft.com/office/drawing/2014/main" id="{A08789DA-3D36-C073-04A4-66545F61D161}"/>
+            </a:ext>
+          </a:extLst>
+        </p:cNvPr>
         <p:cNvGrpSpPr/>
         <p:nvPr/>
       </p:nvGrpSpPr>
@@ -760,7 +916,13 @@
       </p:grpSpPr>
       <p:sp>
         <p:nvSpPr>
-          <p:cNvPr id="2" name="Slide Image Placeholder 1"/>
+          <p:cNvPr id="2" name="Slide Image Placeholder 1">
+            <a:extLst>
+              <a:ext uri="{FF2B5EF4-FFF2-40B4-BE49-F238E27FC236}">
+                <a16:creationId xmlns:a16="http://schemas.microsoft.com/office/drawing/2014/main" id="{0DE393B3-26C0-5306-C3F8-D13636A94E9A}"/>
+              </a:ext>
+            </a:extLst>
+          </p:cNvPr>
           <p:cNvSpPr>
             <a:spLocks noGrp="1" noRot="1" noChangeAspect="1"/>
           </p:cNvSpPr>
@@ -772,7 +934,13 @@
       </p:sp>
       <p:sp>
         <p:nvSpPr>
-          <p:cNvPr id="3" name="Notes Placeholder 2"/>
+          <p:cNvPr id="3" name="Notes Placeholder 2">
+            <a:extLst>
+              <a:ext uri="{FF2B5EF4-FFF2-40B4-BE49-F238E27FC236}">
+                <a16:creationId xmlns:a16="http://schemas.microsoft.com/office/drawing/2014/main" id="{E49237AA-83B6-A738-29AF-AF113ECB4097}"/>
+              </a:ext>
+            </a:extLst>
+          </p:cNvPr>
           <p:cNvSpPr>
             <a:spLocks noGrp="1"/>
           </p:cNvSpPr>
@@ -787,14 +955,20 @@
           <a:p>
             <a:r>
               <a:rPr lang="en-US" dirty="0"/>
-              <a:t>[5:00–5:40] We ask for €220,000 for the first 12 months with a team of four on €2,500 a month each. Year one costs about €228,000; we expect about €11,000 of revenue. Two thirds goes to the team, then contingency, setup and legal, marketing and events. Hosting and AI is only €2,000. The milestones: 20 pilots in December, paid launch in June, 400 paying users by October 2027, then the team plan and Austria and Switzerland in 2028. Break-even is about 2,100 paying users. AGREE BEFOREHAND which four people are paid and stay on full-time; investors will ask.</a:t>
+              <a:t>[4:25–5:00] FILL THE BRACKETS FROM THE SURVEY BEFORE PRESENTING, and never round up. Say plainly: 10 people we know, a first signal, not proof. Then the plan: 20 pilot users in December, paid launch in June, 400 paying users by October 2027. That is about €11,000 of revenue in year one and a €43,000 yearly run-rate at the end (400 × €108). With 19 free users per payer we carry about 8,000 users in total.</a:t>
             </a:r>
           </a:p>
         </p:txBody>
       </p:sp>
       <p:sp>
         <p:nvSpPr>
-          <p:cNvPr id="4" name="Slide Number Placeholder 3"/>
+          <p:cNvPr id="4" name="Slide Number Placeholder 3">
+            <a:extLst>
+              <a:ext uri="{FF2B5EF4-FFF2-40B4-BE49-F238E27FC236}">
+                <a16:creationId xmlns:a16="http://schemas.microsoft.com/office/drawing/2014/main" id="{6241B818-44E8-98B3-DA47-1DC1B7DF950B}"/>
+              </a:ext>
+            </a:extLst>
+          </p:cNvPr>
           <p:cNvSpPr>
             <a:spLocks noGrp="1"/>
           </p:cNvSpPr>
@@ -818,7 +992,7 @@
     </p:spTree>
     <p:extLst>
       <p:ext uri="{BB962C8B-B14F-4D97-AF65-F5344CB8AC3E}">
-        <p14:creationId xmlns:p14="http://schemas.microsoft.com/office/powerpoint/2010/main" val="1024086991"/>
+        <p14:creationId xmlns:p14="http://schemas.microsoft.com/office/powerpoint/2010/main" val="889934489"/>
       </p:ext>
     </p:extLst>
   </p:cSld>
@@ -833,7 +1007,13 @@
   <p:cSld>
     <p:spTree>
       <p:nvGrpSpPr>
-        <p:cNvPr id="1" name=""/>
+        <p:cNvPr id="1" name="">
+          <a:extLst>
+            <a:ext uri="{FF2B5EF4-FFF2-40B4-BE49-F238E27FC236}">
+              <a16:creationId xmlns:a16="http://schemas.microsoft.com/office/drawing/2014/main" id="{BEF4D9F6-DA11-5D35-3C6B-8AC54583FB88}"/>
+            </a:ext>
+          </a:extLst>
+        </p:cNvPr>
         <p:cNvGrpSpPr/>
         <p:nvPr/>
       </p:nvGrpSpPr>
@@ -847,7 +1027,13 @@
       </p:grpSpPr>
       <p:sp>
         <p:nvSpPr>
-          <p:cNvPr id="2" name="Slide Image Placeholder 1"/>
+          <p:cNvPr id="2" name="Slide Image Placeholder 1">
+            <a:extLst>
+              <a:ext uri="{FF2B5EF4-FFF2-40B4-BE49-F238E27FC236}">
+                <a16:creationId xmlns:a16="http://schemas.microsoft.com/office/drawing/2014/main" id="{0A0B8B03-67D9-93B6-7902-9E7A38012FF7}"/>
+              </a:ext>
+            </a:extLst>
+          </p:cNvPr>
           <p:cNvSpPr>
             <a:spLocks noGrp="1" noRot="1" noChangeAspect="1"/>
           </p:cNvSpPr>
@@ -859,7 +1045,13 @@
       </p:sp>
       <p:sp>
         <p:nvSpPr>
-          <p:cNvPr id="3" name="Notes Placeholder 2"/>
+          <p:cNvPr id="3" name="Notes Placeholder 2">
+            <a:extLst>
+              <a:ext uri="{FF2B5EF4-FFF2-40B4-BE49-F238E27FC236}">
+                <a16:creationId xmlns:a16="http://schemas.microsoft.com/office/drawing/2014/main" id="{E121209B-7A0D-1C5A-8EEA-D35EBB60D340}"/>
+              </a:ext>
+            </a:extLst>
+          </p:cNvPr>
           <p:cNvSpPr>
             <a:spLocks noGrp="1"/>
           </p:cNvSpPr>
@@ -874,14 +1066,20 @@
           <a:p>
             <a:r>
               <a:rPr lang="en-US" dirty="0"/>
-              <a:t>[5:40–6:15] Be honest here, it wins trust: Popl, folk and Blinq already offer AI voice notes, and folk and Popl give next steps. What none of them does is match a new contact to the projects you are actually working on. Our biggest competitor is free: LinkedIn plus a notes app. We win only by saving real time after every event. Re-check Dex and Popl the morning of the pitch for new features.</a:t>
+              <a:t>[4:25–5:00] FILL THE BRACKETS FROM THE SURVEY BEFORE PRESENTING, and never round up. Say plainly: 10 people we know, a first signal, not proof. Then the plan: 20 pilot users in December, paid launch in June, 400 paying users by October 2027. That is about €11,000 of revenue in year one and a €43,000 yearly run-rate at the end (400 × €108). With 19 free users per payer we carry about 8,000 users in total.</a:t>
             </a:r>
           </a:p>
         </p:txBody>
       </p:sp>
       <p:sp>
         <p:nvSpPr>
-          <p:cNvPr id="4" name="Slide Number Placeholder 3"/>
+          <p:cNvPr id="4" name="Slide Number Placeholder 3">
+            <a:extLst>
+              <a:ext uri="{FF2B5EF4-FFF2-40B4-BE49-F238E27FC236}">
+                <a16:creationId xmlns:a16="http://schemas.microsoft.com/office/drawing/2014/main" id="{D2D8F3B8-4C97-C5B1-D944-69486A6655D4}"/>
+              </a:ext>
+            </a:extLst>
+          </p:cNvPr>
           <p:cNvSpPr>
             <a:spLocks noGrp="1"/>
           </p:cNvSpPr>
@@ -896,7 +1094,7 @@
           <a:p>
             <a:fld id="{F7021451-1387-4CA6-816F-3879F97B5CBC}" type="slidenum">
               <a:rPr lang="en-US"/>
-              <a:t>12</a:t>
+              <a:t>11</a:t>
             </a:fld>
             <a:endParaRPr lang="en-US"/>
           </a:p>
@@ -905,7 +1103,7 @@
     </p:spTree>
     <p:extLst>
       <p:ext uri="{BB962C8B-B14F-4D97-AF65-F5344CB8AC3E}">
-        <p14:creationId xmlns:p14="http://schemas.microsoft.com/office/powerpoint/2010/main" val="1024086991"/>
+        <p14:creationId xmlns:p14="http://schemas.microsoft.com/office/powerpoint/2010/main" val="4128483317"/>
       </p:ext>
     </p:extLst>
   </p:cSld>
@@ -961,7 +1159,7 @@
           <a:p>
             <a:r>
               <a:rPr lang="en-US" dirty="0"/>
-              <a:t>[6:15–6:35] Free gets people to the first event: one event and up to 25 contacts a month. Pro is €9 a month, €108 a year, with unlimited contacts and the Notion project matching. The team plan at €19 a seat comes in 2028. One won client project of €5,000 pays for 46 years of Pro.</a:t>
+              <a:t>[5:00–5:40] We ask for €220,000 for the first 12 months with a team of four on €2,500 a month each. Year one costs about €228,000; we expect about €11,000 of revenue. Two thirds goes to the team, then contingency, setup and legal, marketing and events. Hosting and AI is only €2,000. The milestones: 20 pilots in December, paid launch in June, 400 paying users by October 2027, then the team plan and Austria and Switzerland in 2028. Break-even is about 2,100 paying users. AGREE BEFOREHAND which four people are paid and stay on full-time; investors will ask.</a:t>
             </a:r>
           </a:p>
         </p:txBody>
@@ -983,7 +1181,7 @@
           <a:p>
             <a:fld id="{F7021451-1387-4CA6-816F-3879F97B5CBC}" type="slidenum">
               <a:rPr lang="en-US"/>
-              <a:t>13</a:t>
+              <a:t>12</a:t>
             </a:fld>
             <a:endParaRPr lang="en-US"/>
           </a:p>
@@ -1048,7 +1246,7 @@
           <a:p>
             <a:r>
               <a:rPr lang="en-US" dirty="0"/>
-              <a:t>[6:35–7:05] Each paying user brings €108 a year. Serving them costs about €13 at 1,000 users, even with AI budgeted at ten times the list price and the free users they bring. That is 88% gross margin from 1,000 users on. At our year-one target of 400 paying users we sit between 81% and 87%, with about 8,000 users in total. Most of the €13 is Stripe fees on monthly billing and the free users, not our own AI.</a:t>
+              <a:t>[5:40–6:15] Be honest here, it wins trust: Popl, folk and Blinq already offer AI voice notes, and folk and Popl give next steps. What none of them does is match a new contact to the projects you are actually working on. Our biggest competitor is free: LinkedIn plus a notes app. We win only by saving real time after every event. Re-check Dex and Popl the morning of the pitch for new features.</a:t>
             </a:r>
           </a:p>
         </p:txBody>
@@ -1135,7 +1333,7 @@
           <a:p>
             <a:r>
               <a:rPr lang="en-US" dirty="0"/>
-              <a:t>[7:05–7:40] Three scenarios for where we are in year three. Conservative: 3,000 paying users in Germany, €324,000 a year. Base: 9,000 users across DACH once we add Google Drive and Sheets, about €970,000. Upside: 20,000 users with EU expansion, €2.16 million. Break-even is about 2,100 paying users, so even the conservative case clears it. These are model outputs, not forecasts.</a:t>
+              <a:t>[6:15–6:35] Free gets people to the first event: one event and up to 25 contacts a month. Pro is €9 a month, €108 a year, with unlimited contacts and the Notion project matching. The team plan at €19 a seat comes in 2028. One won client project of €5,000 pays for 46 years of Pro.</a:t>
             </a:r>
           </a:p>
         </p:txBody>
@@ -1222,7 +1420,7 @@
           <a:p>
             <a:r>
               <a:rPr lang="en-US" dirty="0"/>
-              <a:t>[7:40–8:00] Close on the motto and the ask in one line: "€220,000 to prove consultants pay for a follow-up that knows their projects." Then stop and take questions. Likely questions: why €9, what stops folk or Popl adding project matching, what the survey showed, and who stays full-time.</a:t>
+              <a:t>[6:35–7:05] Each paying user brings €108 a year. Serving them costs about €13 at 1,000 users, even with AI budgeted at ten times the list price and the free users they bring. That is 88% gross margin from 1,000 users on. At our year-one target of 400 paying users we sit between 81% and 87%, with about 8,000 users in total. Most of the €13 is Stripe fees on monthly billing and the free users, not our own AI.</a:t>
             </a:r>
           </a:p>
         </p:txBody>
@@ -1245,6 +1443,180 @@
             <a:fld id="{F7021451-1387-4CA6-816F-3879F97B5CBC}" type="slidenum">
               <a:rPr lang="en-US"/>
               <a:t>16</a:t>
+            </a:fld>
+            <a:endParaRPr lang="en-US"/>
+          </a:p>
+        </p:txBody>
+      </p:sp>
+    </p:spTree>
+    <p:extLst>
+      <p:ext uri="{BB962C8B-B14F-4D97-AF65-F5344CB8AC3E}">
+        <p14:creationId xmlns:p14="http://schemas.microsoft.com/office/powerpoint/2010/main" val="1024086991"/>
+      </p:ext>
+    </p:extLst>
+  </p:cSld>
+  <p:clrMapOvr>
+    <a:masterClrMapping/>
+  </p:clrMapOvr>
+</p:notes>
+</file>
+
+<file path=ppt/notesSlides/notesSlide16.xml><?xml version="1.0" encoding="utf-8"?>
+<p:notes xmlns:a="http://schemas.openxmlformats.org/drawingml/2006/main" xmlns:r="http://schemas.openxmlformats.org/officeDocument/2006/relationships" xmlns:p="http://schemas.openxmlformats.org/presentationml/2006/main">
+  <p:cSld>
+    <p:spTree>
+      <p:nvGrpSpPr>
+        <p:cNvPr id="1" name=""/>
+        <p:cNvGrpSpPr/>
+        <p:nvPr/>
+      </p:nvGrpSpPr>
+      <p:grpSpPr>
+        <a:xfrm>
+          <a:off x="0" y="0"/>
+          <a:ext cx="0" cy="0"/>
+          <a:chOff x="0" y="0"/>
+          <a:chExt cx="0" cy="0"/>
+        </a:xfrm>
+      </p:grpSpPr>
+      <p:sp>
+        <p:nvSpPr>
+          <p:cNvPr id="2" name="Slide Image Placeholder 1"/>
+          <p:cNvSpPr>
+            <a:spLocks noGrp="1" noRot="1" noChangeAspect="1"/>
+          </p:cNvSpPr>
+          <p:nvPr>
+            <p:ph type="sldImg"/>
+          </p:nvPr>
+        </p:nvSpPr>
+        <p:spPr/>
+      </p:sp>
+      <p:sp>
+        <p:nvSpPr>
+          <p:cNvPr id="3" name="Notes Placeholder 2"/>
+          <p:cNvSpPr>
+            <a:spLocks noGrp="1"/>
+          </p:cNvSpPr>
+          <p:nvPr>
+            <p:ph type="body" idx="1"/>
+          </p:nvPr>
+        </p:nvSpPr>
+        <p:spPr/>
+        <p:txBody>
+          <a:bodyPr/>
+          <a:lstStyle/>
+          <a:p>
+            <a:r>
+              <a:rPr lang="en-US" dirty="0"/>
+              <a:t>[7:05–7:40] Three scenarios for where we are in year three. Conservative: 3,000 paying users in Germany, €324,000 a year. Base: 9,000 users across DACH once we add Google Drive and Sheets, about €970,000. Upside: 20,000 users with EU expansion, €2.16 million. Break-even is about 2,100 paying users, so even the conservative case clears it. These are model outputs, not forecasts.</a:t>
+            </a:r>
+          </a:p>
+        </p:txBody>
+      </p:sp>
+      <p:sp>
+        <p:nvSpPr>
+          <p:cNvPr id="4" name="Slide Number Placeholder 3"/>
+          <p:cNvSpPr>
+            <a:spLocks noGrp="1"/>
+          </p:cNvSpPr>
+          <p:nvPr>
+            <p:ph type="sldNum" sz="quarter" idx="10"/>
+          </p:nvPr>
+        </p:nvSpPr>
+        <p:spPr/>
+        <p:txBody>
+          <a:bodyPr/>
+          <a:lstStyle/>
+          <a:p>
+            <a:fld id="{F7021451-1387-4CA6-816F-3879F97B5CBC}" type="slidenum">
+              <a:rPr lang="en-US"/>
+              <a:t>17</a:t>
+            </a:fld>
+            <a:endParaRPr lang="en-US"/>
+          </a:p>
+        </p:txBody>
+      </p:sp>
+    </p:spTree>
+    <p:extLst>
+      <p:ext uri="{BB962C8B-B14F-4D97-AF65-F5344CB8AC3E}">
+        <p14:creationId xmlns:p14="http://schemas.microsoft.com/office/powerpoint/2010/main" val="1024086991"/>
+      </p:ext>
+    </p:extLst>
+  </p:cSld>
+  <p:clrMapOvr>
+    <a:masterClrMapping/>
+  </p:clrMapOvr>
+</p:notes>
+</file>
+
+<file path=ppt/notesSlides/notesSlide17.xml><?xml version="1.0" encoding="utf-8"?>
+<p:notes xmlns:a="http://schemas.openxmlformats.org/drawingml/2006/main" xmlns:r="http://schemas.openxmlformats.org/officeDocument/2006/relationships" xmlns:p="http://schemas.openxmlformats.org/presentationml/2006/main">
+  <p:cSld>
+    <p:spTree>
+      <p:nvGrpSpPr>
+        <p:cNvPr id="1" name=""/>
+        <p:cNvGrpSpPr/>
+        <p:nvPr/>
+      </p:nvGrpSpPr>
+      <p:grpSpPr>
+        <a:xfrm>
+          <a:off x="0" y="0"/>
+          <a:ext cx="0" cy="0"/>
+          <a:chOff x="0" y="0"/>
+          <a:chExt cx="0" cy="0"/>
+        </a:xfrm>
+      </p:grpSpPr>
+      <p:sp>
+        <p:nvSpPr>
+          <p:cNvPr id="2" name="Slide Image Placeholder 1"/>
+          <p:cNvSpPr>
+            <a:spLocks noGrp="1" noRot="1" noChangeAspect="1"/>
+          </p:cNvSpPr>
+          <p:nvPr>
+            <p:ph type="sldImg"/>
+          </p:nvPr>
+        </p:nvSpPr>
+        <p:spPr/>
+      </p:sp>
+      <p:sp>
+        <p:nvSpPr>
+          <p:cNvPr id="3" name="Notes Placeholder 2"/>
+          <p:cNvSpPr>
+            <a:spLocks noGrp="1"/>
+          </p:cNvSpPr>
+          <p:nvPr>
+            <p:ph type="body" idx="1"/>
+          </p:nvPr>
+        </p:nvSpPr>
+        <p:spPr/>
+        <p:txBody>
+          <a:bodyPr/>
+          <a:lstStyle/>
+          <a:p>
+            <a:r>
+              <a:rPr lang="en-US" dirty="0"/>
+              <a:t>[7:40–8:00] Close on the motto and the ask in one line: "€220,000 to prove consultants pay for a follow-up that knows their projects." Then stop and take questions. Likely questions: why €9, what stops folk or Popl adding project matching, what the survey showed, and who stays full-time.</a:t>
+            </a:r>
+          </a:p>
+        </p:txBody>
+      </p:sp>
+      <p:sp>
+        <p:nvSpPr>
+          <p:cNvPr id="4" name="Slide Number Placeholder 3"/>
+          <p:cNvSpPr>
+            <a:spLocks noGrp="1"/>
+          </p:cNvSpPr>
+          <p:nvPr>
+            <p:ph type="sldNum" sz="quarter" idx="10"/>
+          </p:nvPr>
+        </p:nvSpPr>
+        <p:spPr/>
+        <p:txBody>
+          <a:bodyPr/>
+          <a:lstStyle/>
+          <a:p>
+            <a:fld id="{F7021451-1387-4CA6-816F-3879F97B5CBC}" type="slidenum">
+              <a:rPr lang="en-US"/>
+              <a:t>18</a:t>
             </a:fld>
             <a:endParaRPr lang="en-US"/>
           </a:p>
@@ -1828,7 +2200,13 @@
   <p:cSld>
     <p:spTree>
       <p:nvGrpSpPr>
-        <p:cNvPr id="1" name=""/>
+        <p:cNvPr id="1" name="">
+          <a:extLst>
+            <a:ext uri="{FF2B5EF4-FFF2-40B4-BE49-F238E27FC236}">
+              <a16:creationId xmlns:a16="http://schemas.microsoft.com/office/drawing/2014/main" id="{DE13011B-0CB7-0074-0D04-29230C023362}"/>
+            </a:ext>
+          </a:extLst>
+        </p:cNvPr>
         <p:cNvGrpSpPr/>
         <p:nvPr/>
       </p:nvGrpSpPr>
@@ -1842,7 +2220,13 @@
       </p:grpSpPr>
       <p:sp>
         <p:nvSpPr>
-          <p:cNvPr id="2" name="Slide Image Placeholder 1"/>
+          <p:cNvPr id="2" name="Slide Image Placeholder 1">
+            <a:extLst>
+              <a:ext uri="{FF2B5EF4-FFF2-40B4-BE49-F238E27FC236}">
+                <a16:creationId xmlns:a16="http://schemas.microsoft.com/office/drawing/2014/main" id="{8003A807-EAFD-2D04-37E7-A36E3610964A}"/>
+              </a:ext>
+            </a:extLst>
+          </p:cNvPr>
           <p:cNvSpPr>
             <a:spLocks noGrp="1" noRot="1" noChangeAspect="1"/>
           </p:cNvSpPr>
@@ -1854,7 +2238,13 @@
       </p:sp>
       <p:sp>
         <p:nvSpPr>
-          <p:cNvPr id="3" name="Notes Placeholder 2"/>
+          <p:cNvPr id="3" name="Notes Placeholder 2">
+            <a:extLst>
+              <a:ext uri="{FF2B5EF4-FFF2-40B4-BE49-F238E27FC236}">
+                <a16:creationId xmlns:a16="http://schemas.microsoft.com/office/drawing/2014/main" id="{22F762A7-BB84-B146-0437-8433093C6929}"/>
+              </a:ext>
+            </a:extLst>
+          </p:cNvPr>
           <p:cNvSpPr>
             <a:spLocks noGrp="1"/>
           </p:cNvSpPr>
@@ -1869,14 +2259,20 @@
           <a:p>
             <a:r>
               <a:rPr lang="en-US" dirty="0"/>
-              <a:t>[4:25–5:00] FILL THE BRACKETS FROM THE SURVEY BEFORE PRESENTING, and never round up. Say plainly: 10 people we know, a first signal, not proof. Then the plan: 20 pilot users in December, paid launch in June, 400 paying users by October 2027. That is about €11,000 of revenue in year one and a €43,000 yearly run-rate at the end (400 × €108). With 19 free users per payer we carry about 8,000 users in total.</a:t>
+              <a:t>[3:50–4:25] Every contact makes three AI calls: transcription, summary, and the project match with the follow-up draft. At today’s list prices that is $0.00053 for a full 60-second memo. A paying customer with 200 contacts a year costs about 11 cents in AI. Fixed services are about $550 a year, and Supabase Pro carries up to 100,000 monthly active users. In the business plan we budget €2,000 for hosting and AI in year one, with a 10× buffer, against about €11,000 of revenue. Running cost is not our risk.</a:t>
             </a:r>
           </a:p>
         </p:txBody>
       </p:sp>
       <p:sp>
         <p:nvSpPr>
-          <p:cNvPr id="4" name="Slide Number Placeholder 3"/>
+          <p:cNvPr id="4" name="Slide Number Placeholder 3">
+            <a:extLst>
+              <a:ext uri="{FF2B5EF4-FFF2-40B4-BE49-F238E27FC236}">
+                <a16:creationId xmlns:a16="http://schemas.microsoft.com/office/drawing/2014/main" id="{04631117-567C-B56B-1ABE-08D2DE628BE4}"/>
+              </a:ext>
+            </a:extLst>
+          </p:cNvPr>
           <p:cNvSpPr>
             <a:spLocks noGrp="1"/>
           </p:cNvSpPr>
@@ -1900,7 +2296,7 @@
     </p:spTree>
     <p:extLst>
       <p:ext uri="{BB962C8B-B14F-4D97-AF65-F5344CB8AC3E}">
-        <p14:creationId xmlns:p14="http://schemas.microsoft.com/office/powerpoint/2010/main" val="1024086991"/>
+        <p14:creationId xmlns:p14="http://schemas.microsoft.com/office/powerpoint/2010/main" val="3102033358"/>
       </p:ext>
     </p:extLst>
   </p:cSld>
@@ -1915,13 +2311,7 @@
   <p:cSld>
     <p:spTree>
       <p:nvGrpSpPr>
-        <p:cNvPr id="1" name="">
-          <a:extLst>
-            <a:ext uri="{FF2B5EF4-FFF2-40B4-BE49-F238E27FC236}">
-              <a16:creationId xmlns:a16="http://schemas.microsoft.com/office/drawing/2014/main" id="{A08789DA-3D36-C073-04A4-66545F61D161}"/>
-            </a:ext>
-          </a:extLst>
-        </p:cNvPr>
+        <p:cNvPr id="1" name=""/>
         <p:cNvGrpSpPr/>
         <p:nvPr/>
       </p:nvGrpSpPr>
@@ -1935,13 +2325,7 @@
       </p:grpSpPr>
       <p:sp>
         <p:nvSpPr>
-          <p:cNvPr id="2" name="Slide Image Placeholder 1">
-            <a:extLst>
-              <a:ext uri="{FF2B5EF4-FFF2-40B4-BE49-F238E27FC236}">
-                <a16:creationId xmlns:a16="http://schemas.microsoft.com/office/drawing/2014/main" id="{0DE393B3-26C0-5306-C3F8-D13636A94E9A}"/>
-              </a:ext>
-            </a:extLst>
-          </p:cNvPr>
+          <p:cNvPr id="2" name="Slide Image Placeholder 1"/>
           <p:cNvSpPr>
             <a:spLocks noGrp="1" noRot="1" noChangeAspect="1"/>
           </p:cNvSpPr>
@@ -1953,13 +2337,7 @@
       </p:sp>
       <p:sp>
         <p:nvSpPr>
-          <p:cNvPr id="3" name="Notes Placeholder 2">
-            <a:extLst>
-              <a:ext uri="{FF2B5EF4-FFF2-40B4-BE49-F238E27FC236}">
-                <a16:creationId xmlns:a16="http://schemas.microsoft.com/office/drawing/2014/main" id="{E49237AA-83B6-A738-29AF-AF113ECB4097}"/>
-              </a:ext>
-            </a:extLst>
-          </p:cNvPr>
+          <p:cNvPr id="3" name="Notes Placeholder 2"/>
           <p:cNvSpPr>
             <a:spLocks noGrp="1"/>
           </p:cNvSpPr>
@@ -1981,13 +2359,7 @@
       </p:sp>
       <p:sp>
         <p:nvSpPr>
-          <p:cNvPr id="4" name="Slide Number Placeholder 3">
-            <a:extLst>
-              <a:ext uri="{FF2B5EF4-FFF2-40B4-BE49-F238E27FC236}">
-                <a16:creationId xmlns:a16="http://schemas.microsoft.com/office/drawing/2014/main" id="{6241B818-44E8-98B3-DA47-1DC1B7DF950B}"/>
-              </a:ext>
-            </a:extLst>
-          </p:cNvPr>
+          <p:cNvPr id="4" name="Slide Number Placeholder 3"/>
           <p:cNvSpPr>
             <a:spLocks noGrp="1"/>
           </p:cNvSpPr>
@@ -2011,7 +2383,7 @@
     </p:spTree>
     <p:extLst>
       <p:ext uri="{BB962C8B-B14F-4D97-AF65-F5344CB8AC3E}">
-        <p14:creationId xmlns:p14="http://schemas.microsoft.com/office/powerpoint/2010/main" val="889934489"/>
+        <p14:creationId xmlns:p14="http://schemas.microsoft.com/office/powerpoint/2010/main" val="1024086991"/>
       </p:ext>
     </p:extLst>
   </p:cSld>
@@ -2140,7 +2512,7 @@
           </a:prstGeom>
           <a:extLst>
             <a:ext uri="{C572A759-6A51-4108-AA02-DFA0A04FC94B}">
-              <ma14:wrappingTextBoxFlag xmlns="" xmlns:ma14="http://schemas.microsoft.com/office/mac/drawingml/2011/main" val="0"/>
+              <ma14:wrappingTextBoxFlag xmlns:ma14="http://schemas.microsoft.com/office/mac/drawingml/2011/main" xmlns="" val="0"/>
             </a:ext>
           </a:extLst>
         </p:spPr>
@@ -2265,7 +2637,7 @@
           </a:prstGeom>
           <a:extLst>
             <a:ext uri="{C572A759-6A51-4108-AA02-DFA0A04FC94B}">
-              <ma14:wrappingTextBoxFlag xmlns="" xmlns:ma14="http://schemas.microsoft.com/office/mac/drawingml/2011/main" val="0"/>
+              <ma14:wrappingTextBoxFlag xmlns:ma14="http://schemas.microsoft.com/office/mac/drawingml/2011/main" xmlns="" val="0"/>
             </a:ext>
           </a:extLst>
         </p:spPr>
@@ -2390,7 +2762,7 @@
           </a:prstGeom>
           <a:extLst>
             <a:ext uri="{C572A759-6A51-4108-AA02-DFA0A04FC94B}">
-              <ma14:wrappingTextBoxFlag xmlns="" xmlns:ma14="http://schemas.microsoft.com/office/mac/drawingml/2011/main" val="0"/>
+              <ma14:wrappingTextBoxFlag xmlns:ma14="http://schemas.microsoft.com/office/mac/drawingml/2011/main" xmlns="" val="0"/>
             </a:ext>
           </a:extLst>
         </p:spPr>
@@ -2494,7 +2866,7 @@
             <a:fld id="{1D8BD707-D9CF-40AE-B4C6-C98DA3205C09}" type="datetimeFigureOut">
               <a:rPr lang="en-US" smtClean="0"/>
               <a:pPr/>
-              <a:t>10/25/26</a:t>
+              <a:t>10/25/2026</a:t>
             </a:fld>
             <a:endParaRPr lang="en-US"/>
           </a:p>
@@ -2598,7 +2970,7 @@
           </a:prstGeom>
           <a:extLst>
             <a:ext uri="{C572A759-6A51-4108-AA02-DFA0A04FC94B}">
-              <ma14:wrappingTextBoxFlag xmlns="" xmlns:ma14="http://schemas.microsoft.com/office/mac/drawingml/2011/main" val="0"/>
+              <ma14:wrappingTextBoxFlag xmlns:ma14="http://schemas.microsoft.com/office/mac/drawingml/2011/main" xmlns="" val="0"/>
             </a:ext>
           </a:extLst>
         </p:spPr>
@@ -3668,10 +4040,24 @@
 
 <file path=ppt/slides/slide10.xml><?xml version="1.0" encoding="utf-8"?>
 <p:sld xmlns:a="http://schemas.openxmlformats.org/drawingml/2006/main" xmlns:r="http://schemas.openxmlformats.org/officeDocument/2006/relationships" xmlns:p="http://schemas.openxmlformats.org/presentationml/2006/main">
-  <p:cSld name="Slide 8">
+  <p:cSld>
+    <p:bg>
+      <p:bgPr>
+        <a:solidFill>
+          <a:srgbClr val="15110E"/>
+        </a:solidFill>
+        <a:effectLst/>
+      </p:bgPr>
+    </p:bg>
     <p:spTree>
       <p:nvGrpSpPr>
-        <p:cNvPr id="1" name=""/>
+        <p:cNvPr id="1" name="">
+          <a:extLst>
+            <a:ext uri="{FF2B5EF4-FFF2-40B4-BE49-F238E27FC236}">
+              <a16:creationId xmlns:a16="http://schemas.microsoft.com/office/drawing/2014/main" id="{AD68547D-2975-B7FF-B6E9-ADAE8BA7CF08}"/>
+            </a:ext>
+          </a:extLst>
+        </p:cNvPr>
         <p:cNvGrpSpPr/>
         <p:nvPr/>
       </p:nvGrpSpPr>
@@ -3685,10 +4071,931 @@
       </p:grpSpPr>
       <p:sp>
         <p:nvSpPr>
-          <p:cNvPr id="17" name="Conservative scenario">
+          <p:cNvPr id="2" name="Kicker">
             <a:extLst>
               <a:ext uri="{FF2B5EF4-FFF2-40B4-BE49-F238E27FC236}">
-                <a16:creationId xmlns:a16="http://schemas.microsoft.com/office/drawing/2014/main" id="{130D24D6-F882-0738-E3C0-2A15D11E26A3}"/>
+                <a16:creationId xmlns:a16="http://schemas.microsoft.com/office/drawing/2014/main" id="{BEE17435-07DA-3579-D90E-321C3594A8DA}"/>
+              </a:ext>
+            </a:extLst>
+          </p:cNvPr>
+          <p:cNvSpPr txBox="1"/>
+          <p:nvPr/>
+        </p:nvSpPr>
+        <p:spPr>
+          <a:xfrm>
+            <a:off x="548640" y="384048"/>
+            <a:ext cx="8229600" cy="274320"/>
+          </a:xfrm>
+          <a:prstGeom prst="rect">
+            <a:avLst/>
+          </a:prstGeom>
+          <a:noFill/>
+          <a:ln/>
+        </p:spPr>
+        <p:txBody>
+          <a:bodyPr wrap="square" lIns="0" tIns="0" rIns="0" bIns="0" rtlCol="0" anchor="t"/>
+          <a:lstStyle/>
+          <a:p>
+            <a:pPr marL="0" indent="0">
+              <a:buNone/>
+            </a:pPr>
+            <a:r>
+              <a:rPr lang="en-US" sz="3200" b="1" kern="0" spc="200" dirty="0">
+                <a:solidFill>
+                  <a:schemeClr val="accent1"/>
+                </a:solidFill>
+                <a:latin typeface="DM Sans" pitchFamily="34" charset="0"/>
+                <a:ea typeface="DM Sans" pitchFamily="34" charset="-122"/>
+                <a:cs typeface="DM Sans" pitchFamily="34" charset="-120"/>
+              </a:rPr>
+              <a:t>FUNDING</a:t>
+            </a:r>
+            <a:endParaRPr lang="en-US" sz="3200" dirty="0"/>
+          </a:p>
+        </p:txBody>
+      </p:sp>
+      <p:grpSp>
+        <p:nvGrpSpPr>
+          <p:cNvPr id="37" name="Group 36">
+            <a:extLst>
+              <a:ext uri="{FF2B5EF4-FFF2-40B4-BE49-F238E27FC236}">
+                <a16:creationId xmlns:a16="http://schemas.microsoft.com/office/drawing/2014/main" id="{5E75DF22-ED29-E8E8-B3A9-E43C4605DE30}"/>
+              </a:ext>
+            </a:extLst>
+          </p:cNvPr>
+          <p:cNvGrpSpPr/>
+          <p:nvPr/>
+        </p:nvGrpSpPr>
+        <p:grpSpPr>
+          <a:xfrm>
+            <a:off x="7244182" y="884190"/>
+            <a:ext cx="1534058" cy="1508760"/>
+            <a:chOff x="5027143" y="1254073"/>
+            <a:chExt cx="1534058" cy="1508760"/>
+          </a:xfrm>
+        </p:grpSpPr>
+        <p:sp>
+          <p:nvSpPr>
+            <p:cNvPr id="21" name="Text 19">
+              <a:extLst>
+                <a:ext uri="{FF2B5EF4-FFF2-40B4-BE49-F238E27FC236}">
+                  <a16:creationId xmlns:a16="http://schemas.microsoft.com/office/drawing/2014/main" id="{947E5198-72DF-7329-175E-464C2C18E6AE}"/>
+                </a:ext>
+              </a:extLst>
+            </p:cNvPr>
+            <p:cNvSpPr txBox="1"/>
+            <p:nvPr/>
+          </p:nvSpPr>
+          <p:spPr>
+            <a:xfrm>
+              <a:off x="5027143" y="1254073"/>
+              <a:ext cx="1534058" cy="731520"/>
+            </a:xfrm>
+            <a:prstGeom prst="rect">
+              <a:avLst/>
+            </a:prstGeom>
+            <a:noFill/>
+            <a:ln/>
+          </p:spPr>
+          <p:txBody>
+            <a:bodyPr wrap="square" lIns="0" tIns="0" rIns="0" bIns="0" rtlCol="0" anchor="ctr"/>
+            <a:lstStyle/>
+            <a:p>
+              <a:pPr marL="0" indent="0">
+                <a:buNone/>
+              </a:pPr>
+              <a:r>
+                <a:rPr lang="en-US" sz="4800" b="1" dirty="0">
+                  <a:solidFill>
+                    <a:srgbClr val="FFC93C"/>
+                  </a:solidFill>
+                  <a:latin typeface="Oswald" pitchFamily="34" charset="0"/>
+                  <a:ea typeface="Oswald" pitchFamily="34" charset="-122"/>
+                  <a:cs typeface="Oswald" pitchFamily="34" charset="-120"/>
+                </a:rPr>
+                <a:t>€54k</a:t>
+              </a:r>
+              <a:endParaRPr lang="en-US" sz="4800" dirty="0">
+                <a:solidFill>
+                  <a:srgbClr val="FFC93C"/>
+                </a:solidFill>
+              </a:endParaRPr>
+            </a:p>
+          </p:txBody>
+        </p:sp>
+        <p:sp>
+          <p:nvSpPr>
+            <p:cNvPr id="22" name="Text 20">
+              <a:extLst>
+                <a:ext uri="{FF2B5EF4-FFF2-40B4-BE49-F238E27FC236}">
+                  <a16:creationId xmlns:a16="http://schemas.microsoft.com/office/drawing/2014/main" id="{D40342E6-75B2-2006-4E95-54F3AF05081F}"/>
+                </a:ext>
+              </a:extLst>
+            </p:cNvPr>
+            <p:cNvSpPr txBox="1"/>
+            <p:nvPr/>
+          </p:nvSpPr>
+          <p:spPr>
+            <a:xfrm>
+              <a:off x="5027143" y="2031313"/>
+              <a:ext cx="1396898" cy="731520"/>
+            </a:xfrm>
+            <a:prstGeom prst="rect">
+              <a:avLst/>
+            </a:prstGeom>
+            <a:noFill/>
+            <a:ln/>
+          </p:spPr>
+          <p:txBody>
+            <a:bodyPr wrap="square" lIns="0" tIns="0" rIns="0" bIns="0" rtlCol="0" anchor="t"/>
+            <a:lstStyle/>
+            <a:p>
+              <a:pPr marL="0" indent="0">
+                <a:buNone/>
+              </a:pPr>
+              <a:r>
+                <a:rPr lang="en-US" dirty="0">
+                  <a:solidFill>
+                    <a:schemeClr val="accent4"/>
+                  </a:solidFill>
+                  <a:latin typeface="DM Sans" pitchFamily="34" charset="0"/>
+                  <a:ea typeface="DM Sans" pitchFamily="34" charset="-122"/>
+                  <a:cs typeface="DM Sans" pitchFamily="34" charset="-120"/>
+                </a:rPr>
+                <a:t>yearly run-rate at year end</a:t>
+              </a:r>
+              <a:endParaRPr lang="en-US" dirty="0"/>
+            </a:p>
+          </p:txBody>
+        </p:sp>
+      </p:grpSp>
+      <p:grpSp>
+        <p:nvGrpSpPr>
+          <p:cNvPr id="38" name="Group 37">
+            <a:extLst>
+              <a:ext uri="{FF2B5EF4-FFF2-40B4-BE49-F238E27FC236}">
+                <a16:creationId xmlns:a16="http://schemas.microsoft.com/office/drawing/2014/main" id="{2FE0352B-2E5F-EA51-2E1B-0886893B54E0}"/>
+              </a:ext>
+            </a:extLst>
+          </p:cNvPr>
+          <p:cNvGrpSpPr/>
+          <p:nvPr/>
+        </p:nvGrpSpPr>
+        <p:grpSpPr>
+          <a:xfrm>
+            <a:off x="7244182" y="2805147"/>
+            <a:ext cx="1534058" cy="1508760"/>
+            <a:chOff x="6948347" y="1329376"/>
+            <a:chExt cx="1534058" cy="1508760"/>
+          </a:xfrm>
+        </p:grpSpPr>
+        <p:sp>
+          <p:nvSpPr>
+            <p:cNvPr id="23" name="Text 21">
+              <a:extLst>
+                <a:ext uri="{FF2B5EF4-FFF2-40B4-BE49-F238E27FC236}">
+                  <a16:creationId xmlns:a16="http://schemas.microsoft.com/office/drawing/2014/main" id="{DAC75A6F-7C38-8B49-3979-B1D9D9ECD378}"/>
+                </a:ext>
+              </a:extLst>
+            </p:cNvPr>
+            <p:cNvSpPr txBox="1"/>
+            <p:nvPr/>
+          </p:nvSpPr>
+          <p:spPr>
+            <a:xfrm>
+              <a:off x="6948347" y="1329376"/>
+              <a:ext cx="1534058" cy="731520"/>
+            </a:xfrm>
+            <a:prstGeom prst="rect">
+              <a:avLst/>
+            </a:prstGeom>
+            <a:noFill/>
+            <a:ln/>
+          </p:spPr>
+          <p:txBody>
+            <a:bodyPr wrap="square" lIns="0" tIns="0" rIns="0" bIns="0" rtlCol="0" anchor="ctr"/>
+            <a:lstStyle/>
+            <a:p>
+              <a:pPr marL="0" indent="0">
+                <a:buNone/>
+              </a:pPr>
+              <a:r>
+                <a:rPr lang="en-US" sz="4800" b="1" dirty="0">
+                  <a:solidFill>
+                    <a:srgbClr val="FFC93C"/>
+                  </a:solidFill>
+                  <a:latin typeface="Oswald" pitchFamily="34" charset="0"/>
+                  <a:ea typeface="Oswald" pitchFamily="34" charset="-122"/>
+                  <a:cs typeface="Oswald" pitchFamily="34" charset="-120"/>
+                </a:rPr>
+                <a:t>8,000</a:t>
+              </a:r>
+              <a:endParaRPr lang="en-US" sz="4800" dirty="0">
+                <a:solidFill>
+                  <a:srgbClr val="FFC93C"/>
+                </a:solidFill>
+              </a:endParaRPr>
+            </a:p>
+          </p:txBody>
+        </p:sp>
+        <p:sp>
+          <p:nvSpPr>
+            <p:cNvPr id="24" name="Text 22">
+              <a:extLst>
+                <a:ext uri="{FF2B5EF4-FFF2-40B4-BE49-F238E27FC236}">
+                  <a16:creationId xmlns:a16="http://schemas.microsoft.com/office/drawing/2014/main" id="{AD5F89B0-E494-6F82-B365-0743DBC5E9CC}"/>
+                </a:ext>
+              </a:extLst>
+            </p:cNvPr>
+            <p:cNvSpPr txBox="1"/>
+            <p:nvPr/>
+          </p:nvSpPr>
+          <p:spPr>
+            <a:xfrm>
+              <a:off x="6948347" y="2106616"/>
+              <a:ext cx="1396898" cy="731520"/>
+            </a:xfrm>
+            <a:prstGeom prst="rect">
+              <a:avLst/>
+            </a:prstGeom>
+            <a:noFill/>
+            <a:ln/>
+          </p:spPr>
+          <p:txBody>
+            <a:bodyPr wrap="square" lIns="0" tIns="0" rIns="0" bIns="0" rtlCol="0" anchor="t"/>
+            <a:lstStyle/>
+            <a:p>
+              <a:pPr marL="0" indent="0">
+                <a:buNone/>
+              </a:pPr>
+              <a:r>
+                <a:rPr lang="en-US" dirty="0">
+                  <a:solidFill>
+                    <a:schemeClr val="accent4"/>
+                  </a:solidFill>
+                  <a:latin typeface="DM Sans" pitchFamily="34" charset="0"/>
+                  <a:ea typeface="DM Sans" pitchFamily="34" charset="-122"/>
+                  <a:cs typeface="DM Sans" pitchFamily="34" charset="-120"/>
+                </a:rPr>
+                <a:t>users in total, 7,500 of them free</a:t>
+              </a:r>
+              <a:endParaRPr lang="en-US" dirty="0"/>
+            </a:p>
+          </p:txBody>
+        </p:sp>
+      </p:grpSp>
+      <p:sp>
+        <p:nvSpPr>
+          <p:cNvPr id="25" name="Footnote">
+            <a:extLst>
+              <a:ext uri="{FF2B5EF4-FFF2-40B4-BE49-F238E27FC236}">
+                <a16:creationId xmlns:a16="http://schemas.microsoft.com/office/drawing/2014/main" id="{2870B0AD-F44F-4599-F09D-C43F749B2716}"/>
+              </a:ext>
+            </a:extLst>
+          </p:cNvPr>
+          <p:cNvSpPr txBox="1"/>
+          <p:nvPr/>
+        </p:nvSpPr>
+        <p:spPr>
+          <a:xfrm>
+            <a:off x="548640" y="6327648"/>
+            <a:ext cx="10332720" cy="320040"/>
+          </a:xfrm>
+          <a:prstGeom prst="rect">
+            <a:avLst/>
+          </a:prstGeom>
+          <a:noFill/>
+          <a:ln/>
+        </p:spPr>
+        <p:txBody>
+          <a:bodyPr wrap="square" lIns="0" tIns="0" rIns="0" bIns="0" rtlCol="0" anchor="ctr"/>
+          <a:lstStyle/>
+          <a:p>
+            <a:pPr marL="0" indent="0">
+              <a:buNone/>
+            </a:pPr>
+            <a:r>
+              <a:rPr lang="en-US" sz="1050" dirty="0">
+                <a:solidFill>
+                  <a:schemeClr val="accent6"/>
+                </a:solidFill>
+                <a:latin typeface="DM Sans" pitchFamily="34" charset="0"/>
+                <a:ea typeface="DM Sans" pitchFamily="34" charset="-122"/>
+                <a:cs typeface="DM Sans" pitchFamily="34" charset="-120"/>
+              </a:rPr>
+              <a:t>Survey: 10 people we know who go to events, a first signal, not proof. Targets from the Syncy business plan; 19 free users per paying user.</a:t>
+            </a:r>
+            <a:endParaRPr lang="en-US" sz="1050" dirty="0"/>
+          </a:p>
+        </p:txBody>
+      </p:sp>
+      <p:sp>
+        <p:nvSpPr>
+          <p:cNvPr id="26" name="Slide Number Placeholder 0">
+            <a:extLst>
+              <a:ext uri="{FF2B5EF4-FFF2-40B4-BE49-F238E27FC236}">
+                <a16:creationId xmlns:a16="http://schemas.microsoft.com/office/drawing/2014/main" id="{DA93482F-4F39-A73D-5414-5CC38AE145AC}"/>
+              </a:ext>
+            </a:extLst>
+          </p:cNvPr>
+          <p:cNvSpPr>
+            <a:spLocks noGrp="1"/>
+          </p:cNvSpPr>
+          <p:nvPr>
+            <p:ph type="sldNum" sz="quarter" idx="4294967295"/>
+          </p:nvPr>
+        </p:nvSpPr>
+        <p:spPr>
+          <a:xfrm>
+            <a:off x="11201400" y="6355080"/>
+            <a:ext cx="457200" cy="274320"/>
+          </a:xfrm>
+          <a:prstGeom prst="rect">
+            <a:avLst/>
+          </a:prstGeom>
+          <a:extLst>
+            <a:ext uri="{C572A759-6A51-4108-AA02-DFA0A04FC94B}">
+              <ma14:wrappingTextBoxFlag xmlns:ma14="http://schemas.microsoft.com/office/mac/drawingml/2011/main" xmlns="" val="0"/>
+            </a:ext>
+          </a:extLst>
+        </p:spPr>
+        <p:txBody>
+          <a:bodyPr/>
+          <a:lstStyle>
+            <a:lvl1pPr>
+              <a:defRPr sz="1050">
+                <a:solidFill>
+                  <a:schemeClr val="accent6"/>
+                </a:solidFill>
+                <a:latin typeface="DM Sans"/>
+                <a:ea typeface="DM Sans"/>
+                <a:cs typeface="DM Sans"/>
+              </a:defRPr>
+            </a:lvl1pPr>
+          </a:lstStyle>
+          <a:p>
+            <a:pPr algn="r"/>
+            <a:fld id="{F7021451-1387-4CA6-816F-3879F97B5CBC}" type="slidenum">
+              <a:rPr lang="en-US" b="0"/>
+              <a:t>10</a:t>
+            </a:fld>
+            <a:endParaRPr lang="en-US"/>
+          </a:p>
+        </p:txBody>
+      </p:sp>
+      <p:grpSp>
+        <p:nvGrpSpPr>
+          <p:cNvPr id="53" name="Group 52">
+            <a:extLst>
+              <a:ext uri="{FF2B5EF4-FFF2-40B4-BE49-F238E27FC236}">
+                <a16:creationId xmlns:a16="http://schemas.microsoft.com/office/drawing/2014/main" id="{59BD902B-C86D-C528-74AA-124E4B725B12}"/>
+              </a:ext>
+            </a:extLst>
+          </p:cNvPr>
+          <p:cNvGrpSpPr/>
+          <p:nvPr/>
+        </p:nvGrpSpPr>
+        <p:grpSpPr>
+          <a:xfrm>
+            <a:off x="785753" y="5047488"/>
+            <a:ext cx="9832810" cy="978408"/>
+            <a:chOff x="785753" y="5047488"/>
+            <a:chExt cx="9832810" cy="978408"/>
+          </a:xfrm>
+        </p:grpSpPr>
+        <p:grpSp>
+          <p:nvGrpSpPr>
+            <p:cNvPr id="52" name="Group 51">
+              <a:extLst>
+                <a:ext uri="{FF2B5EF4-FFF2-40B4-BE49-F238E27FC236}">
+                  <a16:creationId xmlns:a16="http://schemas.microsoft.com/office/drawing/2014/main" id="{48B28168-1B0D-A678-8C25-7BEEEB4BB97A}"/>
+                </a:ext>
+              </a:extLst>
+            </p:cNvPr>
+            <p:cNvGrpSpPr/>
+            <p:nvPr/>
+          </p:nvGrpSpPr>
+          <p:grpSpPr>
+            <a:xfrm>
+              <a:off x="785753" y="5047488"/>
+              <a:ext cx="1512000" cy="978408"/>
+              <a:chOff x="785753" y="5047488"/>
+              <a:chExt cx="1512000" cy="978408"/>
+            </a:xfrm>
+          </p:grpSpPr>
+          <p:sp>
+            <p:nvSpPr>
+              <p:cNvPr id="4" name="Text 5">
+                <a:extLst>
+                  <a:ext uri="{FF2B5EF4-FFF2-40B4-BE49-F238E27FC236}">
+                    <a16:creationId xmlns:a16="http://schemas.microsoft.com/office/drawing/2014/main" id="{091B9A26-BB46-D639-DB8B-E98518129926}"/>
+                  </a:ext>
+                </a:extLst>
+              </p:cNvPr>
+              <p:cNvSpPr txBox="1"/>
+              <p:nvPr/>
+            </p:nvSpPr>
+            <p:spPr>
+              <a:xfrm>
+                <a:off x="785753" y="5047488"/>
+                <a:ext cx="1512000" cy="320040"/>
+              </a:xfrm>
+              <a:prstGeom prst="rect">
+                <a:avLst/>
+              </a:prstGeom>
+              <a:noFill/>
+              <a:ln/>
+            </p:spPr>
+            <p:txBody>
+              <a:bodyPr wrap="square" lIns="0" tIns="0" rIns="0" bIns="0" rtlCol="0" anchor="t"/>
+              <a:lstStyle/>
+              <a:p>
+                <a:pPr marL="0" indent="0">
+                  <a:buNone/>
+                </a:pPr>
+                <a:r>
+                  <a:rPr lang="en-US" sz="1400" b="1" dirty="0">
+                    <a:solidFill>
+                      <a:schemeClr val="bg1"/>
+                    </a:solidFill>
+                    <a:latin typeface="DM Sans" pitchFamily="34" charset="0"/>
+                    <a:ea typeface="DM Sans" pitchFamily="34" charset="-122"/>
+                    <a:cs typeface="DM Sans" pitchFamily="34" charset="-120"/>
+                  </a:rPr>
+                  <a:t>Dec 2026</a:t>
+                </a:r>
+                <a:endParaRPr lang="en-US" sz="1400" dirty="0">
+                  <a:solidFill>
+                    <a:schemeClr val="bg1"/>
+                  </a:solidFill>
+                </a:endParaRPr>
+              </a:p>
+            </p:txBody>
+          </p:sp>
+          <p:sp>
+            <p:nvSpPr>
+              <p:cNvPr id="6" name="Text 6">
+                <a:extLst>
+                  <a:ext uri="{FF2B5EF4-FFF2-40B4-BE49-F238E27FC236}">
+                    <a16:creationId xmlns:a16="http://schemas.microsoft.com/office/drawing/2014/main" id="{E6C2F3F0-A671-BF06-F955-6C36A2B91256}"/>
+                  </a:ext>
+                </a:extLst>
+              </p:cNvPr>
+              <p:cNvSpPr txBox="1"/>
+              <p:nvPr/>
+            </p:nvSpPr>
+            <p:spPr>
+              <a:xfrm>
+                <a:off x="785753" y="5385816"/>
+                <a:ext cx="1512000" cy="640080"/>
+              </a:xfrm>
+              <a:prstGeom prst="rect">
+                <a:avLst/>
+              </a:prstGeom>
+              <a:noFill/>
+              <a:ln/>
+            </p:spPr>
+            <p:txBody>
+              <a:bodyPr wrap="square" lIns="0" tIns="0" rIns="0" bIns="0" rtlCol="0" anchor="t"/>
+              <a:lstStyle/>
+              <a:p>
+                <a:pPr marL="0" indent="0">
+                  <a:buNone/>
+                </a:pPr>
+                <a:r>
+                  <a:rPr lang="en-US" sz="1600" dirty="0">
+                    <a:solidFill>
+                      <a:schemeClr val="bg1"/>
+                    </a:solidFill>
+                    <a:latin typeface="DM Sans" pitchFamily="34" charset="0"/>
+                    <a:ea typeface="DM Sans" pitchFamily="34" charset="-122"/>
+                    <a:cs typeface="DM Sans" pitchFamily="34" charset="-120"/>
+                  </a:rPr>
+                  <a:t>20 pilot users</a:t>
+                </a:r>
+                <a:endParaRPr lang="en-US" sz="1600" dirty="0">
+                  <a:solidFill>
+                    <a:schemeClr val="bg1"/>
+                  </a:solidFill>
+                </a:endParaRPr>
+              </a:p>
+            </p:txBody>
+          </p:sp>
+        </p:grpSp>
+        <p:grpSp>
+          <p:nvGrpSpPr>
+            <p:cNvPr id="51" name="Group 50">
+              <a:extLst>
+                <a:ext uri="{FF2B5EF4-FFF2-40B4-BE49-F238E27FC236}">
+                  <a16:creationId xmlns:a16="http://schemas.microsoft.com/office/drawing/2014/main" id="{F3126E32-E0E3-1BA3-E28D-B58881244D94}"/>
+                </a:ext>
+              </a:extLst>
+            </p:cNvPr>
+            <p:cNvGrpSpPr/>
+            <p:nvPr/>
+          </p:nvGrpSpPr>
+          <p:grpSpPr>
+            <a:xfrm>
+              <a:off x="3559356" y="5047488"/>
+              <a:ext cx="1512000" cy="978408"/>
+              <a:chOff x="3559357" y="5047488"/>
+              <a:chExt cx="1512000" cy="978408"/>
+            </a:xfrm>
+          </p:grpSpPr>
+          <p:sp>
+            <p:nvSpPr>
+              <p:cNvPr id="8" name="Text 7">
+                <a:extLst>
+                  <a:ext uri="{FF2B5EF4-FFF2-40B4-BE49-F238E27FC236}">
+                    <a16:creationId xmlns:a16="http://schemas.microsoft.com/office/drawing/2014/main" id="{A1E0C14A-4348-A92D-867A-56760E1EADA4}"/>
+                  </a:ext>
+                </a:extLst>
+              </p:cNvPr>
+              <p:cNvSpPr txBox="1"/>
+              <p:nvPr/>
+            </p:nvSpPr>
+            <p:spPr>
+              <a:xfrm>
+                <a:off x="3559357" y="5047488"/>
+                <a:ext cx="1512000" cy="320040"/>
+              </a:xfrm>
+              <a:prstGeom prst="rect">
+                <a:avLst/>
+              </a:prstGeom>
+              <a:noFill/>
+              <a:ln/>
+            </p:spPr>
+            <p:txBody>
+              <a:bodyPr wrap="square" lIns="0" tIns="0" rIns="0" bIns="0" rtlCol="0" anchor="t"/>
+              <a:lstStyle/>
+              <a:p>
+                <a:pPr marL="0" indent="0">
+                  <a:buNone/>
+                </a:pPr>
+                <a:r>
+                  <a:rPr lang="en-US" sz="1400" b="1" dirty="0">
+                    <a:solidFill>
+                      <a:schemeClr val="bg1"/>
+                    </a:solidFill>
+                    <a:latin typeface="DM Sans" pitchFamily="34" charset="0"/>
+                    <a:ea typeface="DM Sans" pitchFamily="34" charset="-122"/>
+                    <a:cs typeface="DM Sans" pitchFamily="34" charset="-120"/>
+                  </a:rPr>
+                  <a:t>Mar 2027</a:t>
+                </a:r>
+                <a:endParaRPr lang="en-US" sz="1400" dirty="0">
+                  <a:solidFill>
+                    <a:schemeClr val="bg1"/>
+                  </a:solidFill>
+                </a:endParaRPr>
+              </a:p>
+            </p:txBody>
+          </p:sp>
+          <p:sp>
+            <p:nvSpPr>
+              <p:cNvPr id="10" name="Text 8">
+                <a:extLst>
+                  <a:ext uri="{FF2B5EF4-FFF2-40B4-BE49-F238E27FC236}">
+                    <a16:creationId xmlns:a16="http://schemas.microsoft.com/office/drawing/2014/main" id="{28F646F5-B0EC-99C0-4B0F-B462E0EF0DED}"/>
+                  </a:ext>
+                </a:extLst>
+              </p:cNvPr>
+              <p:cNvSpPr txBox="1"/>
+              <p:nvPr/>
+            </p:nvSpPr>
+            <p:spPr>
+              <a:xfrm>
+                <a:off x="3559357" y="5385816"/>
+                <a:ext cx="1512000" cy="640080"/>
+              </a:xfrm>
+              <a:prstGeom prst="rect">
+                <a:avLst/>
+              </a:prstGeom>
+              <a:noFill/>
+              <a:ln/>
+            </p:spPr>
+            <p:txBody>
+              <a:bodyPr wrap="square" lIns="0" tIns="0" rIns="0" bIns="0" rtlCol="0" anchor="t"/>
+              <a:lstStyle/>
+              <a:p>
+                <a:pPr marL="0" indent="0">
+                  <a:buNone/>
+                </a:pPr>
+                <a:r>
+                  <a:rPr lang="en-US" sz="1600" dirty="0">
+                    <a:solidFill>
+                      <a:schemeClr val="bg1"/>
+                    </a:solidFill>
+                    <a:latin typeface="DM Sans" pitchFamily="34" charset="0"/>
+                    <a:ea typeface="DM Sans" pitchFamily="34" charset="-122"/>
+                    <a:cs typeface="DM Sans" pitchFamily="34" charset="-120"/>
+                  </a:rPr>
+                  <a:t>Paid launch</a:t>
+                </a:r>
+                <a:endParaRPr lang="en-US" sz="1600" dirty="0">
+                  <a:solidFill>
+                    <a:schemeClr val="bg1"/>
+                  </a:solidFill>
+                </a:endParaRPr>
+              </a:p>
+            </p:txBody>
+          </p:sp>
+        </p:grpSp>
+        <p:grpSp>
+          <p:nvGrpSpPr>
+            <p:cNvPr id="50" name="Group 49">
+              <a:extLst>
+                <a:ext uri="{FF2B5EF4-FFF2-40B4-BE49-F238E27FC236}">
+                  <a16:creationId xmlns:a16="http://schemas.microsoft.com/office/drawing/2014/main" id="{22E0FD2F-7BEC-67C3-354C-A40AC376D96C}"/>
+                </a:ext>
+              </a:extLst>
+            </p:cNvPr>
+            <p:cNvGrpSpPr/>
+            <p:nvPr/>
+          </p:nvGrpSpPr>
+          <p:grpSpPr>
+            <a:xfrm>
+              <a:off x="6332959" y="5047488"/>
+              <a:ext cx="1512000" cy="978408"/>
+              <a:chOff x="6332961" y="5047488"/>
+              <a:chExt cx="1512000" cy="978408"/>
+            </a:xfrm>
+          </p:grpSpPr>
+          <p:sp>
+            <p:nvSpPr>
+              <p:cNvPr id="27" name="Text 9">
+                <a:extLst>
+                  <a:ext uri="{FF2B5EF4-FFF2-40B4-BE49-F238E27FC236}">
+                    <a16:creationId xmlns:a16="http://schemas.microsoft.com/office/drawing/2014/main" id="{3CA2A0F7-0C60-E68A-EDEC-CD376C94D425}"/>
+                  </a:ext>
+                </a:extLst>
+              </p:cNvPr>
+              <p:cNvSpPr txBox="1"/>
+              <p:nvPr/>
+            </p:nvSpPr>
+            <p:spPr>
+              <a:xfrm>
+                <a:off x="6332961" y="5047488"/>
+                <a:ext cx="1512000" cy="320040"/>
+              </a:xfrm>
+              <a:prstGeom prst="rect">
+                <a:avLst/>
+              </a:prstGeom>
+              <a:noFill/>
+              <a:ln/>
+            </p:spPr>
+            <p:txBody>
+              <a:bodyPr wrap="square" lIns="0" tIns="0" rIns="0" bIns="0" rtlCol="0" anchor="t"/>
+              <a:lstStyle/>
+              <a:p>
+                <a:pPr marL="0" indent="0">
+                  <a:buNone/>
+                </a:pPr>
+                <a:r>
+                  <a:rPr lang="en-US" sz="1400" b="1" dirty="0">
+                    <a:solidFill>
+                      <a:schemeClr val="bg1"/>
+                    </a:solidFill>
+                    <a:latin typeface="DM Sans" pitchFamily="34" charset="0"/>
+                    <a:ea typeface="DM Sans" pitchFamily="34" charset="-122"/>
+                    <a:cs typeface="DM Sans" pitchFamily="34" charset="-120"/>
+                  </a:rPr>
+                  <a:t>Aug 2027</a:t>
+                </a:r>
+                <a:endParaRPr lang="en-US" sz="1400" dirty="0">
+                  <a:solidFill>
+                    <a:schemeClr val="bg1"/>
+                  </a:solidFill>
+                </a:endParaRPr>
+              </a:p>
+            </p:txBody>
+          </p:sp>
+          <p:sp>
+            <p:nvSpPr>
+              <p:cNvPr id="29" name="Text 10">
+                <a:extLst>
+                  <a:ext uri="{FF2B5EF4-FFF2-40B4-BE49-F238E27FC236}">
+                    <a16:creationId xmlns:a16="http://schemas.microsoft.com/office/drawing/2014/main" id="{955E4EF4-0C0E-93DF-5A9A-3708585758D6}"/>
+                  </a:ext>
+                </a:extLst>
+              </p:cNvPr>
+              <p:cNvSpPr txBox="1"/>
+              <p:nvPr/>
+            </p:nvSpPr>
+            <p:spPr>
+              <a:xfrm>
+                <a:off x="6332961" y="5385816"/>
+                <a:ext cx="1512000" cy="640080"/>
+              </a:xfrm>
+              <a:prstGeom prst="rect">
+                <a:avLst/>
+              </a:prstGeom>
+              <a:noFill/>
+              <a:ln/>
+            </p:spPr>
+            <p:txBody>
+              <a:bodyPr wrap="square" lIns="0" tIns="0" rIns="0" bIns="0" rtlCol="0" anchor="t"/>
+              <a:lstStyle/>
+              <a:p>
+                <a:pPr marL="0" indent="0">
+                  <a:buNone/>
+                </a:pPr>
+                <a:r>
+                  <a:rPr lang="en-US" sz="1600" dirty="0">
+                    <a:solidFill>
+                      <a:schemeClr val="bg1"/>
+                    </a:solidFill>
+                    <a:latin typeface="DM Sans" pitchFamily="34" charset="0"/>
+                    <a:ea typeface="DM Sans" pitchFamily="34" charset="-122"/>
+                    <a:cs typeface="DM Sans" pitchFamily="34" charset="-120"/>
+                  </a:rPr>
+                  <a:t>500 paying users</a:t>
+                </a:r>
+                <a:endParaRPr lang="en-US" sz="1600" dirty="0">
+                  <a:solidFill>
+                    <a:schemeClr val="bg1"/>
+                  </a:solidFill>
+                </a:endParaRPr>
+              </a:p>
+            </p:txBody>
+          </p:sp>
+        </p:grpSp>
+        <p:grpSp>
+          <p:nvGrpSpPr>
+            <p:cNvPr id="49" name="Group 48">
+              <a:extLst>
+                <a:ext uri="{FF2B5EF4-FFF2-40B4-BE49-F238E27FC236}">
+                  <a16:creationId xmlns:a16="http://schemas.microsoft.com/office/drawing/2014/main" id="{6B1BCA22-5C3D-5674-288E-A731EAB5D6DF}"/>
+                </a:ext>
+              </a:extLst>
+            </p:cNvPr>
+            <p:cNvGrpSpPr/>
+            <p:nvPr/>
+          </p:nvGrpSpPr>
+          <p:grpSpPr>
+            <a:xfrm>
+              <a:off x="9106563" y="5047488"/>
+              <a:ext cx="1512000" cy="978408"/>
+              <a:chOff x="9106563" y="5047488"/>
+              <a:chExt cx="1512000" cy="978408"/>
+            </a:xfrm>
+          </p:grpSpPr>
+          <p:sp>
+            <p:nvSpPr>
+              <p:cNvPr id="31" name="Text 11">
+                <a:extLst>
+                  <a:ext uri="{FF2B5EF4-FFF2-40B4-BE49-F238E27FC236}">
+                    <a16:creationId xmlns:a16="http://schemas.microsoft.com/office/drawing/2014/main" id="{794ED412-6896-FC99-7E37-C0583D3C5598}"/>
+                  </a:ext>
+                </a:extLst>
+              </p:cNvPr>
+              <p:cNvSpPr txBox="1"/>
+              <p:nvPr/>
+            </p:nvSpPr>
+            <p:spPr>
+              <a:xfrm>
+                <a:off x="9106563" y="5047488"/>
+                <a:ext cx="1512000" cy="320040"/>
+              </a:xfrm>
+              <a:prstGeom prst="rect">
+                <a:avLst/>
+              </a:prstGeom>
+              <a:noFill/>
+              <a:ln/>
+            </p:spPr>
+            <p:txBody>
+              <a:bodyPr wrap="square" lIns="0" tIns="0" rIns="0" bIns="0" rtlCol="0" anchor="t"/>
+              <a:lstStyle/>
+              <a:p>
+                <a:pPr marL="0" indent="0">
+                  <a:buNone/>
+                </a:pPr>
+                <a:r>
+                  <a:rPr lang="en-US" sz="1400" b="1" dirty="0">
+                    <a:solidFill>
+                      <a:schemeClr val="bg1"/>
+                    </a:solidFill>
+                    <a:latin typeface="DM Sans" pitchFamily="34" charset="0"/>
+                    <a:ea typeface="DM Sans" pitchFamily="34" charset="-122"/>
+                    <a:cs typeface="DM Sans" pitchFamily="34" charset="-120"/>
+                  </a:rPr>
+                  <a:t>2028</a:t>
+                </a:r>
+                <a:endParaRPr lang="en-US" sz="1400" dirty="0">
+                  <a:solidFill>
+                    <a:schemeClr val="bg1"/>
+                  </a:solidFill>
+                </a:endParaRPr>
+              </a:p>
+            </p:txBody>
+          </p:sp>
+          <p:sp>
+            <p:nvSpPr>
+              <p:cNvPr id="33" name="Text 12">
+                <a:extLst>
+                  <a:ext uri="{FF2B5EF4-FFF2-40B4-BE49-F238E27FC236}">
+                    <a16:creationId xmlns:a16="http://schemas.microsoft.com/office/drawing/2014/main" id="{02372EC3-6850-BD6D-5944-39D687F1138B}"/>
+                  </a:ext>
+                </a:extLst>
+              </p:cNvPr>
+              <p:cNvSpPr txBox="1"/>
+              <p:nvPr/>
+            </p:nvSpPr>
+            <p:spPr>
+              <a:xfrm>
+                <a:off x="9106563" y="5385816"/>
+                <a:ext cx="1512000" cy="640080"/>
+              </a:xfrm>
+              <a:prstGeom prst="rect">
+                <a:avLst/>
+              </a:prstGeom>
+              <a:noFill/>
+              <a:ln/>
+            </p:spPr>
+            <p:txBody>
+              <a:bodyPr wrap="square" lIns="0" tIns="0" rIns="0" bIns="0" rtlCol="0" anchor="t"/>
+              <a:lstStyle/>
+              <a:p>
+                <a:pPr marL="0" indent="0">
+                  <a:buNone/>
+                </a:pPr>
+                <a:r>
+                  <a:rPr lang="en-US" sz="1600" dirty="0">
+                    <a:solidFill>
+                      <a:schemeClr val="bg1"/>
+                    </a:solidFill>
+                    <a:latin typeface="DM Sans" pitchFamily="34" charset="0"/>
+                  </a:rPr>
+                  <a:t>Expansion</a:t>
+                </a:r>
+              </a:p>
+              <a:p>
+                <a:pPr marL="0" indent="0">
+                  <a:buNone/>
+                </a:pPr>
+                <a:r>
+                  <a:rPr lang="en-US" sz="1600" dirty="0">
+                    <a:solidFill>
+                      <a:schemeClr val="bg1"/>
+                    </a:solidFill>
+                    <a:latin typeface="DM Sans" pitchFamily="34" charset="0"/>
+                  </a:rPr>
+                  <a:t>Across Europe</a:t>
+                </a:r>
+                <a:endParaRPr lang="en-US" sz="1600" dirty="0">
+                  <a:solidFill>
+                    <a:schemeClr val="bg1"/>
+                  </a:solidFill>
+                </a:endParaRPr>
+              </a:p>
+            </p:txBody>
+          </p:sp>
+        </p:grpSp>
+      </p:grpSp>
+      <p:cxnSp>
+        <p:nvCxnSpPr>
+          <p:cNvPr id="40" name="Straight Connector 39">
+            <a:extLst>
+              <a:ext uri="{FF2B5EF4-FFF2-40B4-BE49-F238E27FC236}">
+                <a16:creationId xmlns:a16="http://schemas.microsoft.com/office/drawing/2014/main" id="{4604A9FA-7CD7-5088-601E-B95E5686080B}"/>
+              </a:ext>
+            </a:extLst>
+          </p:cNvPr>
+          <p:cNvCxnSpPr>
+            <a:cxnSpLocks/>
+          </p:cNvCxnSpPr>
+          <p:nvPr/>
+        </p:nvCxnSpPr>
+        <p:spPr>
+          <a:xfrm>
+            <a:off x="1111622" y="4840941"/>
+            <a:ext cx="8202707" cy="0"/>
+          </a:xfrm>
+          <a:prstGeom prst="line">
+            <a:avLst/>
+          </a:prstGeom>
+        </p:spPr>
+        <p:style>
+          <a:lnRef idx="1">
+            <a:schemeClr val="accent1"/>
+          </a:lnRef>
+          <a:fillRef idx="0">
+            <a:schemeClr val="accent1"/>
+          </a:fillRef>
+          <a:effectRef idx="0">
+            <a:schemeClr val="accent1"/>
+          </a:effectRef>
+          <a:fontRef idx="minor">
+            <a:schemeClr val="tx1"/>
+          </a:fontRef>
+        </p:style>
+      </p:cxnSp>
+      <p:sp>
+        <p:nvSpPr>
+          <p:cNvPr id="42" name="Oval 41">
+            <a:extLst>
+              <a:ext uri="{FF2B5EF4-FFF2-40B4-BE49-F238E27FC236}">
+                <a16:creationId xmlns:a16="http://schemas.microsoft.com/office/drawing/2014/main" id="{4B30C0A4-90C9-24BC-960D-868113DECF46}"/>
               </a:ext>
             </a:extLst>
           </p:cNvPr>
@@ -3697,25 +5004,359 @@
         </p:nvSpPr>
         <p:spPr>
           <a:xfrm>
-            <a:off x="0" y="4526280"/>
-            <a:ext cx="11658600" cy="1554468"/>
+            <a:off x="1102656" y="4806427"/>
+            <a:ext cx="72000" cy="72000"/>
           </a:xfrm>
-          <a:prstGeom prst="roundRect">
-            <a:avLst>
-              <a:gd name="adj" fmla="val 2254"/>
-            </a:avLst>
+          <a:prstGeom prst="ellipse">
+            <a:avLst/>
           </a:prstGeom>
           <a:solidFill>
-            <a:schemeClr val="tx2">
-              <a:alpha val="37758"/>
+            <a:schemeClr val="bg1"/>
+          </a:solidFill>
+          <a:ln>
+            <a:solidFill>
+              <a:schemeClr val="bg1"/>
+            </a:solidFill>
+          </a:ln>
+        </p:spPr>
+        <p:style>
+          <a:lnRef idx="2">
+            <a:schemeClr val="accent1">
+              <a:shade val="15000"/>
             </a:schemeClr>
+          </a:lnRef>
+          <a:fillRef idx="1">
+            <a:schemeClr val="accent1"/>
+          </a:fillRef>
+          <a:effectRef idx="0">
+            <a:schemeClr val="accent1"/>
+          </a:effectRef>
+          <a:fontRef idx="minor">
+            <a:schemeClr val="lt1"/>
+          </a:fontRef>
+        </p:style>
+        <p:txBody>
+          <a:bodyPr rtlCol="0" anchor="ctr"/>
+          <a:lstStyle/>
+          <a:p>
+            <a:pPr algn="ctr"/>
+            <a:endParaRPr lang="en-IN"/>
+          </a:p>
+        </p:txBody>
+      </p:sp>
+      <p:sp>
+        <p:nvSpPr>
+          <p:cNvPr id="44" name="Oval 43">
+            <a:extLst>
+              <a:ext uri="{FF2B5EF4-FFF2-40B4-BE49-F238E27FC236}">
+                <a16:creationId xmlns:a16="http://schemas.microsoft.com/office/drawing/2014/main" id="{A4FA1D74-4E6A-3AB0-240E-3C5AEAF2A98C}"/>
+              </a:ext>
+            </a:extLst>
+          </p:cNvPr>
+          <p:cNvSpPr/>
+          <p:nvPr/>
+        </p:nvSpPr>
+        <p:spPr>
+          <a:xfrm>
+            <a:off x="3848396" y="4806427"/>
+            <a:ext cx="72000" cy="72000"/>
+          </a:xfrm>
+          <a:prstGeom prst="ellipse">
+            <a:avLst/>
+          </a:prstGeom>
+          <a:solidFill>
+            <a:schemeClr val="bg1"/>
           </a:solidFill>
+          <a:ln>
+            <a:solidFill>
+              <a:schemeClr val="bg1"/>
+            </a:solidFill>
+          </a:ln>
+        </p:spPr>
+        <p:style>
+          <a:lnRef idx="2">
+            <a:schemeClr val="accent1">
+              <a:shade val="15000"/>
+            </a:schemeClr>
+          </a:lnRef>
+          <a:fillRef idx="1">
+            <a:schemeClr val="accent1"/>
+          </a:fillRef>
+          <a:effectRef idx="0">
+            <a:schemeClr val="accent1"/>
+          </a:effectRef>
+          <a:fontRef idx="minor">
+            <a:schemeClr val="lt1"/>
+          </a:fontRef>
+        </p:style>
+        <p:txBody>
+          <a:bodyPr rtlCol="0" anchor="ctr"/>
+          <a:lstStyle/>
+          <a:p>
+            <a:pPr algn="ctr"/>
+            <a:endParaRPr lang="en-IN"/>
+          </a:p>
+        </p:txBody>
+      </p:sp>
+      <p:sp>
+        <p:nvSpPr>
+          <p:cNvPr id="46" name="Oval 45">
+            <a:extLst>
+              <a:ext uri="{FF2B5EF4-FFF2-40B4-BE49-F238E27FC236}">
+                <a16:creationId xmlns:a16="http://schemas.microsoft.com/office/drawing/2014/main" id="{A650BDE8-E6B9-6F05-00F3-5C549248EFAF}"/>
+              </a:ext>
+            </a:extLst>
+          </p:cNvPr>
+          <p:cNvSpPr/>
+          <p:nvPr/>
+        </p:nvSpPr>
+        <p:spPr>
+          <a:xfrm>
+            <a:off x="6629696" y="4806427"/>
+            <a:ext cx="72000" cy="72000"/>
+          </a:xfrm>
+          <a:prstGeom prst="ellipse">
+            <a:avLst/>
+          </a:prstGeom>
+          <a:solidFill>
+            <a:schemeClr val="bg1"/>
+          </a:solidFill>
+          <a:ln>
+            <a:solidFill>
+              <a:schemeClr val="bg1"/>
+            </a:solidFill>
+          </a:ln>
+        </p:spPr>
+        <p:style>
+          <a:lnRef idx="2">
+            <a:schemeClr val="accent1">
+              <a:shade val="15000"/>
+            </a:schemeClr>
+          </a:lnRef>
+          <a:fillRef idx="1">
+            <a:schemeClr val="accent1"/>
+          </a:fillRef>
+          <a:effectRef idx="0">
+            <a:schemeClr val="accent1"/>
+          </a:effectRef>
+          <a:fontRef idx="minor">
+            <a:schemeClr val="lt1"/>
+          </a:fontRef>
+        </p:style>
+        <p:txBody>
+          <a:bodyPr rtlCol="0" anchor="ctr"/>
+          <a:lstStyle/>
+          <a:p>
+            <a:pPr algn="ctr"/>
+            <a:endParaRPr lang="en-IN"/>
+          </a:p>
+        </p:txBody>
+      </p:sp>
+      <p:sp>
+        <p:nvSpPr>
+          <p:cNvPr id="48" name="Oval 47">
+            <a:extLst>
+              <a:ext uri="{FF2B5EF4-FFF2-40B4-BE49-F238E27FC236}">
+                <a16:creationId xmlns:a16="http://schemas.microsoft.com/office/drawing/2014/main" id="{FBAD2F6B-D07E-B38E-FFD9-A12ABEAC0878}"/>
+              </a:ext>
+            </a:extLst>
+          </p:cNvPr>
+          <p:cNvSpPr/>
+          <p:nvPr/>
+        </p:nvSpPr>
+        <p:spPr>
+          <a:xfrm>
+            <a:off x="9278329" y="4806427"/>
+            <a:ext cx="72000" cy="72000"/>
+          </a:xfrm>
+          <a:prstGeom prst="ellipse">
+            <a:avLst/>
+          </a:prstGeom>
+          <a:solidFill>
+            <a:schemeClr val="bg1"/>
+          </a:solidFill>
+          <a:ln>
+            <a:solidFill>
+              <a:schemeClr val="bg1"/>
+            </a:solidFill>
+          </a:ln>
+        </p:spPr>
+        <p:style>
+          <a:lnRef idx="2">
+            <a:schemeClr val="accent1">
+              <a:shade val="15000"/>
+            </a:schemeClr>
+          </a:lnRef>
+          <a:fillRef idx="1">
+            <a:schemeClr val="accent1"/>
+          </a:fillRef>
+          <a:effectRef idx="0">
+            <a:schemeClr val="accent1"/>
+          </a:effectRef>
+          <a:fontRef idx="minor">
+            <a:schemeClr val="lt1"/>
+          </a:fontRef>
+        </p:style>
+        <p:txBody>
+          <a:bodyPr rtlCol="0" anchor="ctr"/>
+          <a:lstStyle/>
+          <a:p>
+            <a:pPr algn="ctr"/>
+            <a:endParaRPr lang="en-IN"/>
+          </a:p>
+        </p:txBody>
+      </p:sp>
+      <p:sp>
+        <p:nvSpPr>
+          <p:cNvPr id="60" name="Text 1">
+            <a:extLst>
+              <a:ext uri="{FF2B5EF4-FFF2-40B4-BE49-F238E27FC236}">
+                <a16:creationId xmlns:a16="http://schemas.microsoft.com/office/drawing/2014/main" id="{1364655D-48D4-745E-41AF-E7066C28978B}"/>
+              </a:ext>
+            </a:extLst>
+          </p:cNvPr>
+          <p:cNvSpPr txBox="1"/>
+          <p:nvPr/>
+        </p:nvSpPr>
+        <p:spPr>
+          <a:xfrm>
+            <a:off x="548640" y="1638749"/>
+            <a:ext cx="4754880" cy="1828800"/>
+          </a:xfrm>
+          <a:prstGeom prst="rect">
+            <a:avLst/>
+          </a:prstGeom>
+          <a:noFill/>
           <a:ln/>
         </p:spPr>
-      </p:sp>
-      <p:sp>
-        <p:nvSpPr>
-          <p:cNvPr id="2" name="Kicker"/>
+        <p:txBody>
+          <a:bodyPr wrap="square" lIns="0" tIns="0" rIns="0" bIns="0" rtlCol="0" anchor="ctr"/>
+          <a:lstStyle/>
+          <a:p>
+            <a:pPr marL="0" indent="0">
+              <a:buNone/>
+            </a:pPr>
+            <a:r>
+              <a:rPr lang="en-US" sz="13200" b="1" dirty="0">
+                <a:solidFill>
+                  <a:schemeClr val="bg1"/>
+                </a:solidFill>
+                <a:latin typeface="Oswald" pitchFamily="34" charset="0"/>
+                <a:ea typeface="Oswald" pitchFamily="34" charset="-122"/>
+                <a:cs typeface="Oswald" pitchFamily="34" charset="-120"/>
+              </a:rPr>
+              <a:t>€220k</a:t>
+            </a:r>
+            <a:endParaRPr lang="en-US" sz="13200" dirty="0">
+              <a:solidFill>
+                <a:schemeClr val="bg1"/>
+              </a:solidFill>
+            </a:endParaRPr>
+          </a:p>
+        </p:txBody>
+      </p:sp>
+      <p:sp>
+        <p:nvSpPr>
+          <p:cNvPr id="62" name="Text 2">
+            <a:extLst>
+              <a:ext uri="{FF2B5EF4-FFF2-40B4-BE49-F238E27FC236}">
+                <a16:creationId xmlns:a16="http://schemas.microsoft.com/office/drawing/2014/main" id="{6E11F114-68A0-0A4E-DD82-7EF5A526C5CB}"/>
+              </a:ext>
+            </a:extLst>
+          </p:cNvPr>
+          <p:cNvSpPr txBox="1"/>
+          <p:nvPr/>
+        </p:nvSpPr>
+        <p:spPr>
+          <a:xfrm>
+            <a:off x="548640" y="3513269"/>
+            <a:ext cx="4754880" cy="365760"/>
+          </a:xfrm>
+          <a:prstGeom prst="rect">
+            <a:avLst/>
+          </a:prstGeom>
+          <a:noFill/>
+          <a:ln/>
+        </p:spPr>
+        <p:txBody>
+          <a:bodyPr wrap="square" lIns="0" tIns="0" rIns="0" bIns="0" rtlCol="0" anchor="t"/>
+          <a:lstStyle/>
+          <a:p>
+            <a:pPr marL="0" indent="0">
+              <a:buNone/>
+            </a:pPr>
+            <a:r>
+              <a:rPr lang="en-US" sz="1800" b="1" dirty="0">
+                <a:solidFill>
+                  <a:schemeClr val="bg1"/>
+                </a:solidFill>
+                <a:latin typeface="DM Sans" pitchFamily="34" charset="0"/>
+                <a:ea typeface="DM Sans" pitchFamily="34" charset="-122"/>
+                <a:cs typeface="DM Sans" pitchFamily="34" charset="-120"/>
+              </a:rPr>
+              <a:t>for the first 12 months, team of 4</a:t>
+            </a:r>
+            <a:endParaRPr lang="en-US" sz="1800" dirty="0">
+              <a:solidFill>
+                <a:schemeClr val="bg1"/>
+              </a:solidFill>
+            </a:endParaRPr>
+          </a:p>
+        </p:txBody>
+      </p:sp>
+    </p:spTree>
+    <p:extLst>
+      <p:ext uri="{BB962C8B-B14F-4D97-AF65-F5344CB8AC3E}">
+        <p14:creationId xmlns:p14="http://schemas.microsoft.com/office/powerpoint/2010/main" val="3420090857"/>
+      </p:ext>
+    </p:extLst>
+  </p:cSld>
+  <p:clrMapOvr>
+    <a:overrideClrMapping bg1="lt1" tx1="dk1" bg2="lt2" tx2="dk2" accent1="accent1" accent2="accent2" accent3="accent3" accent4="accent4" accent5="accent5" accent6="accent6" hlink="hlink" folHlink="folHlink"/>
+  </p:clrMapOvr>
+</p:sld>
+</file>
+
+<file path=ppt/slides/slide11.xml><?xml version="1.0" encoding="utf-8"?>
+<p:sld xmlns:a="http://schemas.openxmlformats.org/drawingml/2006/main" xmlns:r="http://schemas.openxmlformats.org/officeDocument/2006/relationships" xmlns:p="http://schemas.openxmlformats.org/presentationml/2006/main" show="0">
+  <p:cSld>
+    <p:bg>
+      <p:bgPr>
+        <a:solidFill>
+          <a:srgbClr val="15110E"/>
+        </a:solidFill>
+        <a:effectLst/>
+      </p:bgPr>
+    </p:bg>
+    <p:spTree>
+      <p:nvGrpSpPr>
+        <p:cNvPr id="1" name="">
+          <a:extLst>
+            <a:ext uri="{FF2B5EF4-FFF2-40B4-BE49-F238E27FC236}">
+              <a16:creationId xmlns:a16="http://schemas.microsoft.com/office/drawing/2014/main" id="{5725E614-2AAC-B3F7-FB5B-42720E4B3299}"/>
+            </a:ext>
+          </a:extLst>
+        </p:cNvPr>
+        <p:cNvGrpSpPr/>
+        <p:nvPr/>
+      </p:nvGrpSpPr>
+      <p:grpSpPr>
+        <a:xfrm>
+          <a:off x="0" y="0"/>
+          <a:ext cx="0" cy="0"/>
+          <a:chOff x="0" y="0"/>
+          <a:chExt cx="0" cy="0"/>
+        </a:xfrm>
+      </p:grpSpPr>
+      <p:sp>
+        <p:nvSpPr>
+          <p:cNvPr id="2" name="Kicker">
+            <a:extLst>
+              <a:ext uri="{FF2B5EF4-FFF2-40B4-BE49-F238E27FC236}">
+                <a16:creationId xmlns:a16="http://schemas.microsoft.com/office/drawing/2014/main" id="{A594E92A-A435-073F-DFFC-BAEB4203C401}"/>
+              </a:ext>
+            </a:extLst>
+          </p:cNvPr>
           <p:cNvSpPr txBox="1"/>
           <p:nvPr/>
         </p:nvSpPr>
@@ -3740,6 +5381,759 @@
             <a:r>
               <a:rPr lang="en-US" sz="1300" b="1" kern="0" spc="200" dirty="0">
                 <a:solidFill>
+                  <a:schemeClr val="accent1"/>
+                </a:solidFill>
+                <a:latin typeface="DM Sans" pitchFamily="34" charset="0"/>
+                <a:ea typeface="DM Sans" pitchFamily="34" charset="-122"/>
+                <a:cs typeface="DM Sans" pitchFamily="34" charset="-120"/>
+              </a:rPr>
+              <a:t>FUNDING</a:t>
+            </a:r>
+            <a:endParaRPr lang="en-US" sz="1300" dirty="0"/>
+          </a:p>
+        </p:txBody>
+      </p:sp>
+      <p:sp>
+        <p:nvSpPr>
+          <p:cNvPr id="12" name="Text 10">
+            <a:extLst>
+              <a:ext uri="{FF2B5EF4-FFF2-40B4-BE49-F238E27FC236}">
+                <a16:creationId xmlns:a16="http://schemas.microsoft.com/office/drawing/2014/main" id="{02664393-61A0-F22F-5F41-84E27C43DABF}"/>
+              </a:ext>
+            </a:extLst>
+          </p:cNvPr>
+          <p:cNvSpPr txBox="1"/>
+          <p:nvPr/>
+        </p:nvSpPr>
+        <p:spPr>
+          <a:xfrm>
+            <a:off x="3538935" y="1709928"/>
+            <a:ext cx="3657600" cy="274320"/>
+          </a:xfrm>
+          <a:prstGeom prst="rect">
+            <a:avLst/>
+          </a:prstGeom>
+          <a:noFill/>
+          <a:ln/>
+        </p:spPr>
+        <p:txBody>
+          <a:bodyPr wrap="square" lIns="0" tIns="0" rIns="0" bIns="0" rtlCol="0" anchor="t"/>
+          <a:lstStyle/>
+          <a:p>
+            <a:pPr marL="0" indent="0">
+              <a:buNone/>
+            </a:pPr>
+            <a:r>
+              <a:rPr lang="en-US" sz="1600" b="1" kern="0" spc="200" dirty="0">
+                <a:solidFill>
+                  <a:schemeClr val="accent1"/>
+                </a:solidFill>
+                <a:latin typeface="DM Sans" pitchFamily="34" charset="0"/>
+                <a:ea typeface="DM Sans" pitchFamily="34" charset="-122"/>
+                <a:cs typeface="DM Sans" pitchFamily="34" charset="-120"/>
+              </a:rPr>
+              <a:t>YEAR 1 PLAN</a:t>
+            </a:r>
+            <a:endParaRPr lang="en-US" sz="1600" dirty="0"/>
+          </a:p>
+        </p:txBody>
+      </p:sp>
+      <p:sp>
+        <p:nvSpPr>
+          <p:cNvPr id="13" name="Text 11">
+            <a:extLst>
+              <a:ext uri="{FF2B5EF4-FFF2-40B4-BE49-F238E27FC236}">
+                <a16:creationId xmlns:a16="http://schemas.microsoft.com/office/drawing/2014/main" id="{0F311FD8-2303-3830-3DD2-9B5C31E6B5BE}"/>
+              </a:ext>
+            </a:extLst>
+          </p:cNvPr>
+          <p:cNvSpPr txBox="1"/>
+          <p:nvPr/>
+        </p:nvSpPr>
+        <p:spPr>
+          <a:xfrm>
+            <a:off x="3538935" y="2121408"/>
+            <a:ext cx="1371600" cy="365760"/>
+          </a:xfrm>
+          <a:prstGeom prst="rect">
+            <a:avLst/>
+          </a:prstGeom>
+          <a:noFill/>
+          <a:ln/>
+        </p:spPr>
+        <p:txBody>
+          <a:bodyPr wrap="square" lIns="0" tIns="0" rIns="0" bIns="0" rtlCol="0" anchor="t"/>
+          <a:lstStyle/>
+          <a:p>
+            <a:pPr marL="0" indent="0">
+              <a:buNone/>
+            </a:pPr>
+            <a:r>
+              <a:rPr lang="en-US" b="1" dirty="0">
+                <a:solidFill>
+                  <a:schemeClr val="accent2"/>
+                </a:solidFill>
+                <a:latin typeface="DM Sans" pitchFamily="34" charset="0"/>
+                <a:ea typeface="DM Sans" pitchFamily="34" charset="-122"/>
+                <a:cs typeface="DM Sans" pitchFamily="34" charset="-120"/>
+              </a:rPr>
+              <a:t>Dec 2026</a:t>
+            </a:r>
+            <a:endParaRPr lang="en-US" dirty="0"/>
+          </a:p>
+        </p:txBody>
+      </p:sp>
+      <p:sp>
+        <p:nvSpPr>
+          <p:cNvPr id="14" name="Text 12">
+            <a:extLst>
+              <a:ext uri="{FF2B5EF4-FFF2-40B4-BE49-F238E27FC236}">
+                <a16:creationId xmlns:a16="http://schemas.microsoft.com/office/drawing/2014/main" id="{B6E038BF-DE32-D71E-E7C4-B6CAFB0E7733}"/>
+              </a:ext>
+            </a:extLst>
+          </p:cNvPr>
+          <p:cNvSpPr txBox="1"/>
+          <p:nvPr/>
+        </p:nvSpPr>
+        <p:spPr>
+          <a:xfrm>
+            <a:off x="4956255" y="2121408"/>
+            <a:ext cx="3200400" cy="365760"/>
+          </a:xfrm>
+          <a:prstGeom prst="rect">
+            <a:avLst/>
+          </a:prstGeom>
+          <a:noFill/>
+          <a:ln/>
+        </p:spPr>
+        <p:txBody>
+          <a:bodyPr wrap="square" lIns="0" tIns="0" rIns="0" bIns="0" rtlCol="0" anchor="t"/>
+          <a:lstStyle/>
+          <a:p>
+            <a:pPr marL="0" indent="0">
+              <a:buNone/>
+            </a:pPr>
+            <a:r>
+              <a:rPr lang="en-US" dirty="0">
+                <a:solidFill>
+                  <a:schemeClr val="bg1"/>
+                </a:solidFill>
+                <a:latin typeface="DM Sans" pitchFamily="34" charset="0"/>
+                <a:ea typeface="DM Sans" pitchFamily="34" charset="-122"/>
+                <a:cs typeface="DM Sans" pitchFamily="34" charset="-120"/>
+              </a:rPr>
+              <a:t>20 pilot users</a:t>
+            </a:r>
+            <a:endParaRPr lang="en-US" dirty="0"/>
+          </a:p>
+        </p:txBody>
+      </p:sp>
+      <p:sp>
+        <p:nvSpPr>
+          <p:cNvPr id="15" name="Text 13">
+            <a:extLst>
+              <a:ext uri="{FF2B5EF4-FFF2-40B4-BE49-F238E27FC236}">
+                <a16:creationId xmlns:a16="http://schemas.microsoft.com/office/drawing/2014/main" id="{D773619F-A380-9975-DE77-F489D25254CE}"/>
+              </a:ext>
+            </a:extLst>
+          </p:cNvPr>
+          <p:cNvSpPr txBox="1"/>
+          <p:nvPr/>
+        </p:nvSpPr>
+        <p:spPr>
+          <a:xfrm>
+            <a:off x="3538935" y="2578608"/>
+            <a:ext cx="1371600" cy="365760"/>
+          </a:xfrm>
+          <a:prstGeom prst="rect">
+            <a:avLst/>
+          </a:prstGeom>
+          <a:noFill/>
+          <a:ln/>
+        </p:spPr>
+        <p:txBody>
+          <a:bodyPr wrap="square" lIns="0" tIns="0" rIns="0" bIns="0" rtlCol="0" anchor="t"/>
+          <a:lstStyle/>
+          <a:p>
+            <a:pPr marL="0" indent="0">
+              <a:buNone/>
+            </a:pPr>
+            <a:r>
+              <a:rPr lang="en-US" b="1" dirty="0">
+                <a:solidFill>
+                  <a:schemeClr val="accent2"/>
+                </a:solidFill>
+                <a:latin typeface="DM Sans" pitchFamily="34" charset="0"/>
+                <a:ea typeface="DM Sans" pitchFamily="34" charset="-122"/>
+                <a:cs typeface="DM Sans" pitchFamily="34" charset="-120"/>
+              </a:rPr>
+              <a:t>Jun 2027</a:t>
+            </a:r>
+            <a:endParaRPr lang="en-US" dirty="0"/>
+          </a:p>
+        </p:txBody>
+      </p:sp>
+      <p:sp>
+        <p:nvSpPr>
+          <p:cNvPr id="16" name="Text 14">
+            <a:extLst>
+              <a:ext uri="{FF2B5EF4-FFF2-40B4-BE49-F238E27FC236}">
+                <a16:creationId xmlns:a16="http://schemas.microsoft.com/office/drawing/2014/main" id="{67D6E65C-A347-5A15-C0AD-711B878292EE}"/>
+              </a:ext>
+            </a:extLst>
+          </p:cNvPr>
+          <p:cNvSpPr txBox="1"/>
+          <p:nvPr/>
+        </p:nvSpPr>
+        <p:spPr>
+          <a:xfrm>
+            <a:off x="4956255" y="2578608"/>
+            <a:ext cx="3200400" cy="365760"/>
+          </a:xfrm>
+          <a:prstGeom prst="rect">
+            <a:avLst/>
+          </a:prstGeom>
+          <a:noFill/>
+          <a:ln/>
+        </p:spPr>
+        <p:txBody>
+          <a:bodyPr wrap="square" lIns="0" tIns="0" rIns="0" bIns="0" rtlCol="0" anchor="t"/>
+          <a:lstStyle/>
+          <a:p>
+            <a:pPr marL="0" indent="0">
+              <a:buNone/>
+            </a:pPr>
+            <a:r>
+              <a:rPr lang="en-US" dirty="0">
+                <a:solidFill>
+                  <a:schemeClr val="bg1"/>
+                </a:solidFill>
+                <a:latin typeface="DM Sans" pitchFamily="34" charset="0"/>
+                <a:ea typeface="DM Sans" pitchFamily="34" charset="-122"/>
+                <a:cs typeface="DM Sans" pitchFamily="34" charset="-120"/>
+              </a:rPr>
+              <a:t>Paid launch</a:t>
+            </a:r>
+            <a:endParaRPr lang="en-US" dirty="0"/>
+          </a:p>
+        </p:txBody>
+      </p:sp>
+      <p:sp>
+        <p:nvSpPr>
+          <p:cNvPr id="17" name="Text 15">
+            <a:extLst>
+              <a:ext uri="{FF2B5EF4-FFF2-40B4-BE49-F238E27FC236}">
+                <a16:creationId xmlns:a16="http://schemas.microsoft.com/office/drawing/2014/main" id="{27349382-2CCD-0A06-9FEA-33AC35002F25}"/>
+              </a:ext>
+            </a:extLst>
+          </p:cNvPr>
+          <p:cNvSpPr txBox="1"/>
+          <p:nvPr/>
+        </p:nvSpPr>
+        <p:spPr>
+          <a:xfrm>
+            <a:off x="3538935" y="3035808"/>
+            <a:ext cx="1371600" cy="365760"/>
+          </a:xfrm>
+          <a:prstGeom prst="rect">
+            <a:avLst/>
+          </a:prstGeom>
+          <a:noFill/>
+          <a:ln/>
+        </p:spPr>
+        <p:txBody>
+          <a:bodyPr wrap="square" lIns="0" tIns="0" rIns="0" bIns="0" rtlCol="0" anchor="t"/>
+          <a:lstStyle/>
+          <a:p>
+            <a:pPr marL="0" indent="0">
+              <a:buNone/>
+            </a:pPr>
+            <a:r>
+              <a:rPr lang="en-US" b="1" dirty="0">
+                <a:solidFill>
+                  <a:schemeClr val="accent2"/>
+                </a:solidFill>
+                <a:latin typeface="DM Sans" pitchFamily="34" charset="0"/>
+                <a:ea typeface="DM Sans" pitchFamily="34" charset="-122"/>
+                <a:cs typeface="DM Sans" pitchFamily="34" charset="-120"/>
+              </a:rPr>
+              <a:t>Oct 2027</a:t>
+            </a:r>
+            <a:endParaRPr lang="en-US" dirty="0"/>
+          </a:p>
+        </p:txBody>
+      </p:sp>
+      <p:sp>
+        <p:nvSpPr>
+          <p:cNvPr id="18" name="Text 16">
+            <a:extLst>
+              <a:ext uri="{FF2B5EF4-FFF2-40B4-BE49-F238E27FC236}">
+                <a16:creationId xmlns:a16="http://schemas.microsoft.com/office/drawing/2014/main" id="{B3259BED-795E-688B-0B06-D92BB6C424A9}"/>
+              </a:ext>
+            </a:extLst>
+          </p:cNvPr>
+          <p:cNvSpPr txBox="1"/>
+          <p:nvPr/>
+        </p:nvSpPr>
+        <p:spPr>
+          <a:xfrm>
+            <a:off x="4956255" y="3035808"/>
+            <a:ext cx="3200400" cy="365760"/>
+          </a:xfrm>
+          <a:prstGeom prst="rect">
+            <a:avLst/>
+          </a:prstGeom>
+          <a:noFill/>
+          <a:ln/>
+        </p:spPr>
+        <p:txBody>
+          <a:bodyPr wrap="square" lIns="0" tIns="0" rIns="0" bIns="0" rtlCol="0" anchor="t"/>
+          <a:lstStyle/>
+          <a:p>
+            <a:pPr marL="0" indent="0">
+              <a:buNone/>
+            </a:pPr>
+            <a:r>
+              <a:rPr lang="en-US" dirty="0">
+                <a:solidFill>
+                  <a:schemeClr val="bg1"/>
+                </a:solidFill>
+                <a:latin typeface="DM Sans" pitchFamily="34" charset="0"/>
+                <a:ea typeface="DM Sans" pitchFamily="34" charset="-122"/>
+                <a:cs typeface="DM Sans" pitchFamily="34" charset="-120"/>
+              </a:rPr>
+              <a:t>400 paying users</a:t>
+            </a:r>
+            <a:endParaRPr lang="en-US" dirty="0"/>
+          </a:p>
+        </p:txBody>
+      </p:sp>
+      <p:sp>
+        <p:nvSpPr>
+          <p:cNvPr id="19" name="Text 17">
+            <a:extLst>
+              <a:ext uri="{FF2B5EF4-FFF2-40B4-BE49-F238E27FC236}">
+                <a16:creationId xmlns:a16="http://schemas.microsoft.com/office/drawing/2014/main" id="{A3F5A771-3124-301F-F948-8641833BB069}"/>
+              </a:ext>
+            </a:extLst>
+          </p:cNvPr>
+          <p:cNvSpPr txBox="1"/>
+          <p:nvPr/>
+        </p:nvSpPr>
+        <p:spPr>
+          <a:xfrm>
+            <a:off x="3376477" y="3783823"/>
+            <a:ext cx="1534058" cy="731520"/>
+          </a:xfrm>
+          <a:prstGeom prst="rect">
+            <a:avLst/>
+          </a:prstGeom>
+          <a:noFill/>
+          <a:ln/>
+        </p:spPr>
+        <p:txBody>
+          <a:bodyPr wrap="square" lIns="0" tIns="0" rIns="0" bIns="0" rtlCol="0" anchor="ctr"/>
+          <a:lstStyle/>
+          <a:p>
+            <a:pPr marL="0" indent="0">
+              <a:buNone/>
+            </a:pPr>
+            <a:r>
+              <a:rPr lang="en-US" sz="4800" b="1" dirty="0">
+                <a:solidFill>
+                  <a:schemeClr val="accent2"/>
+                </a:solidFill>
+                <a:latin typeface="Oswald" pitchFamily="34" charset="0"/>
+                <a:ea typeface="Oswald" pitchFamily="34" charset="-122"/>
+                <a:cs typeface="Oswald" pitchFamily="34" charset="-120"/>
+              </a:rPr>
+              <a:t>€11k</a:t>
+            </a:r>
+            <a:endParaRPr lang="en-US" sz="4800" dirty="0"/>
+          </a:p>
+        </p:txBody>
+      </p:sp>
+      <p:sp>
+        <p:nvSpPr>
+          <p:cNvPr id="20" name="Text 18">
+            <a:extLst>
+              <a:ext uri="{FF2B5EF4-FFF2-40B4-BE49-F238E27FC236}">
+                <a16:creationId xmlns:a16="http://schemas.microsoft.com/office/drawing/2014/main" id="{D53B816D-9687-53AE-164B-ED2F71E48450}"/>
+              </a:ext>
+            </a:extLst>
+          </p:cNvPr>
+          <p:cNvSpPr txBox="1"/>
+          <p:nvPr/>
+        </p:nvSpPr>
+        <p:spPr>
+          <a:xfrm>
+            <a:off x="3376477" y="4561063"/>
+            <a:ext cx="1396898" cy="731520"/>
+          </a:xfrm>
+          <a:prstGeom prst="rect">
+            <a:avLst/>
+          </a:prstGeom>
+          <a:noFill/>
+          <a:ln/>
+        </p:spPr>
+        <p:txBody>
+          <a:bodyPr wrap="square" lIns="0" tIns="0" rIns="0" bIns="0" rtlCol="0" anchor="t"/>
+          <a:lstStyle/>
+          <a:p>
+            <a:pPr marL="0" indent="0">
+              <a:buNone/>
+            </a:pPr>
+            <a:r>
+              <a:rPr lang="en-US" dirty="0">
+                <a:solidFill>
+                  <a:schemeClr val="accent4"/>
+                </a:solidFill>
+                <a:latin typeface="DM Sans" pitchFamily="34" charset="0"/>
+                <a:ea typeface="DM Sans" pitchFamily="34" charset="-122"/>
+                <a:cs typeface="DM Sans" pitchFamily="34" charset="-120"/>
+              </a:rPr>
+              <a:t>revenue in year 1</a:t>
+            </a:r>
+            <a:endParaRPr lang="en-US" dirty="0"/>
+          </a:p>
+        </p:txBody>
+      </p:sp>
+      <p:sp>
+        <p:nvSpPr>
+          <p:cNvPr id="21" name="Text 19">
+            <a:extLst>
+              <a:ext uri="{FF2B5EF4-FFF2-40B4-BE49-F238E27FC236}">
+                <a16:creationId xmlns:a16="http://schemas.microsoft.com/office/drawing/2014/main" id="{FC834C76-0E44-994B-5368-CD077EEAE174}"/>
+              </a:ext>
+            </a:extLst>
+          </p:cNvPr>
+          <p:cNvSpPr txBox="1"/>
+          <p:nvPr/>
+        </p:nvSpPr>
+        <p:spPr>
+          <a:xfrm>
+            <a:off x="5322978" y="3708520"/>
+            <a:ext cx="1534058" cy="731520"/>
+          </a:xfrm>
+          <a:prstGeom prst="rect">
+            <a:avLst/>
+          </a:prstGeom>
+          <a:noFill/>
+          <a:ln/>
+        </p:spPr>
+        <p:txBody>
+          <a:bodyPr wrap="square" lIns="0" tIns="0" rIns="0" bIns="0" rtlCol="0" anchor="ctr"/>
+          <a:lstStyle/>
+          <a:p>
+            <a:pPr marL="0" indent="0">
+              <a:buNone/>
+            </a:pPr>
+            <a:r>
+              <a:rPr lang="en-US" sz="4800" b="1" dirty="0">
+                <a:solidFill>
+                  <a:schemeClr val="bg1"/>
+                </a:solidFill>
+                <a:latin typeface="Oswald" pitchFamily="34" charset="0"/>
+                <a:ea typeface="Oswald" pitchFamily="34" charset="-122"/>
+                <a:cs typeface="Oswald" pitchFamily="34" charset="-120"/>
+              </a:rPr>
+              <a:t>€43k</a:t>
+            </a:r>
+            <a:endParaRPr lang="en-US" sz="4800" dirty="0"/>
+          </a:p>
+        </p:txBody>
+      </p:sp>
+      <p:sp>
+        <p:nvSpPr>
+          <p:cNvPr id="22" name="Text 20">
+            <a:extLst>
+              <a:ext uri="{FF2B5EF4-FFF2-40B4-BE49-F238E27FC236}">
+                <a16:creationId xmlns:a16="http://schemas.microsoft.com/office/drawing/2014/main" id="{00EBC78F-D539-80B7-1242-827A79ABAEAB}"/>
+              </a:ext>
+            </a:extLst>
+          </p:cNvPr>
+          <p:cNvSpPr txBox="1"/>
+          <p:nvPr/>
+        </p:nvSpPr>
+        <p:spPr>
+          <a:xfrm>
+            <a:off x="5322978" y="4485760"/>
+            <a:ext cx="1396898" cy="731520"/>
+          </a:xfrm>
+          <a:prstGeom prst="rect">
+            <a:avLst/>
+          </a:prstGeom>
+          <a:noFill/>
+          <a:ln/>
+        </p:spPr>
+        <p:txBody>
+          <a:bodyPr wrap="square" lIns="0" tIns="0" rIns="0" bIns="0" rtlCol="0" anchor="t"/>
+          <a:lstStyle/>
+          <a:p>
+            <a:pPr marL="0" indent="0">
+              <a:buNone/>
+            </a:pPr>
+            <a:r>
+              <a:rPr lang="en-US" dirty="0">
+                <a:solidFill>
+                  <a:schemeClr val="accent4"/>
+                </a:solidFill>
+                <a:latin typeface="DM Sans" pitchFamily="34" charset="0"/>
+                <a:ea typeface="DM Sans" pitchFamily="34" charset="-122"/>
+                <a:cs typeface="DM Sans" pitchFamily="34" charset="-120"/>
+              </a:rPr>
+              <a:t>yearly run-rate at year end</a:t>
+            </a:r>
+            <a:endParaRPr lang="en-US" dirty="0"/>
+          </a:p>
+        </p:txBody>
+      </p:sp>
+      <p:sp>
+        <p:nvSpPr>
+          <p:cNvPr id="23" name="Text 21">
+            <a:extLst>
+              <a:ext uri="{FF2B5EF4-FFF2-40B4-BE49-F238E27FC236}">
+                <a16:creationId xmlns:a16="http://schemas.microsoft.com/office/drawing/2014/main" id="{ACC6D77A-C38D-1B47-A7F4-6E569332166B}"/>
+              </a:ext>
+            </a:extLst>
+          </p:cNvPr>
+          <p:cNvSpPr txBox="1"/>
+          <p:nvPr/>
+        </p:nvSpPr>
+        <p:spPr>
+          <a:xfrm>
+            <a:off x="7244182" y="3783823"/>
+            <a:ext cx="1534058" cy="731520"/>
+          </a:xfrm>
+          <a:prstGeom prst="rect">
+            <a:avLst/>
+          </a:prstGeom>
+          <a:noFill/>
+          <a:ln/>
+        </p:spPr>
+        <p:txBody>
+          <a:bodyPr wrap="square" lIns="0" tIns="0" rIns="0" bIns="0" rtlCol="0" anchor="ctr"/>
+          <a:lstStyle/>
+          <a:p>
+            <a:pPr marL="0" indent="0">
+              <a:buNone/>
+            </a:pPr>
+            <a:r>
+              <a:rPr lang="en-US" sz="4800" b="1" dirty="0">
+                <a:solidFill>
+                  <a:schemeClr val="bg1"/>
+                </a:solidFill>
+                <a:latin typeface="Oswald" pitchFamily="34" charset="0"/>
+                <a:ea typeface="Oswald" pitchFamily="34" charset="-122"/>
+                <a:cs typeface="Oswald" pitchFamily="34" charset="-120"/>
+              </a:rPr>
+              <a:t>8,000</a:t>
+            </a:r>
+            <a:endParaRPr lang="en-US" sz="4800" dirty="0"/>
+          </a:p>
+        </p:txBody>
+      </p:sp>
+      <p:sp>
+        <p:nvSpPr>
+          <p:cNvPr id="24" name="Text 22">
+            <a:extLst>
+              <a:ext uri="{FF2B5EF4-FFF2-40B4-BE49-F238E27FC236}">
+                <a16:creationId xmlns:a16="http://schemas.microsoft.com/office/drawing/2014/main" id="{6D7FF5A5-83AB-E350-9CDE-5CF22110E79F}"/>
+              </a:ext>
+            </a:extLst>
+          </p:cNvPr>
+          <p:cNvSpPr txBox="1"/>
+          <p:nvPr/>
+        </p:nvSpPr>
+        <p:spPr>
+          <a:xfrm>
+            <a:off x="7244182" y="4561063"/>
+            <a:ext cx="1396898" cy="731520"/>
+          </a:xfrm>
+          <a:prstGeom prst="rect">
+            <a:avLst/>
+          </a:prstGeom>
+          <a:noFill/>
+          <a:ln/>
+        </p:spPr>
+        <p:txBody>
+          <a:bodyPr wrap="square" lIns="0" tIns="0" rIns="0" bIns="0" rtlCol="0" anchor="t"/>
+          <a:lstStyle/>
+          <a:p>
+            <a:pPr marL="0" indent="0">
+              <a:buNone/>
+            </a:pPr>
+            <a:r>
+              <a:rPr lang="en-US" dirty="0">
+                <a:solidFill>
+                  <a:schemeClr val="accent4"/>
+                </a:solidFill>
+                <a:latin typeface="DM Sans" pitchFamily="34" charset="0"/>
+                <a:ea typeface="DM Sans" pitchFamily="34" charset="-122"/>
+                <a:cs typeface="DM Sans" pitchFamily="34" charset="-120"/>
+              </a:rPr>
+              <a:t>users in total, 7,600 of them free</a:t>
+            </a:r>
+            <a:endParaRPr lang="en-US" dirty="0"/>
+          </a:p>
+        </p:txBody>
+      </p:sp>
+      <p:sp>
+        <p:nvSpPr>
+          <p:cNvPr id="25" name="Footnote">
+            <a:extLst>
+              <a:ext uri="{FF2B5EF4-FFF2-40B4-BE49-F238E27FC236}">
+                <a16:creationId xmlns:a16="http://schemas.microsoft.com/office/drawing/2014/main" id="{A3A6E7B0-B95D-1069-2FA1-BBFCE2FEB1D8}"/>
+              </a:ext>
+            </a:extLst>
+          </p:cNvPr>
+          <p:cNvSpPr txBox="1"/>
+          <p:nvPr/>
+        </p:nvSpPr>
+        <p:spPr>
+          <a:xfrm>
+            <a:off x="548640" y="6327648"/>
+            <a:ext cx="10332720" cy="320040"/>
+          </a:xfrm>
+          <a:prstGeom prst="rect">
+            <a:avLst/>
+          </a:prstGeom>
+          <a:noFill/>
+          <a:ln/>
+        </p:spPr>
+        <p:txBody>
+          <a:bodyPr wrap="square" lIns="0" tIns="0" rIns="0" bIns="0" rtlCol="0" anchor="ctr"/>
+          <a:lstStyle/>
+          <a:p>
+            <a:pPr marL="0" indent="0">
+              <a:buNone/>
+            </a:pPr>
+            <a:r>
+              <a:rPr lang="en-US" sz="1050" dirty="0">
+                <a:solidFill>
+                  <a:schemeClr val="accent6"/>
+                </a:solidFill>
+                <a:latin typeface="DM Sans" pitchFamily="34" charset="0"/>
+                <a:ea typeface="DM Sans" pitchFamily="34" charset="-122"/>
+                <a:cs typeface="DM Sans" pitchFamily="34" charset="-120"/>
+              </a:rPr>
+              <a:t>Survey: 10 people we know who go to events, a first signal, not proof. Targets from the Syncy business plan; 19 free users per paying user.</a:t>
+            </a:r>
+            <a:endParaRPr lang="en-US" sz="1050" dirty="0"/>
+          </a:p>
+        </p:txBody>
+      </p:sp>
+      <p:sp>
+        <p:nvSpPr>
+          <p:cNvPr id="26" name="Slide Number Placeholder 0">
+            <a:extLst>
+              <a:ext uri="{FF2B5EF4-FFF2-40B4-BE49-F238E27FC236}">
+                <a16:creationId xmlns:a16="http://schemas.microsoft.com/office/drawing/2014/main" id="{04C4A66F-37C0-7398-FC7F-1C9825E230A3}"/>
+              </a:ext>
+            </a:extLst>
+          </p:cNvPr>
+          <p:cNvSpPr>
+            <a:spLocks noGrp="1"/>
+          </p:cNvSpPr>
+          <p:nvPr>
+            <p:ph type="sldNum" sz="quarter" idx="4294967295"/>
+          </p:nvPr>
+        </p:nvSpPr>
+        <p:spPr>
+          <a:xfrm>
+            <a:off x="11201400" y="6355080"/>
+            <a:ext cx="457200" cy="274320"/>
+          </a:xfrm>
+          <a:prstGeom prst="rect">
+            <a:avLst/>
+          </a:prstGeom>
+          <a:extLst>
+            <a:ext uri="{C572A759-6A51-4108-AA02-DFA0A04FC94B}">
+              <ma14:wrappingTextBoxFlag xmlns="" xmlns:ma14="http://schemas.microsoft.com/office/mac/drawingml/2011/main" val="0"/>
+            </a:ext>
+          </a:extLst>
+        </p:spPr>
+        <p:txBody>
+          <a:bodyPr/>
+          <a:lstStyle>
+            <a:lvl1pPr>
+              <a:defRPr sz="1050">
+                <a:solidFill>
+                  <a:schemeClr val="accent6"/>
+                </a:solidFill>
+                <a:latin typeface="DM Sans"/>
+                <a:ea typeface="DM Sans"/>
+                <a:cs typeface="DM Sans"/>
+              </a:defRPr>
+            </a:lvl1pPr>
+          </a:lstStyle>
+          <a:p>
+            <a:pPr algn="r"/>
+            <a:fld id="{F7021451-1387-4CA6-816F-3879F97B5CBC}" type="slidenum">
+              <a:rPr lang="en-US" b="0"/>
+              <a:t>11</a:t>
+            </a:fld>
+            <a:endParaRPr lang="en-US"/>
+          </a:p>
+        </p:txBody>
+      </p:sp>
+    </p:spTree>
+    <p:extLst>
+      <p:ext uri="{BB962C8B-B14F-4D97-AF65-F5344CB8AC3E}">
+        <p14:creationId xmlns:p14="http://schemas.microsoft.com/office/powerpoint/2010/main" val="3146183096"/>
+      </p:ext>
+    </p:extLst>
+  </p:cSld>
+  <p:clrMapOvr>
+    <a:overrideClrMapping bg1="lt1" tx1="dk1" bg2="lt2" tx2="dk2" accent1="accent1" accent2="accent2" accent3="accent3" accent4="accent4" accent5="accent5" accent6="accent6" hlink="hlink" folHlink="folHlink"/>
+  </p:clrMapOvr>
+</p:sld>
+</file>
+
+<file path=ppt/slides/slide12.xml><?xml version="1.0" encoding="utf-8"?>
+<p:sld xmlns:a="http://schemas.openxmlformats.org/drawingml/2006/main" xmlns:r="http://schemas.openxmlformats.org/officeDocument/2006/relationships" xmlns:p="http://schemas.openxmlformats.org/presentationml/2006/main">
+  <p:cSld name="Slide 8">
+    <p:spTree>
+      <p:nvGrpSpPr>
+        <p:cNvPr id="1" name=""/>
+        <p:cNvGrpSpPr/>
+        <p:nvPr/>
+      </p:nvGrpSpPr>
+      <p:grpSpPr>
+        <a:xfrm>
+          <a:off x="0" y="0"/>
+          <a:ext cx="0" cy="0"/>
+          <a:chOff x="0" y="0"/>
+          <a:chExt cx="0" cy="0"/>
+        </a:xfrm>
+      </p:grpSpPr>
+      <p:sp>
+        <p:nvSpPr>
+          <p:cNvPr id="2" name="Kicker"/>
+          <p:cNvSpPr txBox="1"/>
+          <p:nvPr/>
+        </p:nvSpPr>
+        <p:spPr>
+          <a:xfrm>
+            <a:off x="548640" y="384048"/>
+            <a:ext cx="8229600" cy="274320"/>
+          </a:xfrm>
+          <a:prstGeom prst="rect">
+            <a:avLst/>
+          </a:prstGeom>
+          <a:noFill/>
+          <a:ln/>
+        </p:spPr>
+        <p:txBody>
+          <a:bodyPr wrap="square" lIns="0" tIns="0" rIns="0" bIns="0" rtlCol="0" anchor="t"/>
+          <a:lstStyle/>
+          <a:p>
+            <a:pPr marL="0" indent="0">
+              <a:buNone/>
+            </a:pPr>
+            <a:r>
+              <a:rPr lang="en-US" sz="3200" b="1" kern="0" spc="200" dirty="0">
+                <a:solidFill>
                   <a:schemeClr val="tx1"/>
                 </a:solidFill>
                 <a:latin typeface="DM Sans" pitchFamily="34" charset="0"/>
@@ -3748,7 +6142,7 @@
               </a:rPr>
               <a:t>THE ASK</a:t>
             </a:r>
-            <a:endParaRPr lang="en-US" sz="1300" dirty="0"/>
+            <a:endParaRPr lang="en-US" sz="3200" dirty="0"/>
           </a:p>
         </p:txBody>
       </p:sp>
@@ -3760,7 +6154,7 @@
         </p:nvSpPr>
         <p:spPr>
           <a:xfrm>
-            <a:off x="548640" y="822960"/>
+            <a:off x="548640" y="1638749"/>
             <a:ext cx="4754880" cy="1828800"/>
           </a:xfrm>
           <a:prstGeom prst="rect">
@@ -3799,7 +6193,7 @@
         </p:nvSpPr>
         <p:spPr>
           <a:xfrm>
-            <a:off x="548640" y="2697480"/>
+            <a:off x="548640" y="3513269"/>
             <a:ext cx="4754880" cy="365760"/>
           </a:xfrm>
           <a:prstGeom prst="rect">
@@ -3838,7 +6232,7 @@
         </p:nvSpPr>
         <p:spPr>
           <a:xfrm>
-            <a:off x="548640" y="3200400"/>
+            <a:off x="548640" y="4016189"/>
             <a:ext cx="4389120" cy="822960"/>
           </a:xfrm>
           <a:prstGeom prst="rect">
@@ -3863,7 +6257,29 @@
                 <a:ea typeface="DM Sans" pitchFamily="34" charset="-122"/>
                 <a:cs typeface="DM Sans" pitchFamily="34" charset="-120"/>
               </a:rPr>
-              <a:t>Break-even at about 2,100 paying users. This round buys the proof that people pay.</a:t>
+              <a:t>Break-even at about </a:t>
+            </a:r>
+            <a:r>
+              <a:rPr lang="en-US" sz="1500" b="1" dirty="0">
+                <a:solidFill>
+                  <a:schemeClr val="tx1"/>
+                </a:solidFill>
+                <a:latin typeface="DM Sans" pitchFamily="34" charset="0"/>
+                <a:ea typeface="DM Sans" pitchFamily="34" charset="-122"/>
+                <a:cs typeface="DM Sans" pitchFamily="34" charset="-120"/>
+              </a:rPr>
+              <a:t>2,100</a:t>
+            </a:r>
+            <a:r>
+              <a:rPr lang="en-US" sz="1500" dirty="0">
+                <a:solidFill>
+                  <a:schemeClr val="tx1"/>
+                </a:solidFill>
+                <a:latin typeface="DM Sans" pitchFamily="34" charset="0"/>
+                <a:ea typeface="DM Sans" pitchFamily="34" charset="-122"/>
+                <a:cs typeface="DM Sans" pitchFamily="34" charset="-120"/>
+              </a:rPr>
+              <a:t> paying users. This round buys the proof that people pay.</a:t>
             </a:r>
             <a:endParaRPr lang="en-US" sz="1500" dirty="0"/>
           </a:p>
@@ -3876,13 +6292,13 @@
           <p:nvPr>
             <p:extLst>
               <p:ext uri="{D42A27DB-BD31-4B8C-83A1-F6EECF244321}">
-                <p14:modId xmlns:p14="http://schemas.microsoft.com/office/powerpoint/2010/main" val="586057027"/>
+                <p14:modId xmlns:p14="http://schemas.microsoft.com/office/powerpoint/2010/main" val="4011694046"/>
               </p:ext>
             </p:extLst>
           </p:nvPr>
         </p:nvGraphicFramePr>
         <p:xfrm>
-          <a:off x="5467350" y="777239"/>
+          <a:off x="5467350" y="1593028"/>
           <a:ext cx="6724650" cy="3566153"/>
         </p:xfrm>
         <a:graphic>
@@ -3917,315 +6333,6 @@
             <a:prstDash val="solid"/>
           </a:ln>
         </p:spPr>
-      </p:sp>
-      <p:sp>
-        <p:nvSpPr>
-          <p:cNvPr id="8" name="Text 5"/>
-          <p:cNvSpPr txBox="1"/>
-          <p:nvPr/>
-        </p:nvSpPr>
-        <p:spPr>
-          <a:xfrm>
-            <a:off x="548640" y="4709160"/>
-            <a:ext cx="2590724" cy="320040"/>
-          </a:xfrm>
-          <a:prstGeom prst="rect">
-            <a:avLst/>
-          </a:prstGeom>
-          <a:noFill/>
-          <a:ln/>
-        </p:spPr>
-        <p:txBody>
-          <a:bodyPr wrap="square" lIns="0" tIns="0" rIns="0" bIns="0" rtlCol="0" anchor="t"/>
-          <a:lstStyle/>
-          <a:p>
-            <a:pPr marL="0" indent="0">
-              <a:buNone/>
-            </a:pPr>
-            <a:r>
-              <a:rPr lang="en-US" sz="1400" b="1" dirty="0">
-                <a:solidFill>
-                  <a:schemeClr val="tx1"/>
-                </a:solidFill>
-                <a:latin typeface="DM Sans" pitchFamily="34" charset="0"/>
-                <a:ea typeface="DM Sans" pitchFamily="34" charset="-122"/>
-                <a:cs typeface="DM Sans" pitchFamily="34" charset="-120"/>
-              </a:rPr>
-              <a:t>Dec 2026</a:t>
-            </a:r>
-            <a:endParaRPr lang="en-US" sz="1400" dirty="0"/>
-          </a:p>
-        </p:txBody>
-      </p:sp>
-      <p:sp>
-        <p:nvSpPr>
-          <p:cNvPr id="9" name="Text 6"/>
-          <p:cNvSpPr txBox="1"/>
-          <p:nvPr/>
-        </p:nvSpPr>
-        <p:spPr>
-          <a:xfrm>
-            <a:off x="548640" y="5047488"/>
-            <a:ext cx="2590724" cy="640080"/>
-          </a:xfrm>
-          <a:prstGeom prst="rect">
-            <a:avLst/>
-          </a:prstGeom>
-          <a:noFill/>
-          <a:ln/>
-        </p:spPr>
-        <p:txBody>
-          <a:bodyPr wrap="square" lIns="0" tIns="0" rIns="0" bIns="0" rtlCol="0" anchor="t"/>
-          <a:lstStyle/>
-          <a:p>
-            <a:pPr marL="0" indent="0">
-              <a:buNone/>
-            </a:pPr>
-            <a:r>
-              <a:rPr lang="en-US" sz="1600" dirty="0">
-                <a:solidFill>
-                  <a:schemeClr val="tx1"/>
-                </a:solidFill>
-                <a:latin typeface="DM Sans" pitchFamily="34" charset="0"/>
-                <a:ea typeface="DM Sans" pitchFamily="34" charset="-122"/>
-                <a:cs typeface="DM Sans" pitchFamily="34" charset="-120"/>
-              </a:rPr>
-              <a:t>20 pilot users</a:t>
-            </a:r>
-            <a:endParaRPr lang="en-US" sz="1600" dirty="0"/>
-          </a:p>
-        </p:txBody>
-      </p:sp>
-      <p:sp>
-        <p:nvSpPr>
-          <p:cNvPr id="10" name="Text 7"/>
-          <p:cNvSpPr txBox="1"/>
-          <p:nvPr/>
-        </p:nvSpPr>
-        <p:spPr>
-          <a:xfrm>
-            <a:off x="3322244" y="4709160"/>
-            <a:ext cx="2590724" cy="320040"/>
-          </a:xfrm>
-          <a:prstGeom prst="rect">
-            <a:avLst/>
-          </a:prstGeom>
-          <a:noFill/>
-          <a:ln/>
-        </p:spPr>
-        <p:txBody>
-          <a:bodyPr wrap="square" lIns="0" tIns="0" rIns="0" bIns="0" rtlCol="0" anchor="t"/>
-          <a:lstStyle/>
-          <a:p>
-            <a:pPr marL="0" indent="0">
-              <a:buNone/>
-            </a:pPr>
-            <a:r>
-              <a:rPr lang="en-US" sz="1400" b="1" dirty="0">
-                <a:solidFill>
-                  <a:schemeClr val="tx1"/>
-                </a:solidFill>
-                <a:latin typeface="DM Sans" pitchFamily="34" charset="0"/>
-                <a:ea typeface="DM Sans" pitchFamily="34" charset="-122"/>
-                <a:cs typeface="DM Sans" pitchFamily="34" charset="-120"/>
-              </a:rPr>
-              <a:t>Jun 2027</a:t>
-            </a:r>
-            <a:endParaRPr lang="en-US" sz="1400" dirty="0"/>
-          </a:p>
-        </p:txBody>
-      </p:sp>
-      <p:sp>
-        <p:nvSpPr>
-          <p:cNvPr id="11" name="Text 8"/>
-          <p:cNvSpPr txBox="1"/>
-          <p:nvPr/>
-        </p:nvSpPr>
-        <p:spPr>
-          <a:xfrm>
-            <a:off x="3322244" y="5047488"/>
-            <a:ext cx="2590724" cy="640080"/>
-          </a:xfrm>
-          <a:prstGeom prst="rect">
-            <a:avLst/>
-          </a:prstGeom>
-          <a:noFill/>
-          <a:ln/>
-        </p:spPr>
-        <p:txBody>
-          <a:bodyPr wrap="square" lIns="0" tIns="0" rIns="0" bIns="0" rtlCol="0" anchor="t"/>
-          <a:lstStyle/>
-          <a:p>
-            <a:pPr marL="0" indent="0">
-              <a:buNone/>
-            </a:pPr>
-            <a:r>
-              <a:rPr lang="en-US" sz="1600" dirty="0">
-                <a:latin typeface="DM Sans" pitchFamily="34" charset="0"/>
-                <a:ea typeface="DM Sans" pitchFamily="34" charset="-122"/>
-                <a:cs typeface="DM Sans" pitchFamily="34" charset="-120"/>
-              </a:rPr>
-              <a:t>Paid launch</a:t>
-            </a:r>
-            <a:endParaRPr lang="en-US" sz="1600" dirty="0"/>
-          </a:p>
-        </p:txBody>
-      </p:sp>
-      <p:sp>
-        <p:nvSpPr>
-          <p:cNvPr id="12" name="Text 9"/>
-          <p:cNvSpPr txBox="1"/>
-          <p:nvPr/>
-        </p:nvSpPr>
-        <p:spPr>
-          <a:xfrm>
-            <a:off x="6095848" y="4709160"/>
-            <a:ext cx="2590724" cy="320040"/>
-          </a:xfrm>
-          <a:prstGeom prst="rect">
-            <a:avLst/>
-          </a:prstGeom>
-          <a:noFill/>
-          <a:ln/>
-        </p:spPr>
-        <p:txBody>
-          <a:bodyPr wrap="square" lIns="0" tIns="0" rIns="0" bIns="0" rtlCol="0" anchor="t"/>
-          <a:lstStyle/>
-          <a:p>
-            <a:pPr marL="0" indent="0">
-              <a:buNone/>
-            </a:pPr>
-            <a:r>
-              <a:rPr lang="en-US" sz="1400" b="1" dirty="0">
-                <a:solidFill>
-                  <a:schemeClr val="tx1"/>
-                </a:solidFill>
-                <a:latin typeface="DM Sans" pitchFamily="34" charset="0"/>
-                <a:ea typeface="DM Sans" pitchFamily="34" charset="-122"/>
-                <a:cs typeface="DM Sans" pitchFamily="34" charset="-120"/>
-              </a:rPr>
-              <a:t>Oct 2027</a:t>
-            </a:r>
-            <a:endParaRPr lang="en-US" sz="1400" dirty="0"/>
-          </a:p>
-        </p:txBody>
-      </p:sp>
-      <p:sp>
-        <p:nvSpPr>
-          <p:cNvPr id="13" name="Text 10"/>
-          <p:cNvSpPr txBox="1"/>
-          <p:nvPr/>
-        </p:nvSpPr>
-        <p:spPr>
-          <a:xfrm>
-            <a:off x="6095848" y="5047488"/>
-            <a:ext cx="2590724" cy="640080"/>
-          </a:xfrm>
-          <a:prstGeom prst="rect">
-            <a:avLst/>
-          </a:prstGeom>
-          <a:noFill/>
-          <a:ln/>
-        </p:spPr>
-        <p:txBody>
-          <a:bodyPr wrap="square" lIns="0" tIns="0" rIns="0" bIns="0" rtlCol="0" anchor="t"/>
-          <a:lstStyle/>
-          <a:p>
-            <a:pPr marL="0" indent="0">
-              <a:buNone/>
-            </a:pPr>
-            <a:r>
-              <a:rPr lang="en-US" sz="1600" dirty="0">
-                <a:solidFill>
-                  <a:schemeClr val="tx1"/>
-                </a:solidFill>
-                <a:latin typeface="DM Sans" pitchFamily="34" charset="0"/>
-                <a:ea typeface="DM Sans" pitchFamily="34" charset="-122"/>
-                <a:cs typeface="DM Sans" pitchFamily="34" charset="-120"/>
-              </a:rPr>
-              <a:t>400 paying users</a:t>
-            </a:r>
-            <a:endParaRPr lang="en-US" sz="1600" dirty="0"/>
-          </a:p>
-        </p:txBody>
-      </p:sp>
-      <p:sp>
-        <p:nvSpPr>
-          <p:cNvPr id="14" name="Text 11"/>
-          <p:cNvSpPr txBox="1"/>
-          <p:nvPr/>
-        </p:nvSpPr>
-        <p:spPr>
-          <a:xfrm>
-            <a:off x="8869451" y="4709160"/>
-            <a:ext cx="2590724" cy="320040"/>
-          </a:xfrm>
-          <a:prstGeom prst="rect">
-            <a:avLst/>
-          </a:prstGeom>
-          <a:noFill/>
-          <a:ln/>
-        </p:spPr>
-        <p:txBody>
-          <a:bodyPr wrap="square" lIns="0" tIns="0" rIns="0" bIns="0" rtlCol="0" anchor="t"/>
-          <a:lstStyle/>
-          <a:p>
-            <a:pPr marL="0" indent="0">
-              <a:buNone/>
-            </a:pPr>
-            <a:r>
-              <a:rPr lang="en-US" sz="1400" b="1" dirty="0">
-                <a:solidFill>
-                  <a:schemeClr val="tx1"/>
-                </a:solidFill>
-                <a:latin typeface="DM Sans" pitchFamily="34" charset="0"/>
-                <a:ea typeface="DM Sans" pitchFamily="34" charset="-122"/>
-                <a:cs typeface="DM Sans" pitchFamily="34" charset="-120"/>
-              </a:rPr>
-              <a:t>2028</a:t>
-            </a:r>
-            <a:endParaRPr lang="en-US" sz="1400" dirty="0"/>
-          </a:p>
-        </p:txBody>
-      </p:sp>
-      <p:sp>
-        <p:nvSpPr>
-          <p:cNvPr id="15" name="Text 12"/>
-          <p:cNvSpPr txBox="1"/>
-          <p:nvPr/>
-        </p:nvSpPr>
-        <p:spPr>
-          <a:xfrm>
-            <a:off x="8869451" y="5047488"/>
-            <a:ext cx="2590724" cy="640080"/>
-          </a:xfrm>
-          <a:prstGeom prst="rect">
-            <a:avLst/>
-          </a:prstGeom>
-          <a:noFill/>
-          <a:ln/>
-        </p:spPr>
-        <p:txBody>
-          <a:bodyPr wrap="square" lIns="0" tIns="0" rIns="0" bIns="0" rtlCol="0" anchor="t"/>
-          <a:lstStyle/>
-          <a:p>
-            <a:pPr marL="0" indent="0">
-              <a:buNone/>
-            </a:pPr>
-            <a:r>
-              <a:rPr lang="en-US" sz="1600" dirty="0">
-                <a:solidFill>
-                  <a:schemeClr val="tx1"/>
-                </a:solidFill>
-                <a:latin typeface="DM Sans" pitchFamily="34" charset="0"/>
-                <a:ea typeface="DM Sans" pitchFamily="34" charset="-122"/>
-                <a:cs typeface="DM Sans" pitchFamily="34" charset="-120"/>
-              </a:rPr>
-              <a:t>Team plan, Austria, Switzerland</a:t>
-            </a:r>
-            <a:endParaRPr lang="en-US" sz="1600" dirty="0"/>
-          </a:p>
-        </p:txBody>
       </p:sp>
       <p:sp>
         <p:nvSpPr>
@@ -4286,7 +6393,7 @@
           </a:prstGeom>
           <a:extLst>
             <a:ext uri="{C572A759-6A51-4108-AA02-DFA0A04FC94B}">
-              <ma14:wrappingTextBoxFlag xmlns="" xmlns:ma14="http://schemas.microsoft.com/office/mac/drawingml/2011/main" val="0"/>
+              <ma14:wrappingTextBoxFlag xmlns:ma14="http://schemas.microsoft.com/office/mac/drawingml/2011/main" xmlns="" val="0"/>
             </a:ext>
           </a:extLst>
         </p:spPr>
@@ -4308,7 +6415,7 @@
             <a:pPr algn="r"/>
             <a:fld id="{F7021451-1387-4CA6-816F-3879F97B5CBC}" type="slidenum">
               <a:rPr lang="en-US" b="0"/>
-              <a:t>10</a:t>
+              <a:t>12</a:t>
             </a:fld>
             <a:endParaRPr lang="en-US"/>
           </a:p>
@@ -4322,7 +6429,7 @@
 </p:sld>
 </file>
 
-<file path=ppt/slides/slide11.xml><?xml version="1.0" encoding="utf-8"?>
+<file path=ppt/slides/slide13.xml><?xml version="1.0" encoding="utf-8"?>
 <p:sld xmlns:a="http://schemas.openxmlformats.org/drawingml/2006/main" xmlns:r="http://schemas.openxmlformats.org/officeDocument/2006/relationships" xmlns:p="http://schemas.openxmlformats.org/presentationml/2006/main">
   <p:cSld>
     <p:spTree>
@@ -4800,7 +6907,7 @@
 </p:sld>
 </file>
 
-<file path=ppt/slides/slide12.xml><?xml version="1.0" encoding="utf-8"?>
+<file path=ppt/slides/slide14.xml><?xml version="1.0" encoding="utf-8"?>
 <p:sld xmlns:a="http://schemas.openxmlformats.org/drawingml/2006/main" xmlns:r="http://schemas.openxmlformats.org/officeDocument/2006/relationships" xmlns:p="http://schemas.openxmlformats.org/presentationml/2006/main" show="0">
   <p:cSld name="Slide 9">
     <p:spTree>
@@ -7890,7 +9997,7 @@
           </a:prstGeom>
           <a:extLst>
             <a:ext uri="{C572A759-6A51-4108-AA02-DFA0A04FC94B}">
-              <ma14:wrappingTextBoxFlag xmlns="" xmlns:ma14="http://schemas.microsoft.com/office/mac/drawingml/2011/main" val="0"/>
+              <ma14:wrappingTextBoxFlag xmlns:ma14="http://schemas.microsoft.com/office/mac/drawingml/2011/main" xmlns="" val="0"/>
             </a:ext>
           </a:extLst>
         </p:spPr>
@@ -7912,7 +10019,7 @@
             <a:pPr algn="r"/>
             <a:fld id="{F7021451-1387-4CA6-816F-3879F97B5CBC}" type="slidenum">
               <a:rPr lang="en-US" b="0"/>
-              <a:t>12</a:t>
+              <a:t>14</a:t>
             </a:fld>
             <a:endParaRPr lang="en-US"/>
           </a:p>
@@ -7931,7 +10038,7 @@
 </p:sld>
 </file>
 
-<file path=ppt/slides/slide13.xml><?xml version="1.0" encoding="utf-8"?>
+<file path=ppt/slides/slide15.xml><?xml version="1.0" encoding="utf-8"?>
 <p:sld xmlns:a="http://schemas.openxmlformats.org/drawingml/2006/main" xmlns:r="http://schemas.openxmlformats.org/officeDocument/2006/relationships" xmlns:p="http://schemas.openxmlformats.org/presentationml/2006/main">
   <p:cSld name="Slide 10">
     <p:spTree>
@@ -8206,7 +10313,7 @@
                 <a:ea typeface="DM Sans" pitchFamily="34" charset="-122"/>
                 <a:cs typeface="DM Sans" pitchFamily="34" charset="-120"/>
               </a:rPr>
-              <a:t>1 event and up to 5 contacts a month</a:t>
+              <a:t>1 event and up to 3 contacts a month</a:t>
             </a:r>
             <a:endParaRPr lang="en-US" sz="1400" dirty="0"/>
           </a:p>
@@ -8769,7 +10876,7 @@
           </a:prstGeom>
           <a:extLst>
             <a:ext uri="{C572A759-6A51-4108-AA02-DFA0A04FC94B}">
-              <ma14:wrappingTextBoxFlag xmlns="" xmlns:ma14="http://schemas.microsoft.com/office/mac/drawingml/2011/main" val="0"/>
+              <ma14:wrappingTextBoxFlag xmlns:ma14="http://schemas.microsoft.com/office/mac/drawingml/2011/main" xmlns="" val="0"/>
             </a:ext>
           </a:extLst>
         </p:spPr>
@@ -8791,7 +10898,7 @@
             <a:pPr algn="r"/>
             <a:fld id="{F7021451-1387-4CA6-816F-3879F97B5CBC}" type="slidenum">
               <a:rPr lang="en-US" b="0"/>
-              <a:t>13</a:t>
+              <a:t>15</a:t>
             </a:fld>
             <a:endParaRPr lang="en-US"/>
           </a:p>
@@ -8805,7 +10912,7 @@
 </p:sld>
 </file>
 
-<file path=ppt/slides/slide14.xml><?xml version="1.0" encoding="utf-8"?>
+<file path=ppt/slides/slide16.xml><?xml version="1.0" encoding="utf-8"?>
 <p:sld xmlns:a="http://schemas.openxmlformats.org/drawingml/2006/main" xmlns:r="http://schemas.openxmlformats.org/officeDocument/2006/relationships" xmlns:p="http://schemas.openxmlformats.org/presentationml/2006/main">
   <p:cSld name="Slide 11">
     <p:spTree>
@@ -11206,7 +13313,7 @@
           </a:prstGeom>
           <a:extLst>
             <a:ext uri="{C572A759-6A51-4108-AA02-DFA0A04FC94B}">
-              <ma14:wrappingTextBoxFlag xmlns="" xmlns:ma14="http://schemas.microsoft.com/office/mac/drawingml/2011/main" val="0"/>
+              <ma14:wrappingTextBoxFlag xmlns:ma14="http://schemas.microsoft.com/office/mac/drawingml/2011/main" xmlns="" val="0"/>
             </a:ext>
           </a:extLst>
         </p:spPr>
@@ -11228,7 +13335,7 @@
             <a:pPr algn="r"/>
             <a:fld id="{F7021451-1387-4CA6-816F-3879F97B5CBC}" type="slidenum">
               <a:rPr lang="en-US" b="0"/>
-              <a:t>14</a:t>
+              <a:t>16</a:t>
             </a:fld>
             <a:endParaRPr lang="en-US"/>
           </a:p>
@@ -11242,7 +13349,7 @@
 </p:sld>
 </file>
 
-<file path=ppt/slides/slide15.xml><?xml version="1.0" encoding="utf-8"?>
+<file path=ppt/slides/slide17.xml><?xml version="1.0" encoding="utf-8"?>
 <p:sld xmlns:a="http://schemas.openxmlformats.org/drawingml/2006/main" xmlns:r="http://schemas.openxmlformats.org/officeDocument/2006/relationships" xmlns:p="http://schemas.openxmlformats.org/presentationml/2006/main" show="0">
   <p:cSld name="Slide 12">
     <p:spTree>
@@ -12101,7 +14208,7 @@
           </a:prstGeom>
           <a:extLst>
             <a:ext uri="{C572A759-6A51-4108-AA02-DFA0A04FC94B}">
-              <ma14:wrappingTextBoxFlag xmlns="" xmlns:ma14="http://schemas.microsoft.com/office/mac/drawingml/2011/main" val="0"/>
+              <ma14:wrappingTextBoxFlag xmlns:ma14="http://schemas.microsoft.com/office/mac/drawingml/2011/main" xmlns="" val="0"/>
             </a:ext>
           </a:extLst>
         </p:spPr>
@@ -12123,7 +14230,7 @@
             <a:pPr algn="r"/>
             <a:fld id="{F7021451-1387-4CA6-816F-3879F97B5CBC}" type="slidenum">
               <a:rPr lang="en-US" b="0"/>
-              <a:t>15</a:t>
+              <a:t>17</a:t>
             </a:fld>
             <a:endParaRPr lang="en-US"/>
           </a:p>
@@ -12137,7 +14244,7 @@
 </p:sld>
 </file>
 
-<file path=ppt/slides/slide16.xml><?xml version="1.0" encoding="utf-8"?>
+<file path=ppt/slides/slide18.xml><?xml version="1.0" encoding="utf-8"?>
 <p:sld xmlns:a="http://schemas.openxmlformats.org/drawingml/2006/main" xmlns:r="http://schemas.openxmlformats.org/officeDocument/2006/relationships" xmlns:p="http://schemas.openxmlformats.org/presentationml/2006/main">
   <p:cSld name="Slide 13">
     <p:spTree>
@@ -12947,7 +15054,7 @@
           </a:prstGeom>
           <a:extLst>
             <a:ext uri="{C572A759-6A51-4108-AA02-DFA0A04FC94B}">
-              <ma14:wrappingTextBoxFlag xmlns="" xmlns:ma14="http://schemas.microsoft.com/office/mac/drawingml/2011/main" val="0"/>
+              <ma14:wrappingTextBoxFlag xmlns:ma14="http://schemas.microsoft.com/office/mac/drawingml/2011/main" xmlns="" val="0"/>
             </a:ext>
           </a:extLst>
         </p:spPr>
@@ -13216,7 +15323,7 @@
           </a:prstGeom>
           <a:extLst>
             <a:ext uri="{C572A759-6A51-4108-AA02-DFA0A04FC94B}">
-              <ma14:wrappingTextBoxFlag xmlns="" xmlns:ma14="http://schemas.microsoft.com/office/mac/drawingml/2011/main" val="0"/>
+              <ma14:wrappingTextBoxFlag xmlns:ma14="http://schemas.microsoft.com/office/mac/drawingml/2011/main" xmlns="" val="0"/>
             </a:ext>
           </a:extLst>
         </p:spPr>
@@ -13979,7 +16086,7 @@
           </a:prstGeom>
           <a:extLst>
             <a:ext uri="{C572A759-6A51-4108-AA02-DFA0A04FC94B}">
-              <ma14:wrappingTextBoxFlag xmlns="" xmlns:ma14="http://schemas.microsoft.com/office/mac/drawingml/2011/main" val="0"/>
+              <ma14:wrappingTextBoxFlag xmlns:ma14="http://schemas.microsoft.com/office/mac/drawingml/2011/main" xmlns="" val="0"/>
             </a:ext>
           </a:extLst>
         </p:spPr>
@@ -14754,7 +16861,7 @@
           </a:prstGeom>
           <a:extLst>
             <a:ext uri="{C572A759-6A51-4108-AA02-DFA0A04FC94B}">
-              <ma14:wrappingTextBoxFlag xmlns="" xmlns:ma14="http://schemas.microsoft.com/office/mac/drawingml/2011/main" val="0"/>
+              <ma14:wrappingTextBoxFlag xmlns:ma14="http://schemas.microsoft.com/office/mac/drawingml/2011/main" xmlns="" val="0"/>
             </a:ext>
           </a:extLst>
         </p:spPr>
@@ -16597,7 +18704,7 @@
           </a:prstGeom>
           <a:extLst>
             <a:ext uri="{C572A759-6A51-4108-AA02-DFA0A04FC94B}">
-              <ma14:wrappingTextBoxFlag xmlns="" xmlns:ma14="http://schemas.microsoft.com/office/mac/drawingml/2011/main" val="0"/>
+              <ma14:wrappingTextBoxFlag xmlns:ma14="http://schemas.microsoft.com/office/mac/drawingml/2011/main" xmlns="" val="0"/>
             </a:ext>
           </a:extLst>
         </p:spPr>
@@ -16653,6 +18760,3227 @@
       <p:sp>
         <p:nvSpPr>
           <p:cNvPr id="2" name="Kicker"/>
+          <p:cNvSpPr txBox="1"/>
+          <p:nvPr/>
+        </p:nvSpPr>
+        <p:spPr>
+          <a:xfrm>
+            <a:off x="348136" y="371144"/>
+            <a:ext cx="8229600" cy="274320"/>
+          </a:xfrm>
+          <a:prstGeom prst="rect">
+            <a:avLst/>
+          </a:prstGeom>
+          <a:noFill/>
+          <a:ln/>
+        </p:spPr>
+        <p:txBody>
+          <a:bodyPr wrap="square" lIns="0" tIns="0" rIns="0" bIns="0" rtlCol="0" anchor="t"/>
+          <a:lstStyle/>
+          <a:p>
+            <a:pPr marL="0" indent="0">
+              <a:buNone/>
+            </a:pPr>
+            <a:r>
+              <a:rPr lang="en-US" sz="3200" b="1" kern="0" spc="200" dirty="0">
+                <a:solidFill>
+                  <a:schemeClr val="accent3"/>
+                </a:solidFill>
+                <a:latin typeface="DM Sans" pitchFamily="34" charset="0"/>
+                <a:ea typeface="DM Sans" pitchFamily="34" charset="-122"/>
+                <a:cs typeface="DM Sans" pitchFamily="34" charset="-120"/>
+              </a:rPr>
+              <a:t>COST TO RUN</a:t>
+            </a:r>
+            <a:endParaRPr lang="en-US" sz="3200" dirty="0"/>
+          </a:p>
+        </p:txBody>
+      </p:sp>
+      <p:sp>
+        <p:nvSpPr>
+          <p:cNvPr id="4" name="Text 2"/>
+          <p:cNvSpPr txBox="1"/>
+          <p:nvPr/>
+        </p:nvSpPr>
+        <p:spPr>
+          <a:xfrm>
+            <a:off x="348136" y="3107568"/>
+            <a:ext cx="5364328" cy="320040"/>
+          </a:xfrm>
+          <a:prstGeom prst="rect">
+            <a:avLst/>
+          </a:prstGeom>
+          <a:noFill/>
+          <a:ln/>
+        </p:spPr>
+        <p:txBody>
+          <a:bodyPr wrap="square" lIns="0" tIns="0" rIns="0" bIns="0" rtlCol="0" anchor="t"/>
+          <a:lstStyle/>
+          <a:p>
+            <a:pPr marL="0" indent="0">
+              <a:buNone/>
+            </a:pPr>
+            <a:r>
+              <a:rPr lang="en-US" sz="1500" b="1" dirty="0">
+                <a:solidFill>
+                  <a:schemeClr val="tx1"/>
+                </a:solidFill>
+                <a:latin typeface="DM Sans" pitchFamily="34" charset="0"/>
+                <a:ea typeface="DM Sans" pitchFamily="34" charset="-122"/>
+                <a:cs typeface="DM Sans" pitchFamily="34" charset="-120"/>
+              </a:rPr>
+              <a:t>AI per contact, 60-second voice memo</a:t>
+            </a:r>
+            <a:endParaRPr lang="en-US" sz="1500" dirty="0"/>
+          </a:p>
+        </p:txBody>
+      </p:sp>
+      <p:graphicFrame>
+        <p:nvGraphicFramePr>
+          <p:cNvPr id="7" name="AI cost table"/>
+          <p:cNvGraphicFramePr>
+            <a:graphicFrameLocks noGrp="1"/>
+          </p:cNvGraphicFramePr>
+          <p:nvPr>
+            <p:extLst>
+              <p:ext uri="{D42A27DB-BD31-4B8C-83A1-F6EECF244321}">
+                <p14:modId xmlns:p14="http://schemas.microsoft.com/office/powerpoint/2010/main" val="1214288749"/>
+              </p:ext>
+            </p:extLst>
+          </p:nvPr>
+        </p:nvGraphicFramePr>
+        <p:xfrm>
+          <a:off x="348136" y="3416458"/>
+          <a:ext cx="5454396" cy="2057400"/>
+        </p:xfrm>
+        <a:graphic>
+          <a:graphicData uri="http://schemas.openxmlformats.org/drawingml/2006/table">
+            <a:tbl>
+              <a:tblPr/>
+              <a:tblGrid>
+                <a:gridCol w="2240280">
+                  <a:extLst>
+                    <a:ext uri="{9D8B030D-6E8A-4147-A177-3AD203B41FA5}">
+                      <a16:colId xmlns:a16="http://schemas.microsoft.com/office/drawing/2014/main" val="20000"/>
+                    </a:ext>
+                  </a:extLst>
+                </a:gridCol>
+                <a:gridCol w="2011680">
+                  <a:extLst>
+                    <a:ext uri="{9D8B030D-6E8A-4147-A177-3AD203B41FA5}">
+                      <a16:colId xmlns:a16="http://schemas.microsoft.com/office/drawing/2014/main" val="20001"/>
+                    </a:ext>
+                  </a:extLst>
+                </a:gridCol>
+                <a:gridCol w="1202436">
+                  <a:extLst>
+                    <a:ext uri="{9D8B030D-6E8A-4147-A177-3AD203B41FA5}">
+                      <a16:colId xmlns:a16="http://schemas.microsoft.com/office/drawing/2014/main" val="20002"/>
+                    </a:ext>
+                  </a:extLst>
+                </a:gridCol>
+              </a:tblGrid>
+              <a:tr h="411480">
+                <a:tc>
+                  <a:txBody>
+                    <a:bodyPr/>
+                    <a:lstStyle/>
+                    <a:p>
+                      <a:pPr marL="0" indent="0">
+                        <a:buNone/>
+                      </a:pPr>
+                      <a:r>
+                        <a:rPr lang="en-US" sz="1400" b="1" dirty="0">
+                          <a:solidFill>
+                            <a:srgbClr val="F7F0E4"/>
+                          </a:solidFill>
+                          <a:latin typeface="DM Sans" pitchFamily="34" charset="0"/>
+                          <a:ea typeface="DM Sans" pitchFamily="34" charset="-122"/>
+                          <a:cs typeface="DM Sans" pitchFamily="34" charset="-120"/>
+                        </a:rPr>
+                        <a:t>API call</a:t>
+                      </a:r>
+                      <a:endParaRPr lang="en-US" sz="1400" dirty="0">
+                        <a:latin typeface="DM Sans" charset="0"/>
+                        <a:ea typeface="DM Sans" charset="0"/>
+                        <a:cs typeface="DM Sans" charset="0"/>
+                      </a:endParaRPr>
+                    </a:p>
+                  </a:txBody>
+                  <a:tcPr marL="101600" marR="101600" marT="50800" marB="50800" anchor="ctr">
+                    <a:lnL w="9525" cap="flat" cmpd="sng" algn="ctr">
+                      <a:solidFill>
+                        <a:srgbClr val="CFC5B5"/>
+                      </a:solidFill>
+                      <a:prstDash val="solid"/>
+                      <a:round/>
+                      <a:headEnd type="none" w="med" len="med"/>
+                      <a:tailEnd type="none" w="med" len="med"/>
+                    </a:lnL>
+                    <a:lnR w="9525" cap="flat" cmpd="sng" algn="ctr">
+                      <a:solidFill>
+                        <a:srgbClr val="CFC5B5"/>
+                      </a:solidFill>
+                      <a:prstDash val="solid"/>
+                      <a:round/>
+                      <a:headEnd type="none" w="med" len="med"/>
+                      <a:tailEnd type="none" w="med" len="med"/>
+                    </a:lnR>
+                    <a:lnT w="9525" cap="flat" cmpd="sng" algn="ctr">
+                      <a:solidFill>
+                        <a:srgbClr val="CFC5B5"/>
+                      </a:solidFill>
+                      <a:prstDash val="solid"/>
+                      <a:round/>
+                      <a:headEnd type="none" w="med" len="med"/>
+                      <a:tailEnd type="none" w="med" len="med"/>
+                    </a:lnT>
+                    <a:lnB w="9525" cap="flat" cmpd="sng" algn="ctr">
+                      <a:solidFill>
+                        <a:srgbClr val="CFC5B5"/>
+                      </a:solidFill>
+                      <a:prstDash val="solid"/>
+                      <a:round/>
+                      <a:headEnd type="none" w="med" len="med"/>
+                      <a:tailEnd type="none" w="med" len="med"/>
+                    </a:lnB>
+                    <a:solidFill>
+                      <a:srgbClr val="15110E"/>
+                    </a:solidFill>
+                  </a:tcPr>
+                </a:tc>
+                <a:tc>
+                  <a:txBody>
+                    <a:bodyPr/>
+                    <a:lstStyle/>
+                    <a:p>
+                      <a:pPr marL="0" indent="0">
+                        <a:buNone/>
+                      </a:pPr>
+                      <a:r>
+                        <a:rPr lang="en-US" sz="1400" b="1" dirty="0">
+                          <a:solidFill>
+                            <a:srgbClr val="F7F0E4"/>
+                          </a:solidFill>
+                          <a:latin typeface="DM Sans" pitchFamily="34" charset="0"/>
+                          <a:ea typeface="DM Sans" pitchFamily="34" charset="-122"/>
+                          <a:cs typeface="DM Sans" pitchFamily="34" charset="-120"/>
+                        </a:rPr>
+                        <a:t>Usage (in + out)</a:t>
+                      </a:r>
+                      <a:endParaRPr lang="en-US" sz="1400" dirty="0">
+                        <a:latin typeface="DM Sans" charset="0"/>
+                        <a:ea typeface="DM Sans" charset="0"/>
+                        <a:cs typeface="DM Sans" charset="0"/>
+                      </a:endParaRPr>
+                    </a:p>
+                  </a:txBody>
+                  <a:tcPr marL="101600" marR="101600" marT="50800" marB="50800" anchor="ctr">
+                    <a:lnL w="9525" cap="flat" cmpd="sng" algn="ctr">
+                      <a:solidFill>
+                        <a:srgbClr val="CFC5B5"/>
+                      </a:solidFill>
+                      <a:prstDash val="solid"/>
+                      <a:round/>
+                      <a:headEnd type="none" w="med" len="med"/>
+                      <a:tailEnd type="none" w="med" len="med"/>
+                    </a:lnL>
+                    <a:lnR w="9525" cap="flat" cmpd="sng" algn="ctr">
+                      <a:solidFill>
+                        <a:srgbClr val="CFC5B5"/>
+                      </a:solidFill>
+                      <a:prstDash val="solid"/>
+                      <a:round/>
+                      <a:headEnd type="none" w="med" len="med"/>
+                      <a:tailEnd type="none" w="med" len="med"/>
+                    </a:lnR>
+                    <a:lnT w="9525" cap="flat" cmpd="sng" algn="ctr">
+                      <a:solidFill>
+                        <a:srgbClr val="CFC5B5"/>
+                      </a:solidFill>
+                      <a:prstDash val="solid"/>
+                      <a:round/>
+                      <a:headEnd type="none" w="med" len="med"/>
+                      <a:tailEnd type="none" w="med" len="med"/>
+                    </a:lnT>
+                    <a:lnB w="9525" cap="flat" cmpd="sng" algn="ctr">
+                      <a:solidFill>
+                        <a:srgbClr val="CFC5B5"/>
+                      </a:solidFill>
+                      <a:prstDash val="solid"/>
+                      <a:round/>
+                      <a:headEnd type="none" w="med" len="med"/>
+                      <a:tailEnd type="none" w="med" len="med"/>
+                    </a:lnB>
+                    <a:solidFill>
+                      <a:srgbClr val="15110E"/>
+                    </a:solidFill>
+                  </a:tcPr>
+                </a:tc>
+                <a:tc>
+                  <a:txBody>
+                    <a:bodyPr/>
+                    <a:lstStyle/>
+                    <a:p>
+                      <a:pPr marL="0" indent="0">
+                        <a:buNone/>
+                      </a:pPr>
+                      <a:r>
+                        <a:rPr lang="en-US" sz="1400" b="1" dirty="0">
+                          <a:solidFill>
+                            <a:srgbClr val="F7F0E4"/>
+                          </a:solidFill>
+                          <a:latin typeface="DM Sans" pitchFamily="34" charset="0"/>
+                          <a:ea typeface="DM Sans" pitchFamily="34" charset="-122"/>
+                          <a:cs typeface="DM Sans" pitchFamily="34" charset="-120"/>
+                        </a:rPr>
+                        <a:t>Cost</a:t>
+                      </a:r>
+                      <a:endParaRPr lang="en-US" sz="1400" dirty="0">
+                        <a:latin typeface="DM Sans" charset="0"/>
+                        <a:ea typeface="DM Sans" charset="0"/>
+                        <a:cs typeface="DM Sans" charset="0"/>
+                      </a:endParaRPr>
+                    </a:p>
+                  </a:txBody>
+                  <a:tcPr marL="101600" marR="101600" marT="50800" marB="50800" anchor="ctr">
+                    <a:lnL w="9525" cap="flat" cmpd="sng" algn="ctr">
+                      <a:solidFill>
+                        <a:srgbClr val="CFC5B5"/>
+                      </a:solidFill>
+                      <a:prstDash val="solid"/>
+                      <a:round/>
+                      <a:headEnd type="none" w="med" len="med"/>
+                      <a:tailEnd type="none" w="med" len="med"/>
+                    </a:lnL>
+                    <a:lnR w="9525" cap="flat" cmpd="sng" algn="ctr">
+                      <a:solidFill>
+                        <a:srgbClr val="CFC5B5"/>
+                      </a:solidFill>
+                      <a:prstDash val="solid"/>
+                      <a:round/>
+                      <a:headEnd type="none" w="med" len="med"/>
+                      <a:tailEnd type="none" w="med" len="med"/>
+                    </a:lnR>
+                    <a:lnT w="9525" cap="flat" cmpd="sng" algn="ctr">
+                      <a:solidFill>
+                        <a:srgbClr val="CFC5B5"/>
+                      </a:solidFill>
+                      <a:prstDash val="solid"/>
+                      <a:round/>
+                      <a:headEnd type="none" w="med" len="med"/>
+                      <a:tailEnd type="none" w="med" len="med"/>
+                    </a:lnT>
+                    <a:lnB w="9525" cap="flat" cmpd="sng" algn="ctr">
+                      <a:solidFill>
+                        <a:srgbClr val="CFC5B5"/>
+                      </a:solidFill>
+                      <a:prstDash val="solid"/>
+                      <a:round/>
+                      <a:headEnd type="none" w="med" len="med"/>
+                      <a:tailEnd type="none" w="med" len="med"/>
+                    </a:lnB>
+                    <a:solidFill>
+                      <a:srgbClr val="15110E"/>
+                    </a:solidFill>
+                  </a:tcPr>
+                </a:tc>
+                <a:extLst>
+                  <a:ext uri="{0D108BD9-81ED-4DB2-BD59-A6C34878D82A}">
+                    <a16:rowId xmlns:a16="http://schemas.microsoft.com/office/drawing/2014/main" val="10000"/>
+                  </a:ext>
+                </a:extLst>
+              </a:tr>
+              <a:tr h="411480">
+                <a:tc>
+                  <a:txBody>
+                    <a:bodyPr/>
+                    <a:lstStyle/>
+                    <a:p>
+                      <a:pPr marL="0" indent="0">
+                        <a:buNone/>
+                      </a:pPr>
+                      <a:r>
+                        <a:rPr lang="en-US" sz="1400" dirty="0">
+                          <a:solidFill>
+                            <a:srgbClr val="15110E"/>
+                          </a:solidFill>
+                          <a:latin typeface="DM Sans" pitchFamily="34" charset="0"/>
+                          <a:ea typeface="DM Sans" pitchFamily="34" charset="-122"/>
+                          <a:cs typeface="DM Sans" pitchFamily="34" charset="-120"/>
+                        </a:rPr>
+                        <a:t>Whisper transcription</a:t>
+                      </a:r>
+                      <a:endParaRPr lang="en-US" sz="1400" dirty="0">
+                        <a:latin typeface="DM Sans" charset="0"/>
+                        <a:ea typeface="DM Sans" charset="0"/>
+                        <a:cs typeface="DM Sans" charset="0"/>
+                      </a:endParaRPr>
+                    </a:p>
+                  </a:txBody>
+                  <a:tcPr marL="101600" marR="101600" marT="50800" marB="50800" anchor="ctr">
+                    <a:lnL w="9525" cap="flat" cmpd="sng" algn="ctr">
+                      <a:solidFill>
+                        <a:srgbClr val="CFC5B5"/>
+                      </a:solidFill>
+                      <a:prstDash val="solid"/>
+                      <a:round/>
+                      <a:headEnd type="none" w="med" len="med"/>
+                      <a:tailEnd type="none" w="med" len="med"/>
+                    </a:lnL>
+                    <a:lnR w="9525" cap="flat" cmpd="sng" algn="ctr">
+                      <a:solidFill>
+                        <a:srgbClr val="CFC5B5"/>
+                      </a:solidFill>
+                      <a:prstDash val="solid"/>
+                      <a:round/>
+                      <a:headEnd type="none" w="med" len="med"/>
+                      <a:tailEnd type="none" w="med" len="med"/>
+                    </a:lnR>
+                    <a:lnT w="9525" cap="flat" cmpd="sng" algn="ctr">
+                      <a:solidFill>
+                        <a:srgbClr val="CFC5B5"/>
+                      </a:solidFill>
+                      <a:prstDash val="solid"/>
+                      <a:round/>
+                      <a:headEnd type="none" w="med" len="med"/>
+                      <a:tailEnd type="none" w="med" len="med"/>
+                    </a:lnT>
+                    <a:lnB w="9525" cap="flat" cmpd="sng" algn="ctr">
+                      <a:solidFill>
+                        <a:srgbClr val="CFC5B5"/>
+                      </a:solidFill>
+                      <a:prstDash val="solid"/>
+                      <a:round/>
+                      <a:headEnd type="none" w="med" len="med"/>
+                      <a:tailEnd type="none" w="med" len="med"/>
+                    </a:lnB>
+                    <a:solidFill>
+                      <a:srgbClr val="EADFCB"/>
+                    </a:solidFill>
+                  </a:tcPr>
+                </a:tc>
+                <a:tc>
+                  <a:txBody>
+                    <a:bodyPr/>
+                    <a:lstStyle/>
+                    <a:p>
+                      <a:pPr marL="0" indent="0">
+                        <a:buNone/>
+                      </a:pPr>
+                      <a:r>
+                        <a:rPr lang="en-US" sz="1400" dirty="0">
+                          <a:solidFill>
+                            <a:srgbClr val="15110E"/>
+                          </a:solidFill>
+                          <a:latin typeface="DM Sans" pitchFamily="34" charset="0"/>
+                          <a:ea typeface="DM Sans" pitchFamily="34" charset="-122"/>
+                          <a:cs typeface="DM Sans" pitchFamily="34" charset="-120"/>
+                        </a:rPr>
+                        <a:t>60 seconds</a:t>
+                      </a:r>
+                      <a:endParaRPr lang="en-US" sz="1400" dirty="0">
+                        <a:latin typeface="DM Sans" charset="0"/>
+                        <a:ea typeface="DM Sans" charset="0"/>
+                        <a:cs typeface="DM Sans" charset="0"/>
+                      </a:endParaRPr>
+                    </a:p>
+                  </a:txBody>
+                  <a:tcPr marL="101600" marR="101600" marT="50800" marB="50800" anchor="ctr">
+                    <a:lnL w="9525" cap="flat" cmpd="sng" algn="ctr">
+                      <a:solidFill>
+                        <a:srgbClr val="CFC5B5"/>
+                      </a:solidFill>
+                      <a:prstDash val="solid"/>
+                      <a:round/>
+                      <a:headEnd type="none" w="med" len="med"/>
+                      <a:tailEnd type="none" w="med" len="med"/>
+                    </a:lnL>
+                    <a:lnR w="9525" cap="flat" cmpd="sng" algn="ctr">
+                      <a:solidFill>
+                        <a:srgbClr val="CFC5B5"/>
+                      </a:solidFill>
+                      <a:prstDash val="solid"/>
+                      <a:round/>
+                      <a:headEnd type="none" w="med" len="med"/>
+                      <a:tailEnd type="none" w="med" len="med"/>
+                    </a:lnR>
+                    <a:lnT w="9525" cap="flat" cmpd="sng" algn="ctr">
+                      <a:solidFill>
+                        <a:srgbClr val="CFC5B5"/>
+                      </a:solidFill>
+                      <a:prstDash val="solid"/>
+                      <a:round/>
+                      <a:headEnd type="none" w="med" len="med"/>
+                      <a:tailEnd type="none" w="med" len="med"/>
+                    </a:lnT>
+                    <a:lnB w="9525" cap="flat" cmpd="sng" algn="ctr">
+                      <a:solidFill>
+                        <a:srgbClr val="CFC5B5"/>
+                      </a:solidFill>
+                      <a:prstDash val="solid"/>
+                      <a:round/>
+                      <a:headEnd type="none" w="med" len="med"/>
+                      <a:tailEnd type="none" w="med" len="med"/>
+                    </a:lnB>
+                    <a:solidFill>
+                      <a:srgbClr val="EADFCB"/>
+                    </a:solidFill>
+                  </a:tcPr>
+                </a:tc>
+                <a:tc>
+                  <a:txBody>
+                    <a:bodyPr/>
+                    <a:lstStyle/>
+                    <a:p>
+                      <a:pPr marL="0" indent="0" algn="r">
+                        <a:buNone/>
+                      </a:pPr>
+                      <a:r>
+                        <a:rPr lang="en-US" sz="1400" b="0" dirty="0">
+                          <a:solidFill>
+                            <a:schemeClr val="tx1"/>
+                          </a:solidFill>
+                          <a:latin typeface="Oswald" pitchFamily="34" charset="0"/>
+                          <a:ea typeface="Oswald" pitchFamily="34" charset="-122"/>
+                          <a:cs typeface="Arial" panose="020B0604020202020204" pitchFamily="34" charset="0"/>
+                        </a:rPr>
+                        <a:t>€</a:t>
+                      </a:r>
+                      <a:r>
+                        <a:rPr lang="en-US" sz="1400" dirty="0">
+                          <a:solidFill>
+                            <a:srgbClr val="15110E"/>
+                          </a:solidFill>
+                          <a:latin typeface="DM Sans" pitchFamily="34" charset="0"/>
+                          <a:ea typeface="DM Sans" pitchFamily="34" charset="-122"/>
+                          <a:cs typeface="DM Sans" pitchFamily="34" charset="-120"/>
+                        </a:rPr>
+                        <a:t>0.00018</a:t>
+                      </a:r>
+                      <a:endParaRPr lang="en-US" sz="1400" dirty="0">
+                        <a:latin typeface="DM Sans" charset="0"/>
+                        <a:ea typeface="DM Sans" charset="0"/>
+                        <a:cs typeface="DM Sans" charset="0"/>
+                      </a:endParaRPr>
+                    </a:p>
+                  </a:txBody>
+                  <a:tcPr marL="101600" marR="101600" marT="50800" marB="50800" anchor="ctr">
+                    <a:lnL w="9525" cap="flat" cmpd="sng" algn="ctr">
+                      <a:solidFill>
+                        <a:srgbClr val="CFC5B5"/>
+                      </a:solidFill>
+                      <a:prstDash val="solid"/>
+                      <a:round/>
+                      <a:headEnd type="none" w="med" len="med"/>
+                      <a:tailEnd type="none" w="med" len="med"/>
+                    </a:lnL>
+                    <a:lnR w="9525" cap="flat" cmpd="sng" algn="ctr">
+                      <a:solidFill>
+                        <a:srgbClr val="CFC5B5"/>
+                      </a:solidFill>
+                      <a:prstDash val="solid"/>
+                      <a:round/>
+                      <a:headEnd type="none" w="med" len="med"/>
+                      <a:tailEnd type="none" w="med" len="med"/>
+                    </a:lnR>
+                    <a:lnT w="9525" cap="flat" cmpd="sng" algn="ctr">
+                      <a:solidFill>
+                        <a:srgbClr val="CFC5B5"/>
+                      </a:solidFill>
+                      <a:prstDash val="solid"/>
+                      <a:round/>
+                      <a:headEnd type="none" w="med" len="med"/>
+                      <a:tailEnd type="none" w="med" len="med"/>
+                    </a:lnT>
+                    <a:lnB w="9525" cap="flat" cmpd="sng" algn="ctr">
+                      <a:solidFill>
+                        <a:srgbClr val="CFC5B5"/>
+                      </a:solidFill>
+                      <a:prstDash val="solid"/>
+                      <a:round/>
+                      <a:headEnd type="none" w="med" len="med"/>
+                      <a:tailEnd type="none" w="med" len="med"/>
+                    </a:lnB>
+                    <a:solidFill>
+                      <a:srgbClr val="EADFCB"/>
+                    </a:solidFill>
+                  </a:tcPr>
+                </a:tc>
+                <a:extLst>
+                  <a:ext uri="{0D108BD9-81ED-4DB2-BD59-A6C34878D82A}">
+                    <a16:rowId xmlns:a16="http://schemas.microsoft.com/office/drawing/2014/main" val="10001"/>
+                  </a:ext>
+                </a:extLst>
+              </a:tr>
+              <a:tr h="411480">
+                <a:tc>
+                  <a:txBody>
+                    <a:bodyPr/>
+                    <a:lstStyle/>
+                    <a:p>
+                      <a:pPr marL="0" indent="0">
+                        <a:buNone/>
+                      </a:pPr>
+                      <a:r>
+                        <a:rPr lang="en-US" sz="1400" dirty="0">
+                          <a:solidFill>
+                            <a:srgbClr val="15110E"/>
+                          </a:solidFill>
+                          <a:latin typeface="DM Sans" pitchFamily="34" charset="0"/>
+                          <a:ea typeface="DM Sans" pitchFamily="34" charset="-122"/>
+                          <a:cs typeface="DM Sans" pitchFamily="34" charset="-120"/>
+                        </a:rPr>
+                        <a:t>Summary</a:t>
+                      </a:r>
+                      <a:endParaRPr lang="en-US" sz="1400" dirty="0">
+                        <a:latin typeface="DM Sans" charset="0"/>
+                        <a:ea typeface="DM Sans" charset="0"/>
+                        <a:cs typeface="DM Sans" charset="0"/>
+                      </a:endParaRPr>
+                    </a:p>
+                  </a:txBody>
+                  <a:tcPr marL="101600" marR="101600" marT="50800" marB="50800" anchor="ctr">
+                    <a:lnL w="9525" cap="flat" cmpd="sng" algn="ctr">
+                      <a:solidFill>
+                        <a:srgbClr val="CFC5B5"/>
+                      </a:solidFill>
+                      <a:prstDash val="solid"/>
+                      <a:round/>
+                      <a:headEnd type="none" w="med" len="med"/>
+                      <a:tailEnd type="none" w="med" len="med"/>
+                    </a:lnL>
+                    <a:lnR w="9525" cap="flat" cmpd="sng" algn="ctr">
+                      <a:solidFill>
+                        <a:srgbClr val="CFC5B5"/>
+                      </a:solidFill>
+                      <a:prstDash val="solid"/>
+                      <a:round/>
+                      <a:headEnd type="none" w="med" len="med"/>
+                      <a:tailEnd type="none" w="med" len="med"/>
+                    </a:lnR>
+                    <a:lnT w="9525" cap="flat" cmpd="sng" algn="ctr">
+                      <a:solidFill>
+                        <a:srgbClr val="CFC5B5"/>
+                      </a:solidFill>
+                      <a:prstDash val="solid"/>
+                      <a:round/>
+                      <a:headEnd type="none" w="med" len="med"/>
+                      <a:tailEnd type="none" w="med" len="med"/>
+                    </a:lnT>
+                    <a:lnB w="9525" cap="flat" cmpd="sng" algn="ctr">
+                      <a:solidFill>
+                        <a:srgbClr val="CFC5B5"/>
+                      </a:solidFill>
+                      <a:prstDash val="solid"/>
+                      <a:round/>
+                      <a:headEnd type="none" w="med" len="med"/>
+                      <a:tailEnd type="none" w="med" len="med"/>
+                    </a:lnB>
+                    <a:solidFill>
+                      <a:srgbClr val="EADFCB"/>
+                    </a:solidFill>
+                  </a:tcPr>
+                </a:tc>
+                <a:tc>
+                  <a:txBody>
+                    <a:bodyPr/>
+                    <a:lstStyle/>
+                    <a:p>
+                      <a:pPr marL="0" indent="0">
+                        <a:buNone/>
+                      </a:pPr>
+                      <a:r>
+                        <a:rPr lang="en-US" sz="1400" dirty="0">
+                          <a:solidFill>
+                            <a:srgbClr val="15110E"/>
+                          </a:solidFill>
+                          <a:latin typeface="DM Sans" pitchFamily="34" charset="0"/>
+                          <a:ea typeface="DM Sans" pitchFamily="34" charset="-122"/>
+                          <a:cs typeface="DM Sans" pitchFamily="34" charset="-120"/>
+                        </a:rPr>
+                        <a:t>800 + 120 tokens</a:t>
+                      </a:r>
+                      <a:endParaRPr lang="en-US" sz="1400" dirty="0">
+                        <a:latin typeface="DM Sans" charset="0"/>
+                        <a:ea typeface="DM Sans" charset="0"/>
+                        <a:cs typeface="DM Sans" charset="0"/>
+                      </a:endParaRPr>
+                    </a:p>
+                  </a:txBody>
+                  <a:tcPr marL="101600" marR="101600" marT="50800" marB="50800" anchor="ctr">
+                    <a:lnL w="9525" cap="flat" cmpd="sng" algn="ctr">
+                      <a:solidFill>
+                        <a:srgbClr val="CFC5B5"/>
+                      </a:solidFill>
+                      <a:prstDash val="solid"/>
+                      <a:round/>
+                      <a:headEnd type="none" w="med" len="med"/>
+                      <a:tailEnd type="none" w="med" len="med"/>
+                    </a:lnL>
+                    <a:lnR w="9525" cap="flat" cmpd="sng" algn="ctr">
+                      <a:solidFill>
+                        <a:srgbClr val="CFC5B5"/>
+                      </a:solidFill>
+                      <a:prstDash val="solid"/>
+                      <a:round/>
+                      <a:headEnd type="none" w="med" len="med"/>
+                      <a:tailEnd type="none" w="med" len="med"/>
+                    </a:lnR>
+                    <a:lnT w="9525" cap="flat" cmpd="sng" algn="ctr">
+                      <a:solidFill>
+                        <a:srgbClr val="CFC5B5"/>
+                      </a:solidFill>
+                      <a:prstDash val="solid"/>
+                      <a:round/>
+                      <a:headEnd type="none" w="med" len="med"/>
+                      <a:tailEnd type="none" w="med" len="med"/>
+                    </a:lnT>
+                    <a:lnB w="9525" cap="flat" cmpd="sng" algn="ctr">
+                      <a:solidFill>
+                        <a:srgbClr val="CFC5B5"/>
+                      </a:solidFill>
+                      <a:prstDash val="solid"/>
+                      <a:round/>
+                      <a:headEnd type="none" w="med" len="med"/>
+                      <a:tailEnd type="none" w="med" len="med"/>
+                    </a:lnB>
+                    <a:solidFill>
+                      <a:srgbClr val="EADFCB"/>
+                    </a:solidFill>
+                  </a:tcPr>
+                </a:tc>
+                <a:tc>
+                  <a:txBody>
+                    <a:bodyPr/>
+                    <a:lstStyle/>
+                    <a:p>
+                      <a:pPr marL="0" indent="0" algn="r">
+                        <a:buNone/>
+                      </a:pPr>
+                      <a:r>
+                        <a:rPr lang="en-US" sz="1400" b="0" dirty="0">
+                          <a:solidFill>
+                            <a:schemeClr val="tx1"/>
+                          </a:solidFill>
+                          <a:latin typeface="Oswald" pitchFamily="34" charset="0"/>
+                          <a:ea typeface="Oswald" pitchFamily="34" charset="-122"/>
+                          <a:cs typeface="Arial" panose="020B0604020202020204" pitchFamily="34" charset="0"/>
+                        </a:rPr>
+                        <a:t>€</a:t>
+                      </a:r>
+                      <a:r>
+                        <a:rPr lang="en-US" sz="1400" dirty="0">
+                          <a:solidFill>
+                            <a:srgbClr val="15110E"/>
+                          </a:solidFill>
+                          <a:latin typeface="DM Sans" pitchFamily="34" charset="0"/>
+                          <a:ea typeface="DM Sans" pitchFamily="34" charset="-122"/>
+                          <a:cs typeface="DM Sans" pitchFamily="34" charset="-120"/>
+                        </a:rPr>
+                        <a:t>0.00014</a:t>
+                      </a:r>
+                      <a:endParaRPr lang="en-US" sz="1400" dirty="0">
+                        <a:latin typeface="DM Sans" charset="0"/>
+                        <a:ea typeface="DM Sans" charset="0"/>
+                        <a:cs typeface="DM Sans" charset="0"/>
+                      </a:endParaRPr>
+                    </a:p>
+                  </a:txBody>
+                  <a:tcPr marL="101600" marR="101600" marT="50800" marB="50800" anchor="ctr">
+                    <a:lnL w="9525" cap="flat" cmpd="sng" algn="ctr">
+                      <a:solidFill>
+                        <a:srgbClr val="CFC5B5"/>
+                      </a:solidFill>
+                      <a:prstDash val="solid"/>
+                      <a:round/>
+                      <a:headEnd type="none" w="med" len="med"/>
+                      <a:tailEnd type="none" w="med" len="med"/>
+                    </a:lnL>
+                    <a:lnR w="9525" cap="flat" cmpd="sng" algn="ctr">
+                      <a:solidFill>
+                        <a:srgbClr val="CFC5B5"/>
+                      </a:solidFill>
+                      <a:prstDash val="solid"/>
+                      <a:round/>
+                      <a:headEnd type="none" w="med" len="med"/>
+                      <a:tailEnd type="none" w="med" len="med"/>
+                    </a:lnR>
+                    <a:lnT w="9525" cap="flat" cmpd="sng" algn="ctr">
+                      <a:solidFill>
+                        <a:srgbClr val="CFC5B5"/>
+                      </a:solidFill>
+                      <a:prstDash val="solid"/>
+                      <a:round/>
+                      <a:headEnd type="none" w="med" len="med"/>
+                      <a:tailEnd type="none" w="med" len="med"/>
+                    </a:lnT>
+                    <a:lnB w="9525" cap="flat" cmpd="sng" algn="ctr">
+                      <a:solidFill>
+                        <a:srgbClr val="CFC5B5"/>
+                      </a:solidFill>
+                      <a:prstDash val="solid"/>
+                      <a:round/>
+                      <a:headEnd type="none" w="med" len="med"/>
+                      <a:tailEnd type="none" w="med" len="med"/>
+                    </a:lnB>
+                    <a:solidFill>
+                      <a:srgbClr val="EADFCB"/>
+                    </a:solidFill>
+                  </a:tcPr>
+                </a:tc>
+                <a:extLst>
+                  <a:ext uri="{0D108BD9-81ED-4DB2-BD59-A6C34878D82A}">
+                    <a16:rowId xmlns:a16="http://schemas.microsoft.com/office/drawing/2014/main" val="10002"/>
+                  </a:ext>
+                </a:extLst>
+              </a:tr>
+              <a:tr h="411480">
+                <a:tc>
+                  <a:txBody>
+                    <a:bodyPr/>
+                    <a:lstStyle/>
+                    <a:p>
+                      <a:pPr marL="0" indent="0">
+                        <a:buNone/>
+                      </a:pPr>
+                      <a:r>
+                        <a:rPr lang="en-US" sz="1400" dirty="0">
+                          <a:solidFill>
+                            <a:srgbClr val="15110E"/>
+                          </a:solidFill>
+                          <a:latin typeface="DM Sans" pitchFamily="34" charset="0"/>
+                          <a:ea typeface="DM Sans" pitchFamily="34" charset="-122"/>
+                          <a:cs typeface="DM Sans" pitchFamily="34" charset="-120"/>
+                        </a:rPr>
+                        <a:t>Match + follow-up</a:t>
+                      </a:r>
+                      <a:endParaRPr lang="en-US" sz="1400" dirty="0">
+                        <a:latin typeface="DM Sans" charset="0"/>
+                        <a:ea typeface="DM Sans" charset="0"/>
+                        <a:cs typeface="DM Sans" charset="0"/>
+                      </a:endParaRPr>
+                    </a:p>
+                  </a:txBody>
+                  <a:tcPr marL="101600" marR="101600" marT="50800" marB="50800" anchor="ctr">
+                    <a:lnL w="9525" cap="flat" cmpd="sng" algn="ctr">
+                      <a:solidFill>
+                        <a:srgbClr val="CFC5B5"/>
+                      </a:solidFill>
+                      <a:prstDash val="solid"/>
+                      <a:round/>
+                      <a:headEnd type="none" w="med" len="med"/>
+                      <a:tailEnd type="none" w="med" len="med"/>
+                    </a:lnL>
+                    <a:lnR w="9525" cap="flat" cmpd="sng" algn="ctr">
+                      <a:solidFill>
+                        <a:srgbClr val="CFC5B5"/>
+                      </a:solidFill>
+                      <a:prstDash val="solid"/>
+                      <a:round/>
+                      <a:headEnd type="none" w="med" len="med"/>
+                      <a:tailEnd type="none" w="med" len="med"/>
+                    </a:lnR>
+                    <a:lnT w="9525" cap="flat" cmpd="sng" algn="ctr">
+                      <a:solidFill>
+                        <a:srgbClr val="CFC5B5"/>
+                      </a:solidFill>
+                      <a:prstDash val="solid"/>
+                      <a:round/>
+                      <a:headEnd type="none" w="med" len="med"/>
+                      <a:tailEnd type="none" w="med" len="med"/>
+                    </a:lnT>
+                    <a:lnB w="9525" cap="flat" cmpd="sng" algn="ctr">
+                      <a:solidFill>
+                        <a:srgbClr val="CFC5B5"/>
+                      </a:solidFill>
+                      <a:prstDash val="solid"/>
+                      <a:round/>
+                      <a:headEnd type="none" w="med" len="med"/>
+                      <a:tailEnd type="none" w="med" len="med"/>
+                    </a:lnB>
+                    <a:solidFill>
+                      <a:srgbClr val="EADFCB"/>
+                    </a:solidFill>
+                  </a:tcPr>
+                </a:tc>
+                <a:tc>
+                  <a:txBody>
+                    <a:bodyPr/>
+                    <a:lstStyle/>
+                    <a:p>
+                      <a:pPr marL="0" indent="0">
+                        <a:buNone/>
+                      </a:pPr>
+                      <a:r>
+                        <a:rPr lang="en-US" sz="1400" dirty="0">
+                          <a:solidFill>
+                            <a:srgbClr val="15110E"/>
+                          </a:solidFill>
+                          <a:latin typeface="DM Sans" pitchFamily="34" charset="0"/>
+                          <a:ea typeface="DM Sans" pitchFamily="34" charset="-122"/>
+                          <a:cs typeface="DM Sans" pitchFamily="34" charset="-120"/>
+                        </a:rPr>
+                        <a:t>1,200 + 180 tokens</a:t>
+                      </a:r>
+                      <a:endParaRPr lang="en-US" sz="1400" dirty="0">
+                        <a:latin typeface="DM Sans" charset="0"/>
+                        <a:ea typeface="DM Sans" charset="0"/>
+                        <a:cs typeface="DM Sans" charset="0"/>
+                      </a:endParaRPr>
+                    </a:p>
+                  </a:txBody>
+                  <a:tcPr marL="101600" marR="101600" marT="50800" marB="50800" anchor="ctr">
+                    <a:lnL w="9525" cap="flat" cmpd="sng" algn="ctr">
+                      <a:solidFill>
+                        <a:srgbClr val="CFC5B5"/>
+                      </a:solidFill>
+                      <a:prstDash val="solid"/>
+                      <a:round/>
+                      <a:headEnd type="none" w="med" len="med"/>
+                      <a:tailEnd type="none" w="med" len="med"/>
+                    </a:lnL>
+                    <a:lnR w="9525" cap="flat" cmpd="sng" algn="ctr">
+                      <a:solidFill>
+                        <a:srgbClr val="CFC5B5"/>
+                      </a:solidFill>
+                      <a:prstDash val="solid"/>
+                      <a:round/>
+                      <a:headEnd type="none" w="med" len="med"/>
+                      <a:tailEnd type="none" w="med" len="med"/>
+                    </a:lnR>
+                    <a:lnT w="9525" cap="flat" cmpd="sng" algn="ctr">
+                      <a:solidFill>
+                        <a:srgbClr val="CFC5B5"/>
+                      </a:solidFill>
+                      <a:prstDash val="solid"/>
+                      <a:round/>
+                      <a:headEnd type="none" w="med" len="med"/>
+                      <a:tailEnd type="none" w="med" len="med"/>
+                    </a:lnT>
+                    <a:lnB w="9525" cap="flat" cmpd="sng" algn="ctr">
+                      <a:solidFill>
+                        <a:srgbClr val="CFC5B5"/>
+                      </a:solidFill>
+                      <a:prstDash val="solid"/>
+                      <a:round/>
+                      <a:headEnd type="none" w="med" len="med"/>
+                      <a:tailEnd type="none" w="med" len="med"/>
+                    </a:lnB>
+                    <a:solidFill>
+                      <a:srgbClr val="EADFCB"/>
+                    </a:solidFill>
+                  </a:tcPr>
+                </a:tc>
+                <a:tc>
+                  <a:txBody>
+                    <a:bodyPr/>
+                    <a:lstStyle/>
+                    <a:p>
+                      <a:pPr marL="0" indent="0" algn="r">
+                        <a:buNone/>
+                      </a:pPr>
+                      <a:r>
+                        <a:rPr lang="en-US" sz="1400" b="0" dirty="0">
+                          <a:solidFill>
+                            <a:schemeClr val="tx1"/>
+                          </a:solidFill>
+                          <a:latin typeface="Oswald" pitchFamily="34" charset="0"/>
+                          <a:ea typeface="Oswald" pitchFamily="34" charset="-122"/>
+                          <a:cs typeface="Arial" panose="020B0604020202020204" pitchFamily="34" charset="0"/>
+                        </a:rPr>
+                        <a:t>€</a:t>
+                      </a:r>
+                      <a:r>
+                        <a:rPr lang="en-US" sz="1400" dirty="0">
+                          <a:solidFill>
+                            <a:srgbClr val="15110E"/>
+                          </a:solidFill>
+                          <a:latin typeface="DM Sans" pitchFamily="34" charset="0"/>
+                          <a:ea typeface="DM Sans" pitchFamily="34" charset="-122"/>
+                          <a:cs typeface="DM Sans" pitchFamily="34" charset="-120"/>
+                        </a:rPr>
+                        <a:t>0.00021</a:t>
+                      </a:r>
+                      <a:endParaRPr lang="en-US" sz="1400" dirty="0">
+                        <a:latin typeface="DM Sans" charset="0"/>
+                        <a:ea typeface="DM Sans" charset="0"/>
+                        <a:cs typeface="DM Sans" charset="0"/>
+                      </a:endParaRPr>
+                    </a:p>
+                  </a:txBody>
+                  <a:tcPr marL="101600" marR="101600" marT="50800" marB="50800" anchor="ctr">
+                    <a:lnL w="9525" cap="flat" cmpd="sng" algn="ctr">
+                      <a:solidFill>
+                        <a:srgbClr val="CFC5B5"/>
+                      </a:solidFill>
+                      <a:prstDash val="solid"/>
+                      <a:round/>
+                      <a:headEnd type="none" w="med" len="med"/>
+                      <a:tailEnd type="none" w="med" len="med"/>
+                    </a:lnL>
+                    <a:lnR w="9525" cap="flat" cmpd="sng" algn="ctr">
+                      <a:solidFill>
+                        <a:srgbClr val="CFC5B5"/>
+                      </a:solidFill>
+                      <a:prstDash val="solid"/>
+                      <a:round/>
+                      <a:headEnd type="none" w="med" len="med"/>
+                      <a:tailEnd type="none" w="med" len="med"/>
+                    </a:lnR>
+                    <a:lnT w="9525" cap="flat" cmpd="sng" algn="ctr">
+                      <a:solidFill>
+                        <a:srgbClr val="CFC5B5"/>
+                      </a:solidFill>
+                      <a:prstDash val="solid"/>
+                      <a:round/>
+                      <a:headEnd type="none" w="med" len="med"/>
+                      <a:tailEnd type="none" w="med" len="med"/>
+                    </a:lnT>
+                    <a:lnB w="9525" cap="flat" cmpd="sng" algn="ctr">
+                      <a:solidFill>
+                        <a:srgbClr val="CFC5B5"/>
+                      </a:solidFill>
+                      <a:prstDash val="solid"/>
+                      <a:round/>
+                      <a:headEnd type="none" w="med" len="med"/>
+                      <a:tailEnd type="none" w="med" len="med"/>
+                    </a:lnB>
+                    <a:solidFill>
+                      <a:srgbClr val="EADFCB"/>
+                    </a:solidFill>
+                  </a:tcPr>
+                </a:tc>
+                <a:extLst>
+                  <a:ext uri="{0D108BD9-81ED-4DB2-BD59-A6C34878D82A}">
+                    <a16:rowId xmlns:a16="http://schemas.microsoft.com/office/drawing/2014/main" val="10003"/>
+                  </a:ext>
+                </a:extLst>
+              </a:tr>
+              <a:tr h="411480">
+                <a:tc>
+                  <a:txBody>
+                    <a:bodyPr/>
+                    <a:lstStyle/>
+                    <a:p>
+                      <a:pPr marL="0" indent="0">
+                        <a:buNone/>
+                      </a:pPr>
+                      <a:r>
+                        <a:rPr lang="en-US" sz="1400" b="1" dirty="0">
+                          <a:solidFill>
+                            <a:srgbClr val="15110E"/>
+                          </a:solidFill>
+                          <a:latin typeface="DM Sans" pitchFamily="34" charset="0"/>
+                          <a:ea typeface="DM Sans" pitchFamily="34" charset="-122"/>
+                          <a:cs typeface="DM Sans" pitchFamily="34" charset="-120"/>
+                        </a:rPr>
+                        <a:t>Total per contact</a:t>
+                      </a:r>
+                      <a:endParaRPr lang="en-US" sz="1400" dirty="0">
+                        <a:latin typeface="DM Sans" charset="0"/>
+                        <a:ea typeface="DM Sans" charset="0"/>
+                        <a:cs typeface="DM Sans" charset="0"/>
+                      </a:endParaRPr>
+                    </a:p>
+                  </a:txBody>
+                  <a:tcPr marL="101600" marR="101600" marT="50800" marB="50800" anchor="ctr">
+                    <a:lnL w="9525" cap="flat" cmpd="sng" algn="ctr">
+                      <a:solidFill>
+                        <a:srgbClr val="CFC5B5"/>
+                      </a:solidFill>
+                      <a:prstDash val="solid"/>
+                      <a:round/>
+                      <a:headEnd type="none" w="med" len="med"/>
+                      <a:tailEnd type="none" w="med" len="med"/>
+                    </a:lnL>
+                    <a:lnR w="9525" cap="flat" cmpd="sng" algn="ctr">
+                      <a:solidFill>
+                        <a:srgbClr val="CFC5B5"/>
+                      </a:solidFill>
+                      <a:prstDash val="solid"/>
+                      <a:round/>
+                      <a:headEnd type="none" w="med" len="med"/>
+                      <a:tailEnd type="none" w="med" len="med"/>
+                    </a:lnR>
+                    <a:lnT w="9525" cap="flat" cmpd="sng" algn="ctr">
+                      <a:solidFill>
+                        <a:srgbClr val="CFC5B5"/>
+                      </a:solidFill>
+                      <a:prstDash val="solid"/>
+                      <a:round/>
+                      <a:headEnd type="none" w="med" len="med"/>
+                      <a:tailEnd type="none" w="med" len="med"/>
+                    </a:lnT>
+                    <a:lnB w="9525" cap="flat" cmpd="sng" algn="ctr">
+                      <a:solidFill>
+                        <a:srgbClr val="CFC5B5"/>
+                      </a:solidFill>
+                      <a:prstDash val="solid"/>
+                      <a:round/>
+                      <a:headEnd type="none" w="med" len="med"/>
+                      <a:tailEnd type="none" w="med" len="med"/>
+                    </a:lnB>
+                    <a:solidFill>
+                      <a:srgbClr val="FFD9C2"/>
+                    </a:solidFill>
+                  </a:tcPr>
+                </a:tc>
+                <a:tc>
+                  <a:txBody>
+                    <a:bodyPr/>
+                    <a:lstStyle/>
+                    <a:p>
+                      <a:pPr marL="0" indent="0">
+                        <a:buNone/>
+                      </a:pPr>
+                      <a:endParaRPr lang="en-US" sz="1400" dirty="0">
+                        <a:latin typeface="DM Sans" charset="0"/>
+                        <a:ea typeface="DM Sans" charset="0"/>
+                        <a:cs typeface="DM Sans" charset="0"/>
+                      </a:endParaRPr>
+                    </a:p>
+                  </a:txBody>
+                  <a:tcPr marL="101600" marR="101600" marT="50800" marB="50800" anchor="ctr">
+                    <a:lnL w="9525" cap="flat" cmpd="sng" algn="ctr">
+                      <a:solidFill>
+                        <a:srgbClr val="CFC5B5"/>
+                      </a:solidFill>
+                      <a:prstDash val="solid"/>
+                      <a:round/>
+                      <a:headEnd type="none" w="med" len="med"/>
+                      <a:tailEnd type="none" w="med" len="med"/>
+                    </a:lnL>
+                    <a:lnR w="9525" cap="flat" cmpd="sng" algn="ctr">
+                      <a:solidFill>
+                        <a:srgbClr val="CFC5B5"/>
+                      </a:solidFill>
+                      <a:prstDash val="solid"/>
+                      <a:round/>
+                      <a:headEnd type="none" w="med" len="med"/>
+                      <a:tailEnd type="none" w="med" len="med"/>
+                    </a:lnR>
+                    <a:lnT w="9525" cap="flat" cmpd="sng" algn="ctr">
+                      <a:solidFill>
+                        <a:srgbClr val="CFC5B5"/>
+                      </a:solidFill>
+                      <a:prstDash val="solid"/>
+                      <a:round/>
+                      <a:headEnd type="none" w="med" len="med"/>
+                      <a:tailEnd type="none" w="med" len="med"/>
+                    </a:lnT>
+                    <a:lnB w="9525" cap="flat" cmpd="sng" algn="ctr">
+                      <a:solidFill>
+                        <a:srgbClr val="CFC5B5"/>
+                      </a:solidFill>
+                      <a:prstDash val="solid"/>
+                      <a:round/>
+                      <a:headEnd type="none" w="med" len="med"/>
+                      <a:tailEnd type="none" w="med" len="med"/>
+                    </a:lnB>
+                    <a:solidFill>
+                      <a:srgbClr val="FFD9C2"/>
+                    </a:solidFill>
+                  </a:tcPr>
+                </a:tc>
+                <a:tc>
+                  <a:txBody>
+                    <a:bodyPr/>
+                    <a:lstStyle/>
+                    <a:p>
+                      <a:pPr marL="0" indent="0" algn="r">
+                        <a:buNone/>
+                      </a:pPr>
+                      <a:r>
+                        <a:rPr lang="en-US" sz="1400" b="0" dirty="0">
+                          <a:solidFill>
+                            <a:schemeClr val="tx1"/>
+                          </a:solidFill>
+                          <a:latin typeface="Oswald" pitchFamily="34" charset="0"/>
+                          <a:ea typeface="Oswald" pitchFamily="34" charset="-122"/>
+                          <a:cs typeface="Arial" panose="020B0604020202020204" pitchFamily="34" charset="0"/>
+                        </a:rPr>
+                        <a:t>€</a:t>
+                      </a:r>
+                      <a:r>
+                        <a:rPr lang="en-US" sz="1400" b="1" dirty="0">
+                          <a:solidFill>
+                            <a:srgbClr val="15110E"/>
+                          </a:solidFill>
+                          <a:latin typeface="DM Sans" pitchFamily="34" charset="0"/>
+                          <a:ea typeface="DM Sans" pitchFamily="34" charset="-122"/>
+                          <a:cs typeface="DM Sans" pitchFamily="34" charset="-120"/>
+                        </a:rPr>
+                        <a:t>0.00053</a:t>
+                      </a:r>
+                      <a:endParaRPr lang="en-US" sz="1400" dirty="0">
+                        <a:latin typeface="DM Sans" charset="0"/>
+                        <a:ea typeface="DM Sans" charset="0"/>
+                        <a:cs typeface="DM Sans" charset="0"/>
+                      </a:endParaRPr>
+                    </a:p>
+                  </a:txBody>
+                  <a:tcPr marL="101600" marR="101600" marT="50800" marB="50800" anchor="ctr">
+                    <a:lnL w="9525" cap="flat" cmpd="sng" algn="ctr">
+                      <a:solidFill>
+                        <a:srgbClr val="CFC5B5"/>
+                      </a:solidFill>
+                      <a:prstDash val="solid"/>
+                      <a:round/>
+                      <a:headEnd type="none" w="med" len="med"/>
+                      <a:tailEnd type="none" w="med" len="med"/>
+                    </a:lnL>
+                    <a:lnR w="9525" cap="flat" cmpd="sng" algn="ctr">
+                      <a:solidFill>
+                        <a:srgbClr val="CFC5B5"/>
+                      </a:solidFill>
+                      <a:prstDash val="solid"/>
+                      <a:round/>
+                      <a:headEnd type="none" w="med" len="med"/>
+                      <a:tailEnd type="none" w="med" len="med"/>
+                    </a:lnR>
+                    <a:lnT w="9525" cap="flat" cmpd="sng" algn="ctr">
+                      <a:solidFill>
+                        <a:srgbClr val="CFC5B5"/>
+                      </a:solidFill>
+                      <a:prstDash val="solid"/>
+                      <a:round/>
+                      <a:headEnd type="none" w="med" len="med"/>
+                      <a:tailEnd type="none" w="med" len="med"/>
+                    </a:lnT>
+                    <a:lnB w="9525" cap="flat" cmpd="sng" algn="ctr">
+                      <a:solidFill>
+                        <a:srgbClr val="CFC5B5"/>
+                      </a:solidFill>
+                      <a:prstDash val="solid"/>
+                      <a:round/>
+                      <a:headEnd type="none" w="med" len="med"/>
+                      <a:tailEnd type="none" w="med" len="med"/>
+                    </a:lnB>
+                    <a:solidFill>
+                      <a:srgbClr val="FFD9C2"/>
+                    </a:solidFill>
+                  </a:tcPr>
+                </a:tc>
+                <a:extLst>
+                  <a:ext uri="{0D108BD9-81ED-4DB2-BD59-A6C34878D82A}">
+                    <a16:rowId xmlns:a16="http://schemas.microsoft.com/office/drawing/2014/main" val="10004"/>
+                  </a:ext>
+                </a:extLst>
+              </a:tr>
+            </a:tbl>
+          </a:graphicData>
+        </a:graphic>
+      </p:graphicFrame>
+      <p:sp>
+        <p:nvSpPr>
+          <p:cNvPr id="6" name="Text 3"/>
+          <p:cNvSpPr txBox="1"/>
+          <p:nvPr/>
+        </p:nvSpPr>
+        <p:spPr>
+          <a:xfrm>
+            <a:off x="6287693" y="3096418"/>
+            <a:ext cx="5364328" cy="320040"/>
+          </a:xfrm>
+          <a:prstGeom prst="rect">
+            <a:avLst/>
+          </a:prstGeom>
+          <a:noFill/>
+          <a:ln/>
+        </p:spPr>
+        <p:txBody>
+          <a:bodyPr wrap="square" lIns="0" tIns="0" rIns="0" bIns="0" rtlCol="0" anchor="t"/>
+          <a:lstStyle/>
+          <a:p>
+            <a:pPr marL="0" indent="0">
+              <a:buNone/>
+            </a:pPr>
+            <a:r>
+              <a:rPr lang="en-US" sz="1500" b="1" dirty="0">
+                <a:solidFill>
+                  <a:schemeClr val="tx1"/>
+                </a:solidFill>
+                <a:latin typeface="DM Sans" pitchFamily="34" charset="0"/>
+                <a:ea typeface="DM Sans" pitchFamily="34" charset="-122"/>
+                <a:cs typeface="DM Sans" pitchFamily="34" charset="-120"/>
+              </a:rPr>
+              <a:t>Fixed services, per year</a:t>
+            </a:r>
+            <a:endParaRPr lang="en-US" sz="1500" dirty="0"/>
+          </a:p>
+        </p:txBody>
+      </p:sp>
+      <p:graphicFrame>
+        <p:nvGraphicFramePr>
+          <p:cNvPr id="13" name="Fixed cost table"/>
+          <p:cNvGraphicFramePr>
+            <a:graphicFrameLocks noGrp="1"/>
+          </p:cNvGraphicFramePr>
+          <p:nvPr>
+            <p:extLst>
+              <p:ext uri="{D42A27DB-BD31-4B8C-83A1-F6EECF244321}">
+                <p14:modId xmlns:p14="http://schemas.microsoft.com/office/powerpoint/2010/main" val="1932968927"/>
+              </p:ext>
+            </p:extLst>
+          </p:nvPr>
+        </p:nvGraphicFramePr>
+        <p:xfrm>
+          <a:off x="6278728" y="3417347"/>
+          <a:ext cx="5454396" cy="2304288"/>
+        </p:xfrm>
+        <a:graphic>
+          <a:graphicData uri="http://schemas.openxmlformats.org/drawingml/2006/table">
+            <a:tbl>
+              <a:tblPr/>
+              <a:tblGrid>
+                <a:gridCol w="2148840">
+                  <a:extLst>
+                    <a:ext uri="{9D8B030D-6E8A-4147-A177-3AD203B41FA5}">
+                      <a16:colId xmlns:a16="http://schemas.microsoft.com/office/drawing/2014/main" val="20000"/>
+                    </a:ext>
+                  </a:extLst>
+                </a:gridCol>
+                <a:gridCol w="2148840">
+                  <a:extLst>
+                    <a:ext uri="{9D8B030D-6E8A-4147-A177-3AD203B41FA5}">
+                      <a16:colId xmlns:a16="http://schemas.microsoft.com/office/drawing/2014/main" val="20001"/>
+                    </a:ext>
+                  </a:extLst>
+                </a:gridCol>
+                <a:gridCol w="1156716">
+                  <a:extLst>
+                    <a:ext uri="{9D8B030D-6E8A-4147-A177-3AD203B41FA5}">
+                      <a16:colId xmlns:a16="http://schemas.microsoft.com/office/drawing/2014/main" val="20002"/>
+                    </a:ext>
+                  </a:extLst>
+                </a:gridCol>
+              </a:tblGrid>
+              <a:tr h="384048">
+                <a:tc>
+                  <a:txBody>
+                    <a:bodyPr/>
+                    <a:lstStyle/>
+                    <a:p>
+                      <a:pPr marL="0" indent="0">
+                        <a:buNone/>
+                      </a:pPr>
+                      <a:r>
+                        <a:rPr lang="en-US" sz="1400" b="1" dirty="0">
+                          <a:solidFill>
+                            <a:srgbClr val="F7F0E4"/>
+                          </a:solidFill>
+                          <a:latin typeface="DM Sans" pitchFamily="34" charset="0"/>
+                          <a:ea typeface="DM Sans" pitchFamily="34" charset="-122"/>
+                          <a:cs typeface="DM Sans" pitchFamily="34" charset="-120"/>
+                        </a:rPr>
+                        <a:t>Service</a:t>
+                      </a:r>
+                      <a:endParaRPr lang="en-US" sz="1400" dirty="0">
+                        <a:latin typeface="DM Sans" charset="0"/>
+                        <a:ea typeface="DM Sans" charset="0"/>
+                        <a:cs typeface="DM Sans" charset="0"/>
+                      </a:endParaRPr>
+                    </a:p>
+                  </a:txBody>
+                  <a:tcPr marL="101600" marR="101600" marT="50800" marB="50800" anchor="ctr">
+                    <a:lnL w="9525" cap="flat" cmpd="sng" algn="ctr">
+                      <a:solidFill>
+                        <a:srgbClr val="CFC5B5"/>
+                      </a:solidFill>
+                      <a:prstDash val="solid"/>
+                      <a:round/>
+                      <a:headEnd type="none" w="med" len="med"/>
+                      <a:tailEnd type="none" w="med" len="med"/>
+                    </a:lnL>
+                    <a:lnR w="9525" cap="flat" cmpd="sng" algn="ctr">
+                      <a:solidFill>
+                        <a:srgbClr val="CFC5B5"/>
+                      </a:solidFill>
+                      <a:prstDash val="solid"/>
+                      <a:round/>
+                      <a:headEnd type="none" w="med" len="med"/>
+                      <a:tailEnd type="none" w="med" len="med"/>
+                    </a:lnR>
+                    <a:lnT w="9525" cap="flat" cmpd="sng" algn="ctr">
+                      <a:solidFill>
+                        <a:srgbClr val="CFC5B5"/>
+                      </a:solidFill>
+                      <a:prstDash val="solid"/>
+                      <a:round/>
+                      <a:headEnd type="none" w="med" len="med"/>
+                      <a:tailEnd type="none" w="med" len="med"/>
+                    </a:lnT>
+                    <a:lnB w="9525" cap="flat" cmpd="sng" algn="ctr">
+                      <a:solidFill>
+                        <a:srgbClr val="CFC5B5"/>
+                      </a:solidFill>
+                      <a:prstDash val="solid"/>
+                      <a:round/>
+                      <a:headEnd type="none" w="med" len="med"/>
+                      <a:tailEnd type="none" w="med" len="med"/>
+                    </a:lnB>
+                    <a:solidFill>
+                      <a:srgbClr val="15110E"/>
+                    </a:solidFill>
+                  </a:tcPr>
+                </a:tc>
+                <a:tc>
+                  <a:txBody>
+                    <a:bodyPr/>
+                    <a:lstStyle/>
+                    <a:p>
+                      <a:pPr marL="0" indent="0">
+                        <a:buNone/>
+                      </a:pPr>
+                      <a:r>
+                        <a:rPr lang="en-US" sz="1400" b="1" dirty="0">
+                          <a:solidFill>
+                            <a:srgbClr val="F7F0E4"/>
+                          </a:solidFill>
+                          <a:latin typeface="DM Sans" pitchFamily="34" charset="0"/>
+                          <a:ea typeface="DM Sans" pitchFamily="34" charset="-122"/>
+                          <a:cs typeface="DM Sans" pitchFamily="34" charset="-120"/>
+                        </a:rPr>
+                        <a:t>Plan</a:t>
+                      </a:r>
+                      <a:endParaRPr lang="en-US" sz="1400" dirty="0">
+                        <a:latin typeface="DM Sans" charset="0"/>
+                        <a:ea typeface="DM Sans" charset="0"/>
+                        <a:cs typeface="DM Sans" charset="0"/>
+                      </a:endParaRPr>
+                    </a:p>
+                  </a:txBody>
+                  <a:tcPr marL="101600" marR="101600" marT="50800" marB="50800" anchor="ctr">
+                    <a:lnL w="9525" cap="flat" cmpd="sng" algn="ctr">
+                      <a:solidFill>
+                        <a:srgbClr val="CFC5B5"/>
+                      </a:solidFill>
+                      <a:prstDash val="solid"/>
+                      <a:round/>
+                      <a:headEnd type="none" w="med" len="med"/>
+                      <a:tailEnd type="none" w="med" len="med"/>
+                    </a:lnL>
+                    <a:lnR w="9525" cap="flat" cmpd="sng" algn="ctr">
+                      <a:solidFill>
+                        <a:srgbClr val="CFC5B5"/>
+                      </a:solidFill>
+                      <a:prstDash val="solid"/>
+                      <a:round/>
+                      <a:headEnd type="none" w="med" len="med"/>
+                      <a:tailEnd type="none" w="med" len="med"/>
+                    </a:lnR>
+                    <a:lnT w="9525" cap="flat" cmpd="sng" algn="ctr">
+                      <a:solidFill>
+                        <a:srgbClr val="CFC5B5"/>
+                      </a:solidFill>
+                      <a:prstDash val="solid"/>
+                      <a:round/>
+                      <a:headEnd type="none" w="med" len="med"/>
+                      <a:tailEnd type="none" w="med" len="med"/>
+                    </a:lnT>
+                    <a:lnB w="9525" cap="flat" cmpd="sng" algn="ctr">
+                      <a:solidFill>
+                        <a:srgbClr val="CFC5B5"/>
+                      </a:solidFill>
+                      <a:prstDash val="solid"/>
+                      <a:round/>
+                      <a:headEnd type="none" w="med" len="med"/>
+                      <a:tailEnd type="none" w="med" len="med"/>
+                    </a:lnB>
+                    <a:solidFill>
+                      <a:srgbClr val="15110E"/>
+                    </a:solidFill>
+                  </a:tcPr>
+                </a:tc>
+                <a:tc>
+                  <a:txBody>
+                    <a:bodyPr/>
+                    <a:lstStyle/>
+                    <a:p>
+                      <a:pPr marL="0" indent="0">
+                        <a:buNone/>
+                      </a:pPr>
+                      <a:r>
+                        <a:rPr lang="en-US" sz="1400" b="1" dirty="0">
+                          <a:solidFill>
+                            <a:srgbClr val="F7F0E4"/>
+                          </a:solidFill>
+                          <a:latin typeface="DM Sans" pitchFamily="34" charset="0"/>
+                          <a:ea typeface="DM Sans" pitchFamily="34" charset="-122"/>
+                          <a:cs typeface="DM Sans" pitchFamily="34" charset="-120"/>
+                        </a:rPr>
+                        <a:t>Per year</a:t>
+                      </a:r>
+                      <a:endParaRPr lang="en-US" sz="1400" dirty="0">
+                        <a:latin typeface="DM Sans" charset="0"/>
+                        <a:ea typeface="DM Sans" charset="0"/>
+                        <a:cs typeface="DM Sans" charset="0"/>
+                      </a:endParaRPr>
+                    </a:p>
+                  </a:txBody>
+                  <a:tcPr marL="101600" marR="101600" marT="50800" marB="50800" anchor="ctr">
+                    <a:lnL w="9525" cap="flat" cmpd="sng" algn="ctr">
+                      <a:solidFill>
+                        <a:srgbClr val="CFC5B5"/>
+                      </a:solidFill>
+                      <a:prstDash val="solid"/>
+                      <a:round/>
+                      <a:headEnd type="none" w="med" len="med"/>
+                      <a:tailEnd type="none" w="med" len="med"/>
+                    </a:lnL>
+                    <a:lnR w="9525" cap="flat" cmpd="sng" algn="ctr">
+                      <a:solidFill>
+                        <a:srgbClr val="CFC5B5"/>
+                      </a:solidFill>
+                      <a:prstDash val="solid"/>
+                      <a:round/>
+                      <a:headEnd type="none" w="med" len="med"/>
+                      <a:tailEnd type="none" w="med" len="med"/>
+                    </a:lnR>
+                    <a:lnT w="9525" cap="flat" cmpd="sng" algn="ctr">
+                      <a:solidFill>
+                        <a:srgbClr val="CFC5B5"/>
+                      </a:solidFill>
+                      <a:prstDash val="solid"/>
+                      <a:round/>
+                      <a:headEnd type="none" w="med" len="med"/>
+                      <a:tailEnd type="none" w="med" len="med"/>
+                    </a:lnT>
+                    <a:lnB w="9525" cap="flat" cmpd="sng" algn="ctr">
+                      <a:solidFill>
+                        <a:srgbClr val="CFC5B5"/>
+                      </a:solidFill>
+                      <a:prstDash val="solid"/>
+                      <a:round/>
+                      <a:headEnd type="none" w="med" len="med"/>
+                      <a:tailEnd type="none" w="med" len="med"/>
+                    </a:lnB>
+                    <a:solidFill>
+                      <a:srgbClr val="15110E"/>
+                    </a:solidFill>
+                  </a:tcPr>
+                </a:tc>
+                <a:extLst>
+                  <a:ext uri="{0D108BD9-81ED-4DB2-BD59-A6C34878D82A}">
+                    <a16:rowId xmlns:a16="http://schemas.microsoft.com/office/drawing/2014/main" val="10000"/>
+                  </a:ext>
+                </a:extLst>
+              </a:tr>
+              <a:tr h="384048">
+                <a:tc>
+                  <a:txBody>
+                    <a:bodyPr/>
+                    <a:lstStyle/>
+                    <a:p>
+                      <a:pPr marL="0" indent="0">
+                        <a:buNone/>
+                      </a:pPr>
+                      <a:r>
+                        <a:rPr lang="en-US" sz="1400" dirty="0">
+                          <a:solidFill>
+                            <a:srgbClr val="15110E"/>
+                          </a:solidFill>
+                          <a:latin typeface="DM Sans" pitchFamily="34" charset="0"/>
+                          <a:ea typeface="DM Sans" pitchFamily="34" charset="-122"/>
+                          <a:cs typeface="DM Sans" pitchFamily="34" charset="-120"/>
+                        </a:rPr>
+                        <a:t>Supabase</a:t>
+                      </a:r>
+                      <a:endParaRPr lang="en-US" sz="1400" dirty="0">
+                        <a:latin typeface="DM Sans" charset="0"/>
+                        <a:ea typeface="DM Sans" charset="0"/>
+                        <a:cs typeface="DM Sans" charset="0"/>
+                      </a:endParaRPr>
+                    </a:p>
+                  </a:txBody>
+                  <a:tcPr marL="101600" marR="101600" marT="50800" marB="50800" anchor="ctr">
+                    <a:lnL w="9525" cap="flat" cmpd="sng" algn="ctr">
+                      <a:solidFill>
+                        <a:srgbClr val="CFC5B5"/>
+                      </a:solidFill>
+                      <a:prstDash val="solid"/>
+                      <a:round/>
+                      <a:headEnd type="none" w="med" len="med"/>
+                      <a:tailEnd type="none" w="med" len="med"/>
+                    </a:lnL>
+                    <a:lnR w="9525" cap="flat" cmpd="sng" algn="ctr">
+                      <a:solidFill>
+                        <a:srgbClr val="CFC5B5"/>
+                      </a:solidFill>
+                      <a:prstDash val="solid"/>
+                      <a:round/>
+                      <a:headEnd type="none" w="med" len="med"/>
+                      <a:tailEnd type="none" w="med" len="med"/>
+                    </a:lnR>
+                    <a:lnT w="9525" cap="flat" cmpd="sng" algn="ctr">
+                      <a:solidFill>
+                        <a:srgbClr val="CFC5B5"/>
+                      </a:solidFill>
+                      <a:prstDash val="solid"/>
+                      <a:round/>
+                      <a:headEnd type="none" w="med" len="med"/>
+                      <a:tailEnd type="none" w="med" len="med"/>
+                    </a:lnT>
+                    <a:lnB w="9525" cap="flat" cmpd="sng" algn="ctr">
+                      <a:solidFill>
+                        <a:srgbClr val="CFC5B5"/>
+                      </a:solidFill>
+                      <a:prstDash val="solid"/>
+                      <a:round/>
+                      <a:headEnd type="none" w="med" len="med"/>
+                      <a:tailEnd type="none" w="med" len="med"/>
+                    </a:lnB>
+                    <a:solidFill>
+                      <a:srgbClr val="EADFCB"/>
+                    </a:solidFill>
+                  </a:tcPr>
+                </a:tc>
+                <a:tc>
+                  <a:txBody>
+                    <a:bodyPr/>
+                    <a:lstStyle/>
+                    <a:p>
+                      <a:pPr marL="0" indent="0">
+                        <a:buNone/>
+                      </a:pPr>
+                      <a:r>
+                        <a:rPr lang="en-US" sz="1400" dirty="0">
+                          <a:solidFill>
+                            <a:srgbClr val="15110E"/>
+                          </a:solidFill>
+                          <a:latin typeface="DM Sans" pitchFamily="34" charset="0"/>
+                          <a:ea typeface="DM Sans" pitchFamily="34" charset="-122"/>
+                          <a:cs typeface="DM Sans" pitchFamily="34" charset="-120"/>
+                        </a:rPr>
+                        <a:t>Pro, up to 100k MAU</a:t>
+                      </a:r>
+                      <a:endParaRPr lang="en-US" sz="1400" dirty="0">
+                        <a:latin typeface="DM Sans" charset="0"/>
+                        <a:ea typeface="DM Sans" charset="0"/>
+                        <a:cs typeface="DM Sans" charset="0"/>
+                      </a:endParaRPr>
+                    </a:p>
+                  </a:txBody>
+                  <a:tcPr marL="101600" marR="101600" marT="50800" marB="50800" anchor="ctr">
+                    <a:lnL w="9525" cap="flat" cmpd="sng" algn="ctr">
+                      <a:solidFill>
+                        <a:srgbClr val="CFC5B5"/>
+                      </a:solidFill>
+                      <a:prstDash val="solid"/>
+                      <a:round/>
+                      <a:headEnd type="none" w="med" len="med"/>
+                      <a:tailEnd type="none" w="med" len="med"/>
+                    </a:lnL>
+                    <a:lnR w="9525" cap="flat" cmpd="sng" algn="ctr">
+                      <a:solidFill>
+                        <a:srgbClr val="CFC5B5"/>
+                      </a:solidFill>
+                      <a:prstDash val="solid"/>
+                      <a:round/>
+                      <a:headEnd type="none" w="med" len="med"/>
+                      <a:tailEnd type="none" w="med" len="med"/>
+                    </a:lnR>
+                    <a:lnT w="9525" cap="flat" cmpd="sng" algn="ctr">
+                      <a:solidFill>
+                        <a:srgbClr val="CFC5B5"/>
+                      </a:solidFill>
+                      <a:prstDash val="solid"/>
+                      <a:round/>
+                      <a:headEnd type="none" w="med" len="med"/>
+                      <a:tailEnd type="none" w="med" len="med"/>
+                    </a:lnT>
+                    <a:lnB w="9525" cap="flat" cmpd="sng" algn="ctr">
+                      <a:solidFill>
+                        <a:srgbClr val="CFC5B5"/>
+                      </a:solidFill>
+                      <a:prstDash val="solid"/>
+                      <a:round/>
+                      <a:headEnd type="none" w="med" len="med"/>
+                      <a:tailEnd type="none" w="med" len="med"/>
+                    </a:lnB>
+                    <a:solidFill>
+                      <a:srgbClr val="EADFCB"/>
+                    </a:solidFill>
+                  </a:tcPr>
+                </a:tc>
+                <a:tc>
+                  <a:txBody>
+                    <a:bodyPr/>
+                    <a:lstStyle/>
+                    <a:p>
+                      <a:pPr marL="0" indent="0" algn="r">
+                        <a:buNone/>
+                      </a:pPr>
+                      <a:r>
+                        <a:rPr lang="en-US" sz="1400" b="0" dirty="0">
+                          <a:solidFill>
+                            <a:schemeClr val="tx1"/>
+                          </a:solidFill>
+                          <a:latin typeface="Oswald" pitchFamily="34" charset="0"/>
+                          <a:ea typeface="Oswald" pitchFamily="34" charset="-122"/>
+                          <a:cs typeface="Arial" panose="020B0604020202020204" pitchFamily="34" charset="0"/>
+                        </a:rPr>
+                        <a:t>€</a:t>
+                      </a:r>
+                      <a:r>
+                        <a:rPr lang="en-US" sz="1400" dirty="0">
+                          <a:solidFill>
+                            <a:srgbClr val="15110E"/>
+                          </a:solidFill>
+                          <a:latin typeface="DM Sans" pitchFamily="34" charset="0"/>
+                          <a:ea typeface="DM Sans" pitchFamily="34" charset="-122"/>
+                          <a:cs typeface="DM Sans" pitchFamily="34" charset="-120"/>
+                        </a:rPr>
+                        <a:t>300</a:t>
+                      </a:r>
+                      <a:endParaRPr lang="en-US" sz="1400" dirty="0">
+                        <a:latin typeface="DM Sans" charset="0"/>
+                        <a:ea typeface="DM Sans" charset="0"/>
+                        <a:cs typeface="DM Sans" charset="0"/>
+                      </a:endParaRPr>
+                    </a:p>
+                  </a:txBody>
+                  <a:tcPr marL="101600" marR="101600" marT="50800" marB="50800" anchor="ctr">
+                    <a:lnL w="9525" cap="flat" cmpd="sng" algn="ctr">
+                      <a:solidFill>
+                        <a:srgbClr val="CFC5B5"/>
+                      </a:solidFill>
+                      <a:prstDash val="solid"/>
+                      <a:round/>
+                      <a:headEnd type="none" w="med" len="med"/>
+                      <a:tailEnd type="none" w="med" len="med"/>
+                    </a:lnL>
+                    <a:lnR w="9525" cap="flat" cmpd="sng" algn="ctr">
+                      <a:solidFill>
+                        <a:srgbClr val="CFC5B5"/>
+                      </a:solidFill>
+                      <a:prstDash val="solid"/>
+                      <a:round/>
+                      <a:headEnd type="none" w="med" len="med"/>
+                      <a:tailEnd type="none" w="med" len="med"/>
+                    </a:lnR>
+                    <a:lnT w="9525" cap="flat" cmpd="sng" algn="ctr">
+                      <a:solidFill>
+                        <a:srgbClr val="CFC5B5"/>
+                      </a:solidFill>
+                      <a:prstDash val="solid"/>
+                      <a:round/>
+                      <a:headEnd type="none" w="med" len="med"/>
+                      <a:tailEnd type="none" w="med" len="med"/>
+                    </a:lnT>
+                    <a:lnB w="9525" cap="flat" cmpd="sng" algn="ctr">
+                      <a:solidFill>
+                        <a:srgbClr val="CFC5B5"/>
+                      </a:solidFill>
+                      <a:prstDash val="solid"/>
+                      <a:round/>
+                      <a:headEnd type="none" w="med" len="med"/>
+                      <a:tailEnd type="none" w="med" len="med"/>
+                    </a:lnB>
+                    <a:solidFill>
+                      <a:srgbClr val="EADFCB"/>
+                    </a:solidFill>
+                  </a:tcPr>
+                </a:tc>
+                <a:extLst>
+                  <a:ext uri="{0D108BD9-81ED-4DB2-BD59-A6C34878D82A}">
+                    <a16:rowId xmlns:a16="http://schemas.microsoft.com/office/drawing/2014/main" val="10001"/>
+                  </a:ext>
+                </a:extLst>
+              </a:tr>
+              <a:tr h="384048">
+                <a:tc>
+                  <a:txBody>
+                    <a:bodyPr/>
+                    <a:lstStyle/>
+                    <a:p>
+                      <a:pPr marL="0" indent="0">
+                        <a:buNone/>
+                      </a:pPr>
+                      <a:r>
+                        <a:rPr lang="en-US" sz="1400" dirty="0">
+                          <a:solidFill>
+                            <a:srgbClr val="15110E"/>
+                          </a:solidFill>
+                          <a:latin typeface="DM Sans" pitchFamily="34" charset="0"/>
+                          <a:ea typeface="DM Sans" pitchFamily="34" charset="-122"/>
+                          <a:cs typeface="DM Sans" pitchFamily="34" charset="-120"/>
+                        </a:rPr>
+                        <a:t>Vercel</a:t>
+                      </a:r>
+                      <a:endParaRPr lang="en-US" sz="1400" dirty="0">
+                        <a:latin typeface="DM Sans" charset="0"/>
+                        <a:ea typeface="DM Sans" charset="0"/>
+                        <a:cs typeface="DM Sans" charset="0"/>
+                      </a:endParaRPr>
+                    </a:p>
+                  </a:txBody>
+                  <a:tcPr marL="101600" marR="101600" marT="50800" marB="50800" anchor="ctr">
+                    <a:lnL w="9525" cap="flat" cmpd="sng" algn="ctr">
+                      <a:solidFill>
+                        <a:srgbClr val="CFC5B5"/>
+                      </a:solidFill>
+                      <a:prstDash val="solid"/>
+                      <a:round/>
+                      <a:headEnd type="none" w="med" len="med"/>
+                      <a:tailEnd type="none" w="med" len="med"/>
+                    </a:lnL>
+                    <a:lnR w="9525" cap="flat" cmpd="sng" algn="ctr">
+                      <a:solidFill>
+                        <a:srgbClr val="CFC5B5"/>
+                      </a:solidFill>
+                      <a:prstDash val="solid"/>
+                      <a:round/>
+                      <a:headEnd type="none" w="med" len="med"/>
+                      <a:tailEnd type="none" w="med" len="med"/>
+                    </a:lnR>
+                    <a:lnT w="9525" cap="flat" cmpd="sng" algn="ctr">
+                      <a:solidFill>
+                        <a:srgbClr val="CFC5B5"/>
+                      </a:solidFill>
+                      <a:prstDash val="solid"/>
+                      <a:round/>
+                      <a:headEnd type="none" w="med" len="med"/>
+                      <a:tailEnd type="none" w="med" len="med"/>
+                    </a:lnT>
+                    <a:lnB w="9525" cap="flat" cmpd="sng" algn="ctr">
+                      <a:solidFill>
+                        <a:srgbClr val="CFC5B5"/>
+                      </a:solidFill>
+                      <a:prstDash val="solid"/>
+                      <a:round/>
+                      <a:headEnd type="none" w="med" len="med"/>
+                      <a:tailEnd type="none" w="med" len="med"/>
+                    </a:lnB>
+                    <a:solidFill>
+                      <a:srgbClr val="EADFCB"/>
+                    </a:solidFill>
+                  </a:tcPr>
+                </a:tc>
+                <a:tc>
+                  <a:txBody>
+                    <a:bodyPr/>
+                    <a:lstStyle/>
+                    <a:p>
+                      <a:pPr marL="0" indent="0">
+                        <a:buNone/>
+                      </a:pPr>
+                      <a:r>
+                        <a:rPr lang="en-US" sz="1400" dirty="0">
+                          <a:solidFill>
+                            <a:srgbClr val="15110E"/>
+                          </a:solidFill>
+                          <a:latin typeface="DM Sans" pitchFamily="34" charset="0"/>
+                          <a:ea typeface="DM Sans" pitchFamily="34" charset="-122"/>
+                          <a:cs typeface="DM Sans" pitchFamily="34" charset="-120"/>
+                        </a:rPr>
+                        <a:t>Pro, one seat</a:t>
+                      </a:r>
+                      <a:endParaRPr lang="en-US" sz="1400" dirty="0">
+                        <a:latin typeface="DM Sans" charset="0"/>
+                        <a:ea typeface="DM Sans" charset="0"/>
+                        <a:cs typeface="DM Sans" charset="0"/>
+                      </a:endParaRPr>
+                    </a:p>
+                  </a:txBody>
+                  <a:tcPr marL="101600" marR="101600" marT="50800" marB="50800" anchor="ctr">
+                    <a:lnL w="9525" cap="flat" cmpd="sng" algn="ctr">
+                      <a:solidFill>
+                        <a:srgbClr val="CFC5B5"/>
+                      </a:solidFill>
+                      <a:prstDash val="solid"/>
+                      <a:round/>
+                      <a:headEnd type="none" w="med" len="med"/>
+                      <a:tailEnd type="none" w="med" len="med"/>
+                    </a:lnL>
+                    <a:lnR w="9525" cap="flat" cmpd="sng" algn="ctr">
+                      <a:solidFill>
+                        <a:srgbClr val="CFC5B5"/>
+                      </a:solidFill>
+                      <a:prstDash val="solid"/>
+                      <a:round/>
+                      <a:headEnd type="none" w="med" len="med"/>
+                      <a:tailEnd type="none" w="med" len="med"/>
+                    </a:lnR>
+                    <a:lnT w="9525" cap="flat" cmpd="sng" algn="ctr">
+                      <a:solidFill>
+                        <a:srgbClr val="CFC5B5"/>
+                      </a:solidFill>
+                      <a:prstDash val="solid"/>
+                      <a:round/>
+                      <a:headEnd type="none" w="med" len="med"/>
+                      <a:tailEnd type="none" w="med" len="med"/>
+                    </a:lnT>
+                    <a:lnB w="9525" cap="flat" cmpd="sng" algn="ctr">
+                      <a:solidFill>
+                        <a:srgbClr val="CFC5B5"/>
+                      </a:solidFill>
+                      <a:prstDash val="solid"/>
+                      <a:round/>
+                      <a:headEnd type="none" w="med" len="med"/>
+                      <a:tailEnd type="none" w="med" len="med"/>
+                    </a:lnB>
+                    <a:solidFill>
+                      <a:srgbClr val="EADFCB"/>
+                    </a:solidFill>
+                  </a:tcPr>
+                </a:tc>
+                <a:tc>
+                  <a:txBody>
+                    <a:bodyPr/>
+                    <a:lstStyle/>
+                    <a:p>
+                      <a:pPr marL="0" indent="0" algn="r">
+                        <a:buNone/>
+                      </a:pPr>
+                      <a:r>
+                        <a:rPr lang="en-US" sz="1400" b="0" dirty="0">
+                          <a:solidFill>
+                            <a:schemeClr val="tx1"/>
+                          </a:solidFill>
+                          <a:latin typeface="Oswald" pitchFamily="34" charset="0"/>
+                          <a:ea typeface="Oswald" pitchFamily="34" charset="-122"/>
+                          <a:cs typeface="Arial" panose="020B0604020202020204" pitchFamily="34" charset="0"/>
+                        </a:rPr>
+                        <a:t>€</a:t>
+                      </a:r>
+                      <a:r>
+                        <a:rPr lang="en-US" sz="1400" dirty="0">
+                          <a:solidFill>
+                            <a:srgbClr val="15110E"/>
+                          </a:solidFill>
+                          <a:latin typeface="DM Sans" pitchFamily="34" charset="0"/>
+                          <a:ea typeface="DM Sans" pitchFamily="34" charset="-122"/>
+                          <a:cs typeface="DM Sans" pitchFamily="34" charset="-120"/>
+                        </a:rPr>
+                        <a:t>240</a:t>
+                      </a:r>
+                      <a:endParaRPr lang="en-US" sz="1400" dirty="0">
+                        <a:latin typeface="DM Sans" charset="0"/>
+                        <a:ea typeface="DM Sans" charset="0"/>
+                        <a:cs typeface="DM Sans" charset="0"/>
+                      </a:endParaRPr>
+                    </a:p>
+                  </a:txBody>
+                  <a:tcPr marL="101600" marR="101600" marT="50800" marB="50800" anchor="ctr">
+                    <a:lnL w="9525" cap="flat" cmpd="sng" algn="ctr">
+                      <a:solidFill>
+                        <a:srgbClr val="CFC5B5"/>
+                      </a:solidFill>
+                      <a:prstDash val="solid"/>
+                      <a:round/>
+                      <a:headEnd type="none" w="med" len="med"/>
+                      <a:tailEnd type="none" w="med" len="med"/>
+                    </a:lnL>
+                    <a:lnR w="9525" cap="flat" cmpd="sng" algn="ctr">
+                      <a:solidFill>
+                        <a:srgbClr val="CFC5B5"/>
+                      </a:solidFill>
+                      <a:prstDash val="solid"/>
+                      <a:round/>
+                      <a:headEnd type="none" w="med" len="med"/>
+                      <a:tailEnd type="none" w="med" len="med"/>
+                    </a:lnR>
+                    <a:lnT w="9525" cap="flat" cmpd="sng" algn="ctr">
+                      <a:solidFill>
+                        <a:srgbClr val="CFC5B5"/>
+                      </a:solidFill>
+                      <a:prstDash val="solid"/>
+                      <a:round/>
+                      <a:headEnd type="none" w="med" len="med"/>
+                      <a:tailEnd type="none" w="med" len="med"/>
+                    </a:lnT>
+                    <a:lnB w="9525" cap="flat" cmpd="sng" algn="ctr">
+                      <a:solidFill>
+                        <a:srgbClr val="CFC5B5"/>
+                      </a:solidFill>
+                      <a:prstDash val="solid"/>
+                      <a:round/>
+                      <a:headEnd type="none" w="med" len="med"/>
+                      <a:tailEnd type="none" w="med" len="med"/>
+                    </a:lnB>
+                    <a:solidFill>
+                      <a:srgbClr val="EADFCB"/>
+                    </a:solidFill>
+                  </a:tcPr>
+                </a:tc>
+                <a:extLst>
+                  <a:ext uri="{0D108BD9-81ED-4DB2-BD59-A6C34878D82A}">
+                    <a16:rowId xmlns:a16="http://schemas.microsoft.com/office/drawing/2014/main" val="10002"/>
+                  </a:ext>
+                </a:extLst>
+              </a:tr>
+              <a:tr h="384048">
+                <a:tc>
+                  <a:txBody>
+                    <a:bodyPr/>
+                    <a:lstStyle/>
+                    <a:p>
+                      <a:pPr marL="0" indent="0">
+                        <a:buNone/>
+                      </a:pPr>
+                      <a:r>
+                        <a:rPr lang="en-US" sz="1400" dirty="0">
+                          <a:solidFill>
+                            <a:srgbClr val="15110E"/>
+                          </a:solidFill>
+                          <a:latin typeface="DM Sans" pitchFamily="34" charset="0"/>
+                          <a:ea typeface="DM Sans" pitchFamily="34" charset="-122"/>
+                          <a:cs typeface="DM Sans" pitchFamily="34" charset="-120"/>
+                        </a:rPr>
+                        <a:t>Domain</a:t>
+                      </a:r>
+                      <a:endParaRPr lang="en-US" sz="1400" dirty="0">
+                        <a:latin typeface="DM Sans" charset="0"/>
+                        <a:ea typeface="DM Sans" charset="0"/>
+                        <a:cs typeface="DM Sans" charset="0"/>
+                      </a:endParaRPr>
+                    </a:p>
+                  </a:txBody>
+                  <a:tcPr marL="101600" marR="101600" marT="50800" marB="50800" anchor="ctr">
+                    <a:lnL w="9525" cap="flat" cmpd="sng" algn="ctr">
+                      <a:solidFill>
+                        <a:srgbClr val="CFC5B5"/>
+                      </a:solidFill>
+                      <a:prstDash val="solid"/>
+                      <a:round/>
+                      <a:headEnd type="none" w="med" len="med"/>
+                      <a:tailEnd type="none" w="med" len="med"/>
+                    </a:lnL>
+                    <a:lnR w="9525" cap="flat" cmpd="sng" algn="ctr">
+                      <a:solidFill>
+                        <a:srgbClr val="CFC5B5"/>
+                      </a:solidFill>
+                      <a:prstDash val="solid"/>
+                      <a:round/>
+                      <a:headEnd type="none" w="med" len="med"/>
+                      <a:tailEnd type="none" w="med" len="med"/>
+                    </a:lnR>
+                    <a:lnT w="9525" cap="flat" cmpd="sng" algn="ctr">
+                      <a:solidFill>
+                        <a:srgbClr val="CFC5B5"/>
+                      </a:solidFill>
+                      <a:prstDash val="solid"/>
+                      <a:round/>
+                      <a:headEnd type="none" w="med" len="med"/>
+                      <a:tailEnd type="none" w="med" len="med"/>
+                    </a:lnT>
+                    <a:lnB w="9525" cap="flat" cmpd="sng" algn="ctr">
+                      <a:solidFill>
+                        <a:srgbClr val="CFC5B5"/>
+                      </a:solidFill>
+                      <a:prstDash val="solid"/>
+                      <a:round/>
+                      <a:headEnd type="none" w="med" len="med"/>
+                      <a:tailEnd type="none" w="med" len="med"/>
+                    </a:lnB>
+                    <a:solidFill>
+                      <a:srgbClr val="EADFCB"/>
+                    </a:solidFill>
+                  </a:tcPr>
+                </a:tc>
+                <a:tc>
+                  <a:txBody>
+                    <a:bodyPr/>
+                    <a:lstStyle/>
+                    <a:p>
+                      <a:pPr marL="0" indent="0">
+                        <a:buNone/>
+                      </a:pPr>
+                      <a:r>
+                        <a:rPr lang="en-US" sz="1400" dirty="0">
+                          <a:solidFill>
+                            <a:srgbClr val="15110E"/>
+                          </a:solidFill>
+                          <a:latin typeface="DM Sans" pitchFamily="34" charset="0"/>
+                          <a:ea typeface="DM Sans" pitchFamily="34" charset="-122"/>
+                          <a:cs typeface="DM Sans" pitchFamily="34" charset="-120"/>
+                        </a:rPr>
+                        <a:t>Cloudflare</a:t>
+                      </a:r>
+                      <a:endParaRPr lang="en-US" sz="1400" dirty="0">
+                        <a:latin typeface="DM Sans" charset="0"/>
+                        <a:ea typeface="DM Sans" charset="0"/>
+                        <a:cs typeface="DM Sans" charset="0"/>
+                      </a:endParaRPr>
+                    </a:p>
+                  </a:txBody>
+                  <a:tcPr marL="101600" marR="101600" marT="50800" marB="50800" anchor="ctr">
+                    <a:lnL w="9525" cap="flat" cmpd="sng" algn="ctr">
+                      <a:solidFill>
+                        <a:srgbClr val="CFC5B5"/>
+                      </a:solidFill>
+                      <a:prstDash val="solid"/>
+                      <a:round/>
+                      <a:headEnd type="none" w="med" len="med"/>
+                      <a:tailEnd type="none" w="med" len="med"/>
+                    </a:lnL>
+                    <a:lnR w="9525" cap="flat" cmpd="sng" algn="ctr">
+                      <a:solidFill>
+                        <a:srgbClr val="CFC5B5"/>
+                      </a:solidFill>
+                      <a:prstDash val="solid"/>
+                      <a:round/>
+                      <a:headEnd type="none" w="med" len="med"/>
+                      <a:tailEnd type="none" w="med" len="med"/>
+                    </a:lnR>
+                    <a:lnT w="9525" cap="flat" cmpd="sng" algn="ctr">
+                      <a:solidFill>
+                        <a:srgbClr val="CFC5B5"/>
+                      </a:solidFill>
+                      <a:prstDash val="solid"/>
+                      <a:round/>
+                      <a:headEnd type="none" w="med" len="med"/>
+                      <a:tailEnd type="none" w="med" len="med"/>
+                    </a:lnT>
+                    <a:lnB w="9525" cap="flat" cmpd="sng" algn="ctr">
+                      <a:solidFill>
+                        <a:srgbClr val="CFC5B5"/>
+                      </a:solidFill>
+                      <a:prstDash val="solid"/>
+                      <a:round/>
+                      <a:headEnd type="none" w="med" len="med"/>
+                      <a:tailEnd type="none" w="med" len="med"/>
+                    </a:lnB>
+                    <a:solidFill>
+                      <a:srgbClr val="EADFCB"/>
+                    </a:solidFill>
+                  </a:tcPr>
+                </a:tc>
+                <a:tc>
+                  <a:txBody>
+                    <a:bodyPr/>
+                    <a:lstStyle/>
+                    <a:p>
+                      <a:pPr marL="0" indent="0" algn="r">
+                        <a:buNone/>
+                      </a:pPr>
+                      <a:r>
+                        <a:rPr lang="en-US" sz="1400" b="0" dirty="0">
+                          <a:solidFill>
+                            <a:schemeClr val="tx1"/>
+                          </a:solidFill>
+                          <a:latin typeface="Oswald" pitchFamily="34" charset="0"/>
+                          <a:ea typeface="Oswald" pitchFamily="34" charset="-122"/>
+                          <a:cs typeface="Arial" panose="020B0604020202020204" pitchFamily="34" charset="0"/>
+                        </a:rPr>
+                        <a:t>€</a:t>
+                      </a:r>
+                      <a:r>
+                        <a:rPr lang="en-US" sz="1400" dirty="0">
+                          <a:solidFill>
+                            <a:srgbClr val="15110E"/>
+                          </a:solidFill>
+                          <a:latin typeface="DM Sans" pitchFamily="34" charset="0"/>
+                          <a:ea typeface="DM Sans" pitchFamily="34" charset="-122"/>
+                          <a:cs typeface="DM Sans" pitchFamily="34" charset="-120"/>
+                        </a:rPr>
+                        <a:t>10</a:t>
+                      </a:r>
+                      <a:endParaRPr lang="en-US" sz="1400" dirty="0">
+                        <a:latin typeface="DM Sans" charset="0"/>
+                        <a:ea typeface="DM Sans" charset="0"/>
+                        <a:cs typeface="DM Sans" charset="0"/>
+                      </a:endParaRPr>
+                    </a:p>
+                  </a:txBody>
+                  <a:tcPr marL="101600" marR="101600" marT="50800" marB="50800" anchor="ctr">
+                    <a:lnL w="9525" cap="flat" cmpd="sng" algn="ctr">
+                      <a:solidFill>
+                        <a:srgbClr val="CFC5B5"/>
+                      </a:solidFill>
+                      <a:prstDash val="solid"/>
+                      <a:round/>
+                      <a:headEnd type="none" w="med" len="med"/>
+                      <a:tailEnd type="none" w="med" len="med"/>
+                    </a:lnL>
+                    <a:lnR w="9525" cap="flat" cmpd="sng" algn="ctr">
+                      <a:solidFill>
+                        <a:srgbClr val="CFC5B5"/>
+                      </a:solidFill>
+                      <a:prstDash val="solid"/>
+                      <a:round/>
+                      <a:headEnd type="none" w="med" len="med"/>
+                      <a:tailEnd type="none" w="med" len="med"/>
+                    </a:lnR>
+                    <a:lnT w="9525" cap="flat" cmpd="sng" algn="ctr">
+                      <a:solidFill>
+                        <a:srgbClr val="CFC5B5"/>
+                      </a:solidFill>
+                      <a:prstDash val="solid"/>
+                      <a:round/>
+                      <a:headEnd type="none" w="med" len="med"/>
+                      <a:tailEnd type="none" w="med" len="med"/>
+                    </a:lnT>
+                    <a:lnB w="9525" cap="flat" cmpd="sng" algn="ctr">
+                      <a:solidFill>
+                        <a:srgbClr val="CFC5B5"/>
+                      </a:solidFill>
+                      <a:prstDash val="solid"/>
+                      <a:round/>
+                      <a:headEnd type="none" w="med" len="med"/>
+                      <a:tailEnd type="none" w="med" len="med"/>
+                    </a:lnB>
+                    <a:solidFill>
+                      <a:srgbClr val="EADFCB"/>
+                    </a:solidFill>
+                  </a:tcPr>
+                </a:tc>
+                <a:extLst>
+                  <a:ext uri="{0D108BD9-81ED-4DB2-BD59-A6C34878D82A}">
+                    <a16:rowId xmlns:a16="http://schemas.microsoft.com/office/drawing/2014/main" val="10003"/>
+                  </a:ext>
+                </a:extLst>
+              </a:tr>
+              <a:tr h="384048">
+                <a:tc>
+                  <a:txBody>
+                    <a:bodyPr/>
+                    <a:lstStyle/>
+                    <a:p>
+                      <a:pPr marL="0" indent="0">
+                        <a:buNone/>
+                      </a:pPr>
+                      <a:r>
+                        <a:rPr lang="en-US" sz="1400" dirty="0">
+                          <a:solidFill>
+                            <a:srgbClr val="15110E"/>
+                          </a:solidFill>
+                          <a:latin typeface="DM Sans" pitchFamily="34" charset="0"/>
+                          <a:ea typeface="DM Sans" pitchFamily="34" charset="-122"/>
+                          <a:cs typeface="DM Sans" pitchFamily="34" charset="-120"/>
+                        </a:rPr>
+                        <a:t>Email, Google sign-in</a:t>
+                      </a:r>
+                      <a:endParaRPr lang="en-US" sz="1400" dirty="0">
+                        <a:latin typeface="DM Sans" charset="0"/>
+                        <a:ea typeface="DM Sans" charset="0"/>
+                        <a:cs typeface="DM Sans" charset="0"/>
+                      </a:endParaRPr>
+                    </a:p>
+                  </a:txBody>
+                  <a:tcPr marL="101600" marR="101600" marT="50800" marB="50800" anchor="ctr">
+                    <a:lnL w="9525" cap="flat" cmpd="sng" algn="ctr">
+                      <a:solidFill>
+                        <a:srgbClr val="CFC5B5"/>
+                      </a:solidFill>
+                      <a:prstDash val="solid"/>
+                      <a:round/>
+                      <a:headEnd type="none" w="med" len="med"/>
+                      <a:tailEnd type="none" w="med" len="med"/>
+                    </a:lnL>
+                    <a:lnR w="9525" cap="flat" cmpd="sng" algn="ctr">
+                      <a:solidFill>
+                        <a:srgbClr val="CFC5B5"/>
+                      </a:solidFill>
+                      <a:prstDash val="solid"/>
+                      <a:round/>
+                      <a:headEnd type="none" w="med" len="med"/>
+                      <a:tailEnd type="none" w="med" len="med"/>
+                    </a:lnR>
+                    <a:lnT w="9525" cap="flat" cmpd="sng" algn="ctr">
+                      <a:solidFill>
+                        <a:srgbClr val="CFC5B5"/>
+                      </a:solidFill>
+                      <a:prstDash val="solid"/>
+                      <a:round/>
+                      <a:headEnd type="none" w="med" len="med"/>
+                      <a:tailEnd type="none" w="med" len="med"/>
+                    </a:lnT>
+                    <a:lnB w="9525" cap="flat" cmpd="sng" algn="ctr">
+                      <a:solidFill>
+                        <a:srgbClr val="CFC5B5"/>
+                      </a:solidFill>
+                      <a:prstDash val="solid"/>
+                      <a:round/>
+                      <a:headEnd type="none" w="med" len="med"/>
+                      <a:tailEnd type="none" w="med" len="med"/>
+                    </a:lnB>
+                    <a:solidFill>
+                      <a:srgbClr val="EADFCB"/>
+                    </a:solidFill>
+                  </a:tcPr>
+                </a:tc>
+                <a:tc>
+                  <a:txBody>
+                    <a:bodyPr/>
+                    <a:lstStyle/>
+                    <a:p>
+                      <a:pPr marL="0" indent="0">
+                        <a:buNone/>
+                      </a:pPr>
+                      <a:r>
+                        <a:rPr lang="en-US" sz="1400" dirty="0">
+                          <a:solidFill>
+                            <a:srgbClr val="15110E"/>
+                          </a:solidFill>
+                          <a:latin typeface="DM Sans" pitchFamily="34" charset="0"/>
+                          <a:ea typeface="DM Sans" pitchFamily="34" charset="-122"/>
+                          <a:cs typeface="DM Sans" pitchFamily="34" charset="-120"/>
+                        </a:rPr>
+                        <a:t>Free tiers</a:t>
+                      </a:r>
+                      <a:endParaRPr lang="en-US" sz="1400" dirty="0">
+                        <a:latin typeface="DM Sans" charset="0"/>
+                        <a:ea typeface="DM Sans" charset="0"/>
+                        <a:cs typeface="DM Sans" charset="0"/>
+                      </a:endParaRPr>
+                    </a:p>
+                  </a:txBody>
+                  <a:tcPr marL="101600" marR="101600" marT="50800" marB="50800" anchor="ctr">
+                    <a:lnL w="9525" cap="flat" cmpd="sng" algn="ctr">
+                      <a:solidFill>
+                        <a:srgbClr val="CFC5B5"/>
+                      </a:solidFill>
+                      <a:prstDash val="solid"/>
+                      <a:round/>
+                      <a:headEnd type="none" w="med" len="med"/>
+                      <a:tailEnd type="none" w="med" len="med"/>
+                    </a:lnL>
+                    <a:lnR w="9525" cap="flat" cmpd="sng" algn="ctr">
+                      <a:solidFill>
+                        <a:srgbClr val="CFC5B5"/>
+                      </a:solidFill>
+                      <a:prstDash val="solid"/>
+                      <a:round/>
+                      <a:headEnd type="none" w="med" len="med"/>
+                      <a:tailEnd type="none" w="med" len="med"/>
+                    </a:lnR>
+                    <a:lnT w="9525" cap="flat" cmpd="sng" algn="ctr">
+                      <a:solidFill>
+                        <a:srgbClr val="CFC5B5"/>
+                      </a:solidFill>
+                      <a:prstDash val="solid"/>
+                      <a:round/>
+                      <a:headEnd type="none" w="med" len="med"/>
+                      <a:tailEnd type="none" w="med" len="med"/>
+                    </a:lnT>
+                    <a:lnB w="9525" cap="flat" cmpd="sng" algn="ctr">
+                      <a:solidFill>
+                        <a:srgbClr val="CFC5B5"/>
+                      </a:solidFill>
+                      <a:prstDash val="solid"/>
+                      <a:round/>
+                      <a:headEnd type="none" w="med" len="med"/>
+                      <a:tailEnd type="none" w="med" len="med"/>
+                    </a:lnB>
+                    <a:solidFill>
+                      <a:srgbClr val="EADFCB"/>
+                    </a:solidFill>
+                  </a:tcPr>
+                </a:tc>
+                <a:tc>
+                  <a:txBody>
+                    <a:bodyPr/>
+                    <a:lstStyle/>
+                    <a:p>
+                      <a:pPr marL="0" indent="0" algn="r">
+                        <a:buNone/>
+                      </a:pPr>
+                      <a:r>
+                        <a:rPr lang="en-US" sz="1400" b="0" dirty="0">
+                          <a:solidFill>
+                            <a:schemeClr val="tx1"/>
+                          </a:solidFill>
+                          <a:latin typeface="Oswald" pitchFamily="34" charset="0"/>
+                          <a:ea typeface="Oswald" pitchFamily="34" charset="-122"/>
+                          <a:cs typeface="Arial" panose="020B0604020202020204" pitchFamily="34" charset="0"/>
+                        </a:rPr>
+                        <a:t>€</a:t>
+                      </a:r>
+                      <a:r>
+                        <a:rPr lang="en-US" sz="1400" dirty="0">
+                          <a:solidFill>
+                            <a:srgbClr val="15110E"/>
+                          </a:solidFill>
+                          <a:latin typeface="DM Sans" pitchFamily="34" charset="0"/>
+                          <a:ea typeface="DM Sans" pitchFamily="34" charset="-122"/>
+                          <a:cs typeface="DM Sans" pitchFamily="34" charset="-120"/>
+                        </a:rPr>
+                        <a:t>0</a:t>
+                      </a:r>
+                      <a:endParaRPr lang="en-US" sz="1400" dirty="0">
+                        <a:latin typeface="DM Sans" charset="0"/>
+                        <a:ea typeface="DM Sans" charset="0"/>
+                        <a:cs typeface="DM Sans" charset="0"/>
+                      </a:endParaRPr>
+                    </a:p>
+                  </a:txBody>
+                  <a:tcPr marL="101600" marR="101600" marT="50800" marB="50800" anchor="ctr">
+                    <a:lnL w="9525" cap="flat" cmpd="sng" algn="ctr">
+                      <a:solidFill>
+                        <a:srgbClr val="CFC5B5"/>
+                      </a:solidFill>
+                      <a:prstDash val="solid"/>
+                      <a:round/>
+                      <a:headEnd type="none" w="med" len="med"/>
+                      <a:tailEnd type="none" w="med" len="med"/>
+                    </a:lnL>
+                    <a:lnR w="9525" cap="flat" cmpd="sng" algn="ctr">
+                      <a:solidFill>
+                        <a:srgbClr val="CFC5B5"/>
+                      </a:solidFill>
+                      <a:prstDash val="solid"/>
+                      <a:round/>
+                      <a:headEnd type="none" w="med" len="med"/>
+                      <a:tailEnd type="none" w="med" len="med"/>
+                    </a:lnR>
+                    <a:lnT w="9525" cap="flat" cmpd="sng" algn="ctr">
+                      <a:solidFill>
+                        <a:srgbClr val="CFC5B5"/>
+                      </a:solidFill>
+                      <a:prstDash val="solid"/>
+                      <a:round/>
+                      <a:headEnd type="none" w="med" len="med"/>
+                      <a:tailEnd type="none" w="med" len="med"/>
+                    </a:lnT>
+                    <a:lnB w="9525" cap="flat" cmpd="sng" algn="ctr">
+                      <a:solidFill>
+                        <a:srgbClr val="CFC5B5"/>
+                      </a:solidFill>
+                      <a:prstDash val="solid"/>
+                      <a:round/>
+                      <a:headEnd type="none" w="med" len="med"/>
+                      <a:tailEnd type="none" w="med" len="med"/>
+                    </a:lnB>
+                    <a:solidFill>
+                      <a:srgbClr val="EADFCB"/>
+                    </a:solidFill>
+                  </a:tcPr>
+                </a:tc>
+                <a:extLst>
+                  <a:ext uri="{0D108BD9-81ED-4DB2-BD59-A6C34878D82A}">
+                    <a16:rowId xmlns:a16="http://schemas.microsoft.com/office/drawing/2014/main" val="10004"/>
+                  </a:ext>
+                </a:extLst>
+              </a:tr>
+              <a:tr h="384048">
+                <a:tc>
+                  <a:txBody>
+                    <a:bodyPr/>
+                    <a:lstStyle/>
+                    <a:p>
+                      <a:pPr marL="0" indent="0">
+                        <a:buNone/>
+                      </a:pPr>
+                      <a:r>
+                        <a:rPr lang="en-US" sz="1400" b="1" dirty="0">
+                          <a:solidFill>
+                            <a:srgbClr val="15110E"/>
+                          </a:solidFill>
+                          <a:latin typeface="DM Sans" pitchFamily="34" charset="0"/>
+                          <a:ea typeface="DM Sans" pitchFamily="34" charset="-122"/>
+                          <a:cs typeface="DM Sans" pitchFamily="34" charset="-120"/>
+                        </a:rPr>
+                        <a:t>Total fixed</a:t>
+                      </a:r>
+                      <a:endParaRPr lang="en-US" sz="1400" dirty="0">
+                        <a:latin typeface="DM Sans" charset="0"/>
+                        <a:ea typeface="DM Sans" charset="0"/>
+                        <a:cs typeface="DM Sans" charset="0"/>
+                      </a:endParaRPr>
+                    </a:p>
+                  </a:txBody>
+                  <a:tcPr marL="101600" marR="101600" marT="50800" marB="50800" anchor="ctr">
+                    <a:lnL w="9525" cap="flat" cmpd="sng" algn="ctr">
+                      <a:solidFill>
+                        <a:srgbClr val="CFC5B5"/>
+                      </a:solidFill>
+                      <a:prstDash val="solid"/>
+                      <a:round/>
+                      <a:headEnd type="none" w="med" len="med"/>
+                      <a:tailEnd type="none" w="med" len="med"/>
+                    </a:lnL>
+                    <a:lnR w="9525" cap="flat" cmpd="sng" algn="ctr">
+                      <a:solidFill>
+                        <a:srgbClr val="CFC5B5"/>
+                      </a:solidFill>
+                      <a:prstDash val="solid"/>
+                      <a:round/>
+                      <a:headEnd type="none" w="med" len="med"/>
+                      <a:tailEnd type="none" w="med" len="med"/>
+                    </a:lnR>
+                    <a:lnT w="9525" cap="flat" cmpd="sng" algn="ctr">
+                      <a:solidFill>
+                        <a:srgbClr val="CFC5B5"/>
+                      </a:solidFill>
+                      <a:prstDash val="solid"/>
+                      <a:round/>
+                      <a:headEnd type="none" w="med" len="med"/>
+                      <a:tailEnd type="none" w="med" len="med"/>
+                    </a:lnT>
+                    <a:lnB w="9525" cap="flat" cmpd="sng" algn="ctr">
+                      <a:solidFill>
+                        <a:srgbClr val="CFC5B5"/>
+                      </a:solidFill>
+                      <a:prstDash val="solid"/>
+                      <a:round/>
+                      <a:headEnd type="none" w="med" len="med"/>
+                      <a:tailEnd type="none" w="med" len="med"/>
+                    </a:lnB>
+                    <a:solidFill>
+                      <a:srgbClr val="FFD9C2"/>
+                    </a:solidFill>
+                  </a:tcPr>
+                </a:tc>
+                <a:tc>
+                  <a:txBody>
+                    <a:bodyPr/>
+                    <a:lstStyle/>
+                    <a:p>
+                      <a:pPr marL="0" indent="0">
+                        <a:buNone/>
+                      </a:pPr>
+                      <a:endParaRPr lang="en-US" sz="1400" dirty="0">
+                        <a:latin typeface="DM Sans" charset="0"/>
+                        <a:ea typeface="DM Sans" charset="0"/>
+                        <a:cs typeface="DM Sans" charset="0"/>
+                      </a:endParaRPr>
+                    </a:p>
+                  </a:txBody>
+                  <a:tcPr marL="101600" marR="101600" marT="50800" marB="50800" anchor="ctr">
+                    <a:lnL w="9525" cap="flat" cmpd="sng" algn="ctr">
+                      <a:solidFill>
+                        <a:srgbClr val="CFC5B5"/>
+                      </a:solidFill>
+                      <a:prstDash val="solid"/>
+                      <a:round/>
+                      <a:headEnd type="none" w="med" len="med"/>
+                      <a:tailEnd type="none" w="med" len="med"/>
+                    </a:lnL>
+                    <a:lnR w="9525" cap="flat" cmpd="sng" algn="ctr">
+                      <a:solidFill>
+                        <a:srgbClr val="CFC5B5"/>
+                      </a:solidFill>
+                      <a:prstDash val="solid"/>
+                      <a:round/>
+                      <a:headEnd type="none" w="med" len="med"/>
+                      <a:tailEnd type="none" w="med" len="med"/>
+                    </a:lnR>
+                    <a:lnT w="9525" cap="flat" cmpd="sng" algn="ctr">
+                      <a:solidFill>
+                        <a:srgbClr val="CFC5B5"/>
+                      </a:solidFill>
+                      <a:prstDash val="solid"/>
+                      <a:round/>
+                      <a:headEnd type="none" w="med" len="med"/>
+                      <a:tailEnd type="none" w="med" len="med"/>
+                    </a:lnT>
+                    <a:lnB w="9525" cap="flat" cmpd="sng" algn="ctr">
+                      <a:solidFill>
+                        <a:srgbClr val="CFC5B5"/>
+                      </a:solidFill>
+                      <a:prstDash val="solid"/>
+                      <a:round/>
+                      <a:headEnd type="none" w="med" len="med"/>
+                      <a:tailEnd type="none" w="med" len="med"/>
+                    </a:lnB>
+                    <a:solidFill>
+                      <a:srgbClr val="FFD9C2"/>
+                    </a:solidFill>
+                  </a:tcPr>
+                </a:tc>
+                <a:tc>
+                  <a:txBody>
+                    <a:bodyPr/>
+                    <a:lstStyle/>
+                    <a:p>
+                      <a:pPr marL="0" indent="0" algn="r">
+                        <a:buNone/>
+                      </a:pPr>
+                      <a:r>
+                        <a:rPr lang="en-US" sz="1400" b="0" dirty="0">
+                          <a:solidFill>
+                            <a:schemeClr val="tx1"/>
+                          </a:solidFill>
+                          <a:latin typeface="Oswald" pitchFamily="34" charset="0"/>
+                          <a:ea typeface="Oswald" pitchFamily="34" charset="-122"/>
+                          <a:cs typeface="Arial" panose="020B0604020202020204" pitchFamily="34" charset="0"/>
+                        </a:rPr>
+                        <a:t>€</a:t>
+                      </a:r>
+                      <a:r>
+                        <a:rPr lang="en-US" sz="1400" b="1" dirty="0">
+                          <a:solidFill>
+                            <a:srgbClr val="15110E"/>
+                          </a:solidFill>
+                          <a:latin typeface="DM Sans" pitchFamily="34" charset="0"/>
+                          <a:ea typeface="DM Sans" pitchFamily="34" charset="-122"/>
+                          <a:cs typeface="DM Sans" pitchFamily="34" charset="-120"/>
+                        </a:rPr>
+                        <a:t>550</a:t>
+                      </a:r>
+                      <a:endParaRPr lang="en-US" sz="1400" dirty="0">
+                        <a:latin typeface="DM Sans" charset="0"/>
+                        <a:ea typeface="DM Sans" charset="0"/>
+                        <a:cs typeface="DM Sans" charset="0"/>
+                      </a:endParaRPr>
+                    </a:p>
+                  </a:txBody>
+                  <a:tcPr marL="101600" marR="101600" marT="50800" marB="50800" anchor="ctr">
+                    <a:lnL w="9525" cap="flat" cmpd="sng" algn="ctr">
+                      <a:solidFill>
+                        <a:srgbClr val="CFC5B5"/>
+                      </a:solidFill>
+                      <a:prstDash val="solid"/>
+                      <a:round/>
+                      <a:headEnd type="none" w="med" len="med"/>
+                      <a:tailEnd type="none" w="med" len="med"/>
+                    </a:lnL>
+                    <a:lnR w="9525" cap="flat" cmpd="sng" algn="ctr">
+                      <a:solidFill>
+                        <a:srgbClr val="CFC5B5"/>
+                      </a:solidFill>
+                      <a:prstDash val="solid"/>
+                      <a:round/>
+                      <a:headEnd type="none" w="med" len="med"/>
+                      <a:tailEnd type="none" w="med" len="med"/>
+                    </a:lnR>
+                    <a:lnT w="9525" cap="flat" cmpd="sng" algn="ctr">
+                      <a:solidFill>
+                        <a:srgbClr val="CFC5B5"/>
+                      </a:solidFill>
+                      <a:prstDash val="solid"/>
+                      <a:round/>
+                      <a:headEnd type="none" w="med" len="med"/>
+                      <a:tailEnd type="none" w="med" len="med"/>
+                    </a:lnT>
+                    <a:lnB w="9525" cap="flat" cmpd="sng" algn="ctr">
+                      <a:solidFill>
+                        <a:srgbClr val="CFC5B5"/>
+                      </a:solidFill>
+                      <a:prstDash val="solid"/>
+                      <a:round/>
+                      <a:headEnd type="none" w="med" len="med"/>
+                      <a:tailEnd type="none" w="med" len="med"/>
+                    </a:lnB>
+                    <a:solidFill>
+                      <a:srgbClr val="FFD9C2"/>
+                    </a:solidFill>
+                  </a:tcPr>
+                </a:tc>
+                <a:extLst>
+                  <a:ext uri="{0D108BD9-81ED-4DB2-BD59-A6C34878D82A}">
+                    <a16:rowId xmlns:a16="http://schemas.microsoft.com/office/drawing/2014/main" val="10005"/>
+                  </a:ext>
+                </a:extLst>
+              </a:tr>
+            </a:tbl>
+          </a:graphicData>
+        </a:graphic>
+      </p:graphicFrame>
+      <p:sp>
+        <p:nvSpPr>
+          <p:cNvPr id="14" name="Footnote"/>
+          <p:cNvSpPr txBox="1"/>
+          <p:nvPr/>
+        </p:nvSpPr>
+        <p:spPr>
+          <a:xfrm>
+            <a:off x="548640" y="6327648"/>
+            <a:ext cx="10332720" cy="320040"/>
+          </a:xfrm>
+          <a:prstGeom prst="rect">
+            <a:avLst/>
+          </a:prstGeom>
+          <a:noFill/>
+          <a:ln/>
+        </p:spPr>
+        <p:txBody>
+          <a:bodyPr wrap="square" lIns="0" tIns="0" rIns="0" bIns="0" rtlCol="0" anchor="ctr"/>
+          <a:lstStyle/>
+          <a:p>
+            <a:pPr marL="0" indent="0">
+              <a:buNone/>
+            </a:pPr>
+            <a:r>
+              <a:rPr lang="en-US" sz="1050" dirty="0">
+                <a:solidFill>
+                  <a:schemeClr val="accent5"/>
+                </a:solidFill>
+                <a:latin typeface="DM Sans" pitchFamily="34" charset="0"/>
+                <a:ea typeface="DM Sans" pitchFamily="34" charset="-122"/>
+                <a:cs typeface="DM Sans" pitchFamily="34" charset="-120"/>
+              </a:rPr>
+              <a:t>OpenRouter list prices, Oct 2026: GPT-6 Luna and Whisper Large V3 Turbo. The year-1 budget adds a 10× AI buffer and the free users. The MVP was built in 4 days.</a:t>
+            </a:r>
+            <a:endParaRPr lang="en-US" sz="1050" dirty="0"/>
+          </a:p>
+        </p:txBody>
+      </p:sp>
+      <p:sp>
+        <p:nvSpPr>
+          <p:cNvPr id="25" name="Slide Number Placeholder 0"/>
+          <p:cNvSpPr>
+            <a:spLocks noGrp="1"/>
+          </p:cNvSpPr>
+          <p:nvPr>
+            <p:ph type="sldNum" sz="quarter" idx="4294967295"/>
+          </p:nvPr>
+        </p:nvSpPr>
+        <p:spPr>
+          <a:xfrm>
+            <a:off x="11201400" y="6355080"/>
+            <a:ext cx="457200" cy="274320"/>
+          </a:xfrm>
+          <a:prstGeom prst="rect">
+            <a:avLst/>
+          </a:prstGeom>
+          <a:extLst>
+            <a:ext uri="{C572A759-6A51-4108-AA02-DFA0A04FC94B}">
+              <ma14:wrappingTextBoxFlag xmlns:ma14="http://schemas.microsoft.com/office/mac/drawingml/2011/main" xmlns="" val="0"/>
+            </a:ext>
+          </a:extLst>
+        </p:spPr>
+        <p:txBody>
+          <a:bodyPr/>
+          <a:lstStyle>
+            <a:lvl1pPr>
+              <a:defRPr sz="1050">
+                <a:solidFill>
+                  <a:schemeClr val="accent5"/>
+                </a:solidFill>
+                <a:latin typeface="DM Sans"/>
+                <a:ea typeface="DM Sans"/>
+                <a:cs typeface="DM Sans"/>
+              </a:defRPr>
+            </a:lvl1pPr>
+          </a:lstStyle>
+          <a:p>
+            <a:pPr algn="r"/>
+            <a:fld id="{F7021451-1387-4CA6-816F-3879F97B5CBC}" type="slidenum">
+              <a:rPr lang="en-US" b="0"/>
+              <a:t>7</a:t>
+            </a:fld>
+            <a:endParaRPr lang="en-US"/>
+          </a:p>
+        </p:txBody>
+      </p:sp>
+      <p:grpSp>
+        <p:nvGrpSpPr>
+          <p:cNvPr id="45" name="Group 44">
+            <a:extLst>
+              <a:ext uri="{FF2B5EF4-FFF2-40B4-BE49-F238E27FC236}">
+                <a16:creationId xmlns:a16="http://schemas.microsoft.com/office/drawing/2014/main" id="{CA7D4FFF-14F8-9203-8D41-CC52C186A0D3}"/>
+              </a:ext>
+            </a:extLst>
+          </p:cNvPr>
+          <p:cNvGrpSpPr/>
+          <p:nvPr/>
+        </p:nvGrpSpPr>
+        <p:grpSpPr>
+          <a:xfrm>
+            <a:off x="348136" y="1008711"/>
+            <a:ext cx="3210852" cy="1512077"/>
+            <a:chOff x="348136" y="1008711"/>
+            <a:chExt cx="3210852" cy="1512077"/>
+          </a:xfrm>
+        </p:grpSpPr>
+        <p:sp>
+          <p:nvSpPr>
+            <p:cNvPr id="37" name="Today step 1">
+              <a:extLst>
+                <a:ext uri="{FF2B5EF4-FFF2-40B4-BE49-F238E27FC236}">
+                  <a16:creationId xmlns:a16="http://schemas.microsoft.com/office/drawing/2014/main" id="{129BEC87-DF76-FEC3-1895-61D67F986B15}"/>
+                </a:ext>
+              </a:extLst>
+            </p:cNvPr>
+            <p:cNvSpPr/>
+            <p:nvPr/>
+          </p:nvSpPr>
+          <p:spPr>
+            <a:xfrm>
+              <a:off x="348136" y="1008711"/>
+              <a:ext cx="3210852" cy="1512077"/>
+            </a:xfrm>
+            <a:prstGeom prst="roundRect">
+              <a:avLst>
+                <a:gd name="adj" fmla="val 8000"/>
+              </a:avLst>
+            </a:prstGeom>
+            <a:solidFill>
+              <a:srgbClr val="EADFCB">
+                <a:alpha val="74902"/>
+              </a:srgbClr>
+            </a:solidFill>
+            <a:ln/>
+          </p:spPr>
+        </p:sp>
+        <p:sp>
+          <p:nvSpPr>
+            <p:cNvPr id="18" name="Text 4">
+              <a:extLst>
+                <a:ext uri="{FF2B5EF4-FFF2-40B4-BE49-F238E27FC236}">
+                  <a16:creationId xmlns:a16="http://schemas.microsoft.com/office/drawing/2014/main" id="{5DA2AE84-B3EE-428D-96D8-9035F66A1023}"/>
+                </a:ext>
+              </a:extLst>
+            </p:cNvPr>
+            <p:cNvSpPr txBox="1"/>
+            <p:nvPr/>
+          </p:nvSpPr>
+          <p:spPr>
+            <a:xfrm>
+              <a:off x="485886" y="1224000"/>
+              <a:ext cx="2884842" cy="731520"/>
+            </a:xfrm>
+            <a:prstGeom prst="rect">
+              <a:avLst/>
+            </a:prstGeom>
+            <a:noFill/>
+            <a:ln/>
+          </p:spPr>
+          <p:txBody>
+            <a:bodyPr wrap="square" lIns="0" tIns="0" rIns="0" bIns="0" rtlCol="0" anchor="ctr"/>
+            <a:lstStyle/>
+            <a:p>
+              <a:r>
+                <a:rPr lang="en-US" sz="4800" b="1" dirty="0">
+                  <a:solidFill>
+                    <a:schemeClr val="accent3"/>
+                  </a:solidFill>
+                  <a:latin typeface="Oswald" pitchFamily="34" charset="0"/>
+                  <a:ea typeface="Oswald" pitchFamily="34" charset="-122"/>
+                  <a:cs typeface="Arial" panose="020B0604020202020204" pitchFamily="34" charset="0"/>
+                </a:rPr>
+                <a:t>€</a:t>
+              </a:r>
+              <a:r>
+                <a:rPr lang="en-US" sz="4800" b="1" dirty="0">
+                  <a:solidFill>
+                    <a:schemeClr val="accent3"/>
+                  </a:solidFill>
+                  <a:latin typeface="Oswald" pitchFamily="34" charset="0"/>
+                  <a:ea typeface="Oswald" pitchFamily="34" charset="-122"/>
+                  <a:cs typeface="Oswald" pitchFamily="34" charset="-120"/>
+                </a:rPr>
+                <a:t>0.11</a:t>
+              </a:r>
+              <a:endParaRPr lang="en-US" sz="4800" dirty="0"/>
+            </a:p>
+          </p:txBody>
+        </p:sp>
+        <p:sp>
+          <p:nvSpPr>
+            <p:cNvPr id="20" name="Text 5">
+              <a:extLst>
+                <a:ext uri="{FF2B5EF4-FFF2-40B4-BE49-F238E27FC236}">
+                  <a16:creationId xmlns:a16="http://schemas.microsoft.com/office/drawing/2014/main" id="{90F5B3AC-3779-FC46-A7DF-7AED1217C14F}"/>
+                </a:ext>
+              </a:extLst>
+            </p:cNvPr>
+            <p:cNvSpPr txBox="1"/>
+            <p:nvPr/>
+          </p:nvSpPr>
+          <p:spPr>
+            <a:xfrm>
+              <a:off x="485885" y="1891464"/>
+              <a:ext cx="2884842" cy="548640"/>
+            </a:xfrm>
+            <a:prstGeom prst="rect">
+              <a:avLst/>
+            </a:prstGeom>
+            <a:noFill/>
+            <a:ln/>
+          </p:spPr>
+          <p:txBody>
+            <a:bodyPr wrap="square" lIns="0" tIns="0" rIns="0" bIns="0" rtlCol="0" anchor="t"/>
+            <a:lstStyle/>
+            <a:p>
+              <a:pPr marL="0" indent="0">
+                <a:buNone/>
+              </a:pPr>
+              <a:r>
+                <a:rPr lang="en-US" sz="1400" b="1" dirty="0">
+                  <a:solidFill>
+                    <a:schemeClr val="accent5"/>
+                  </a:solidFill>
+                  <a:latin typeface="DM Sans" pitchFamily="34" charset="0"/>
+                  <a:ea typeface="DM Sans" pitchFamily="34" charset="-122"/>
+                  <a:cs typeface="DM Sans" pitchFamily="34" charset="-120"/>
+                </a:rPr>
+                <a:t>AI</a:t>
+              </a:r>
+              <a:r>
+                <a:rPr lang="en-US" sz="1400" dirty="0">
+                  <a:solidFill>
+                    <a:schemeClr val="accent5"/>
+                  </a:solidFill>
+                  <a:latin typeface="DM Sans" pitchFamily="34" charset="0"/>
+                  <a:ea typeface="DM Sans" pitchFamily="34" charset="-122"/>
+                  <a:cs typeface="DM Sans" pitchFamily="34" charset="-120"/>
+                </a:rPr>
+                <a:t> for one paying customer a year, at 200 contacts</a:t>
+              </a:r>
+              <a:endParaRPr lang="en-US" sz="1400" dirty="0"/>
+            </a:p>
+          </p:txBody>
+        </p:sp>
+      </p:grpSp>
+      <p:grpSp>
+        <p:nvGrpSpPr>
+          <p:cNvPr id="44" name="Group 43">
+            <a:extLst>
+              <a:ext uri="{FF2B5EF4-FFF2-40B4-BE49-F238E27FC236}">
+                <a16:creationId xmlns:a16="http://schemas.microsoft.com/office/drawing/2014/main" id="{AC830376-8F70-7983-E641-EC3593A3815D}"/>
+              </a:ext>
+            </a:extLst>
+          </p:cNvPr>
+          <p:cNvGrpSpPr/>
+          <p:nvPr/>
+        </p:nvGrpSpPr>
+        <p:grpSpPr>
+          <a:xfrm>
+            <a:off x="4435204" y="1004770"/>
+            <a:ext cx="3210852" cy="1512077"/>
+            <a:chOff x="3970468" y="1004770"/>
+            <a:chExt cx="3210852" cy="1512077"/>
+          </a:xfrm>
+        </p:grpSpPr>
+        <p:sp>
+          <p:nvSpPr>
+            <p:cNvPr id="39" name="Today step 1">
+              <a:extLst>
+                <a:ext uri="{FF2B5EF4-FFF2-40B4-BE49-F238E27FC236}">
+                  <a16:creationId xmlns:a16="http://schemas.microsoft.com/office/drawing/2014/main" id="{5BA2F39D-301D-B614-0158-8E241EC190A1}"/>
+                </a:ext>
+              </a:extLst>
+            </p:cNvPr>
+            <p:cNvSpPr/>
+            <p:nvPr/>
+          </p:nvSpPr>
+          <p:spPr>
+            <a:xfrm>
+              <a:off x="3970468" y="1004770"/>
+              <a:ext cx="3210852" cy="1512077"/>
+            </a:xfrm>
+            <a:prstGeom prst="roundRect">
+              <a:avLst>
+                <a:gd name="adj" fmla="val 8000"/>
+              </a:avLst>
+            </a:prstGeom>
+            <a:solidFill>
+              <a:srgbClr val="EADFCB">
+                <a:alpha val="74902"/>
+              </a:srgbClr>
+            </a:solidFill>
+            <a:ln/>
+          </p:spPr>
+        </p:sp>
+        <p:sp>
+          <p:nvSpPr>
+            <p:cNvPr id="22" name="Text 6">
+              <a:extLst>
+                <a:ext uri="{FF2B5EF4-FFF2-40B4-BE49-F238E27FC236}">
+                  <a16:creationId xmlns:a16="http://schemas.microsoft.com/office/drawing/2014/main" id="{9FC86B89-E97F-9E57-B10F-75CD325B9B74}"/>
+                </a:ext>
+              </a:extLst>
+            </p:cNvPr>
+            <p:cNvSpPr txBox="1"/>
+            <p:nvPr/>
+          </p:nvSpPr>
+          <p:spPr>
+            <a:xfrm>
+              <a:off x="4099281" y="1224000"/>
+              <a:ext cx="1903755" cy="731520"/>
+            </a:xfrm>
+            <a:prstGeom prst="rect">
+              <a:avLst/>
+            </a:prstGeom>
+            <a:noFill/>
+            <a:ln/>
+          </p:spPr>
+          <p:txBody>
+            <a:bodyPr wrap="square" lIns="0" tIns="0" rIns="0" bIns="0" rtlCol="0" anchor="ctr"/>
+            <a:lstStyle/>
+            <a:p>
+              <a:r>
+                <a:rPr lang="en-US" sz="4800" b="1" dirty="0">
+                  <a:solidFill>
+                    <a:schemeClr val="accent3"/>
+                  </a:solidFill>
+                  <a:latin typeface="Oswald" pitchFamily="34" charset="0"/>
+                  <a:ea typeface="Oswald" pitchFamily="34" charset="-122"/>
+                  <a:cs typeface="Arial" panose="020B0604020202020204" pitchFamily="34" charset="0"/>
+                </a:rPr>
+                <a:t>€</a:t>
+              </a:r>
+              <a:r>
+                <a:rPr lang="en-US" sz="4800" b="1" dirty="0">
+                  <a:solidFill>
+                    <a:schemeClr val="accent3"/>
+                  </a:solidFill>
+                  <a:latin typeface="Oswald" pitchFamily="34" charset="0"/>
+                  <a:ea typeface="Oswald" pitchFamily="34" charset="-122"/>
+                  <a:cs typeface="Oswald" pitchFamily="34" charset="-120"/>
+                </a:rPr>
+                <a:t>550</a:t>
+              </a:r>
+              <a:endParaRPr lang="en-US" sz="4800" dirty="0"/>
+            </a:p>
+          </p:txBody>
+        </p:sp>
+        <p:sp>
+          <p:nvSpPr>
+            <p:cNvPr id="24" name="Text 7">
+              <a:extLst>
+                <a:ext uri="{FF2B5EF4-FFF2-40B4-BE49-F238E27FC236}">
+                  <a16:creationId xmlns:a16="http://schemas.microsoft.com/office/drawing/2014/main" id="{4814F341-65AA-884A-BBAD-DB02A93CB8C8}"/>
+                </a:ext>
+              </a:extLst>
+            </p:cNvPr>
+            <p:cNvSpPr txBox="1"/>
+            <p:nvPr/>
+          </p:nvSpPr>
+          <p:spPr>
+            <a:xfrm>
+              <a:off x="4099281" y="1960053"/>
+              <a:ext cx="1903755" cy="548640"/>
+            </a:xfrm>
+            <a:prstGeom prst="rect">
+              <a:avLst/>
+            </a:prstGeom>
+            <a:noFill/>
+            <a:ln/>
+          </p:spPr>
+          <p:txBody>
+            <a:bodyPr wrap="square" lIns="0" tIns="0" rIns="0" bIns="0" rtlCol="0" anchor="t"/>
+            <a:lstStyle/>
+            <a:p>
+              <a:pPr marL="0" indent="0">
+                <a:buNone/>
+              </a:pPr>
+              <a:r>
+                <a:rPr lang="en-US" sz="1400" dirty="0">
+                  <a:solidFill>
+                    <a:schemeClr val="accent5"/>
+                  </a:solidFill>
+                  <a:latin typeface="DM Sans" pitchFamily="34" charset="0"/>
+                  <a:ea typeface="DM Sans" pitchFamily="34" charset="-122"/>
+                  <a:cs typeface="DM Sans" pitchFamily="34" charset="-120"/>
+                </a:rPr>
+                <a:t>fixed services a year</a:t>
+              </a:r>
+              <a:endParaRPr lang="en-US" sz="1400" dirty="0"/>
+            </a:p>
+          </p:txBody>
+        </p:sp>
+      </p:grpSp>
+      <p:grpSp>
+        <p:nvGrpSpPr>
+          <p:cNvPr id="43" name="Group 42">
+            <a:extLst>
+              <a:ext uri="{FF2B5EF4-FFF2-40B4-BE49-F238E27FC236}">
+                <a16:creationId xmlns:a16="http://schemas.microsoft.com/office/drawing/2014/main" id="{2E2CA984-CB46-8DA5-A23E-E825564F8324}"/>
+              </a:ext>
+            </a:extLst>
+          </p:cNvPr>
+          <p:cNvGrpSpPr/>
+          <p:nvPr/>
+        </p:nvGrpSpPr>
+        <p:grpSpPr>
+          <a:xfrm>
+            <a:off x="8522272" y="1004769"/>
+            <a:ext cx="3210852" cy="1516020"/>
+            <a:chOff x="8057782" y="1004769"/>
+            <a:chExt cx="3210852" cy="1516020"/>
+          </a:xfrm>
+        </p:grpSpPr>
+        <p:sp>
+          <p:nvSpPr>
+            <p:cNvPr id="41" name="Today step 1">
+              <a:extLst>
+                <a:ext uri="{FF2B5EF4-FFF2-40B4-BE49-F238E27FC236}">
+                  <a16:creationId xmlns:a16="http://schemas.microsoft.com/office/drawing/2014/main" id="{EB514FD2-19CF-E76D-BE84-3F6040A248E9}"/>
+                </a:ext>
+              </a:extLst>
+            </p:cNvPr>
+            <p:cNvSpPr/>
+            <p:nvPr/>
+          </p:nvSpPr>
+          <p:spPr>
+            <a:xfrm>
+              <a:off x="8057782" y="1004769"/>
+              <a:ext cx="3210852" cy="1512077"/>
+            </a:xfrm>
+            <a:prstGeom prst="roundRect">
+              <a:avLst>
+                <a:gd name="adj" fmla="val 8000"/>
+              </a:avLst>
+            </a:prstGeom>
+            <a:solidFill>
+              <a:srgbClr val="EADFCB">
+                <a:alpha val="74902"/>
+              </a:srgbClr>
+            </a:solidFill>
+            <a:ln/>
+          </p:spPr>
+        </p:sp>
+        <p:sp>
+          <p:nvSpPr>
+            <p:cNvPr id="27" name="Text 8">
+              <a:extLst>
+                <a:ext uri="{FF2B5EF4-FFF2-40B4-BE49-F238E27FC236}">
+                  <a16:creationId xmlns:a16="http://schemas.microsoft.com/office/drawing/2014/main" id="{6604D89F-742A-14FF-67E2-B24C58BD9AC2}"/>
+                </a:ext>
+              </a:extLst>
+            </p:cNvPr>
+            <p:cNvSpPr txBox="1"/>
+            <p:nvPr/>
+          </p:nvSpPr>
+          <p:spPr>
+            <a:xfrm>
+              <a:off x="8120579" y="1224000"/>
+              <a:ext cx="3130125" cy="731520"/>
+            </a:xfrm>
+            <a:prstGeom prst="rect">
+              <a:avLst/>
+            </a:prstGeom>
+            <a:noFill/>
+            <a:ln/>
+          </p:spPr>
+          <p:txBody>
+            <a:bodyPr wrap="square" lIns="0" tIns="0" rIns="0" bIns="0" rtlCol="0" anchor="ctr"/>
+            <a:lstStyle/>
+            <a:p>
+              <a:pPr marL="0" indent="0">
+                <a:buNone/>
+              </a:pPr>
+              <a:r>
+                <a:rPr lang="en-US" sz="4800" b="1" dirty="0">
+                  <a:solidFill>
+                    <a:schemeClr val="accent3"/>
+                  </a:solidFill>
+                  <a:latin typeface="Oswald" pitchFamily="34" charset="0"/>
+                  <a:ea typeface="Oswald" pitchFamily="34" charset="-122"/>
+                  <a:cs typeface="Arial" panose="020B0604020202020204" pitchFamily="34" charset="0"/>
+                </a:rPr>
+                <a:t>€2k vs €54k</a:t>
+              </a:r>
+              <a:endParaRPr lang="en-US" sz="4800" dirty="0"/>
+            </a:p>
+          </p:txBody>
+        </p:sp>
+        <p:sp>
+          <p:nvSpPr>
+            <p:cNvPr id="29" name="Text 9">
+              <a:extLst>
+                <a:ext uri="{FF2B5EF4-FFF2-40B4-BE49-F238E27FC236}">
+                  <a16:creationId xmlns:a16="http://schemas.microsoft.com/office/drawing/2014/main" id="{9709B5AC-D2BC-F1D6-BD5C-F821A81B5384}"/>
+                </a:ext>
+              </a:extLst>
+            </p:cNvPr>
+            <p:cNvSpPr txBox="1"/>
+            <p:nvPr/>
+          </p:nvSpPr>
+          <p:spPr>
+            <a:xfrm>
+              <a:off x="8219237" y="1972149"/>
+              <a:ext cx="1166810" cy="548640"/>
+            </a:xfrm>
+            <a:prstGeom prst="rect">
+              <a:avLst/>
+            </a:prstGeom>
+            <a:noFill/>
+            <a:ln/>
+          </p:spPr>
+          <p:txBody>
+            <a:bodyPr wrap="square" lIns="0" tIns="0" rIns="0" bIns="0" rtlCol="0" anchor="t"/>
+            <a:lstStyle/>
+            <a:p>
+              <a:pPr marL="0" indent="0">
+                <a:buNone/>
+              </a:pPr>
+              <a:r>
+                <a:rPr lang="en-US" sz="1400" dirty="0"/>
+                <a:t>Year 1 Budget</a:t>
+              </a:r>
+            </a:p>
+          </p:txBody>
+        </p:sp>
+        <p:sp>
+          <p:nvSpPr>
+            <p:cNvPr id="34" name="Text 9">
+              <a:extLst>
+                <a:ext uri="{FF2B5EF4-FFF2-40B4-BE49-F238E27FC236}">
+                  <a16:creationId xmlns:a16="http://schemas.microsoft.com/office/drawing/2014/main" id="{3A367F83-5D8D-7B70-5408-7CC01CF7B74D}"/>
+                </a:ext>
+              </a:extLst>
+            </p:cNvPr>
+            <p:cNvSpPr txBox="1"/>
+            <p:nvPr/>
+          </p:nvSpPr>
+          <p:spPr>
+            <a:xfrm>
+              <a:off x="9946889" y="1972149"/>
+              <a:ext cx="1254511" cy="548640"/>
+            </a:xfrm>
+            <a:prstGeom prst="rect">
+              <a:avLst/>
+            </a:prstGeom>
+            <a:noFill/>
+            <a:ln/>
+          </p:spPr>
+          <p:txBody>
+            <a:bodyPr wrap="square" lIns="0" tIns="0" rIns="0" bIns="0" rtlCol="0" anchor="t"/>
+            <a:lstStyle/>
+            <a:p>
+              <a:pPr marL="0" indent="0">
+                <a:buNone/>
+              </a:pPr>
+              <a:r>
+                <a:rPr lang="en-US" sz="1400" dirty="0"/>
+                <a:t>Year 1 Revenue</a:t>
+              </a:r>
+            </a:p>
+          </p:txBody>
+        </p:sp>
+      </p:grpSp>
+    </p:spTree>
+  </p:cSld>
+  <p:clrMapOvr>
+    <a:masterClrMapping/>
+  </p:clrMapOvr>
+  <p:extLst>
+    <p:ext uri="{6950BFC3-D8DA-4A85-94F7-54DA5524770B}">
+      <p188:commentRel xmlns:p188="http://schemas.microsoft.com/office/powerpoint/2018/8/main" r:id="rId3"/>
+    </p:ext>
+  </p:extLst>
+</p:sld>
+</file>
+
+<file path=ppt/slides/slide8.xml><?xml version="1.0" encoding="utf-8"?>
+<p:sld xmlns:a="http://schemas.openxmlformats.org/drawingml/2006/main" xmlns:r="http://schemas.openxmlformats.org/officeDocument/2006/relationships" xmlns:p="http://schemas.openxmlformats.org/presentationml/2006/main" show="0">
+  <p:cSld>
+    <p:spTree>
+      <p:nvGrpSpPr>
+        <p:cNvPr id="1" name="">
+          <a:extLst>
+            <a:ext uri="{FF2B5EF4-FFF2-40B4-BE49-F238E27FC236}">
+              <a16:creationId xmlns:a16="http://schemas.microsoft.com/office/drawing/2014/main" id="{5DB95173-4025-B2AA-76DF-07AE5F212265}"/>
+            </a:ext>
+          </a:extLst>
+        </p:cNvPr>
+        <p:cNvGrpSpPr/>
+        <p:nvPr/>
+      </p:nvGrpSpPr>
+      <p:grpSpPr>
+        <a:xfrm>
+          <a:off x="0" y="0"/>
+          <a:ext cx="0" cy="0"/>
+          <a:chOff x="0" y="0"/>
+          <a:chExt cx="0" cy="0"/>
+        </a:xfrm>
+      </p:grpSpPr>
+      <p:sp>
+        <p:nvSpPr>
+          <p:cNvPr id="2" name="Kicker">
+            <a:extLst>
+              <a:ext uri="{FF2B5EF4-FFF2-40B4-BE49-F238E27FC236}">
+                <a16:creationId xmlns:a16="http://schemas.microsoft.com/office/drawing/2014/main" id="{09CAC80C-DCC7-7308-EA55-80D6DA9A268A}"/>
+              </a:ext>
+            </a:extLst>
+          </p:cNvPr>
           <p:cNvSpPr txBox="1"/>
           <p:nvPr/>
         </p:nvSpPr>
@@ -16691,7 +22019,13 @@
       </p:sp>
       <p:sp>
         <p:nvSpPr>
-          <p:cNvPr id="3" name="Text 0"/>
+          <p:cNvPr id="3" name="Text 0">
+            <a:extLst>
+              <a:ext uri="{FF2B5EF4-FFF2-40B4-BE49-F238E27FC236}">
+                <a16:creationId xmlns:a16="http://schemas.microsoft.com/office/drawing/2014/main" id="{2341E866-998E-CA46-C1EB-0EEC31F26194}"/>
+              </a:ext>
+            </a:extLst>
+          </p:cNvPr>
           <p:cNvSpPr>
             <a:spLocks noGrp="1"/>
           </p:cNvSpPr>
@@ -16734,7 +22068,13 @@
       </p:sp>
       <p:sp>
         <p:nvSpPr>
-          <p:cNvPr id="4" name="Text 2"/>
+          <p:cNvPr id="4" name="Text 2">
+            <a:extLst>
+              <a:ext uri="{FF2B5EF4-FFF2-40B4-BE49-F238E27FC236}">
+                <a16:creationId xmlns:a16="http://schemas.microsoft.com/office/drawing/2014/main" id="{A056596E-B9FF-5E20-7BCA-09D51038CE82}"/>
+              </a:ext>
+            </a:extLst>
+          </p:cNvPr>
           <p:cNvSpPr txBox="1"/>
           <p:nvPr/>
         </p:nvSpPr>
@@ -16773,17 +22113,17 @@
       </p:sp>
       <p:graphicFrame>
         <p:nvGraphicFramePr>
-          <p:cNvPr id="7" name="AI cost table"/>
+          <p:cNvPr id="7" name="AI cost table">
+            <a:extLst>
+              <a:ext uri="{FF2B5EF4-FFF2-40B4-BE49-F238E27FC236}">
+                <a16:creationId xmlns:a16="http://schemas.microsoft.com/office/drawing/2014/main" id="{F608E9BE-3E0F-44F3-39DE-EDDB6DB4AFA6}"/>
+              </a:ext>
+            </a:extLst>
+          </p:cNvPr>
           <p:cNvGraphicFramePr>
             <a:graphicFrameLocks noGrp="1"/>
           </p:cNvGraphicFramePr>
-          <p:nvPr>
-            <p:extLst>
-              <p:ext uri="{D42A27DB-BD31-4B8C-83A1-F6EECF244321}">
-                <p14:modId xmlns:p14="http://schemas.microsoft.com/office/powerpoint/2010/main" val="1579011935"/>
-              </p:ext>
-            </p:extLst>
-          </p:nvPr>
+          <p:nvPr/>
         </p:nvGraphicFramePr>
         <p:xfrm>
           <a:off x="548640" y="2377440"/>
@@ -17866,7 +23206,13 @@
       </p:graphicFrame>
       <p:sp>
         <p:nvSpPr>
-          <p:cNvPr id="6" name="Text 3"/>
+          <p:cNvPr id="6" name="Text 3">
+            <a:extLst>
+              <a:ext uri="{FF2B5EF4-FFF2-40B4-BE49-F238E27FC236}">
+                <a16:creationId xmlns:a16="http://schemas.microsoft.com/office/drawing/2014/main" id="{D5F31969-75F3-B24D-0B0E-3DB4D77FBB99}"/>
+              </a:ext>
+            </a:extLst>
+          </p:cNvPr>
           <p:cNvSpPr txBox="1"/>
           <p:nvPr/>
         </p:nvSpPr>
@@ -17905,17 +23251,17 @@
       </p:sp>
       <p:graphicFrame>
         <p:nvGraphicFramePr>
-          <p:cNvPr id="13" name="Fixed cost table"/>
+          <p:cNvPr id="13" name="Fixed cost table">
+            <a:extLst>
+              <a:ext uri="{FF2B5EF4-FFF2-40B4-BE49-F238E27FC236}">
+                <a16:creationId xmlns:a16="http://schemas.microsoft.com/office/drawing/2014/main" id="{365070E0-F8E3-2F55-7481-38D9353FD4D3}"/>
+              </a:ext>
+            </a:extLst>
+          </p:cNvPr>
           <p:cNvGraphicFramePr>
             <a:graphicFrameLocks noGrp="1"/>
           </p:cNvGraphicFramePr>
-          <p:nvPr>
-            <p:extLst>
-              <p:ext uri="{D42A27DB-BD31-4B8C-83A1-F6EECF244321}">
-                <p14:modId xmlns:p14="http://schemas.microsoft.com/office/powerpoint/2010/main" val="1579011935"/>
-              </p:ext>
-            </p:extLst>
-          </p:nvPr>
+          <p:nvPr/>
         </p:nvGraphicFramePr>
         <p:xfrm>
           <a:off x="6278728" y="2377440"/>
@@ -19209,7 +24555,13 @@
       </p:graphicFrame>
       <p:sp>
         <p:nvSpPr>
-          <p:cNvPr id="8" name="Text 4"/>
+          <p:cNvPr id="8" name="Text 4">
+            <a:extLst>
+              <a:ext uri="{FF2B5EF4-FFF2-40B4-BE49-F238E27FC236}">
+                <a16:creationId xmlns:a16="http://schemas.microsoft.com/office/drawing/2014/main" id="{7984B1C9-97EF-EFFE-C6BC-CAC763F55245}"/>
+              </a:ext>
+            </a:extLst>
+          </p:cNvPr>
           <p:cNvSpPr txBox="1"/>
           <p:nvPr/>
         </p:nvSpPr>
@@ -19248,7 +24600,13 @@
       </p:sp>
       <p:sp>
         <p:nvSpPr>
-          <p:cNvPr id="9" name="Text 5"/>
+          <p:cNvPr id="9" name="Text 5">
+            <a:extLst>
+              <a:ext uri="{FF2B5EF4-FFF2-40B4-BE49-F238E27FC236}">
+                <a16:creationId xmlns:a16="http://schemas.microsoft.com/office/drawing/2014/main" id="{54A382B6-BB68-381F-49AB-3C4E0C4BE4DB}"/>
+              </a:ext>
+            </a:extLst>
+          </p:cNvPr>
           <p:cNvSpPr txBox="1"/>
           <p:nvPr/>
         </p:nvSpPr>
@@ -19287,7 +24645,13 @@
       </p:sp>
       <p:sp>
         <p:nvSpPr>
-          <p:cNvPr id="10" name="Text 6"/>
+          <p:cNvPr id="10" name="Text 6">
+            <a:extLst>
+              <a:ext uri="{FF2B5EF4-FFF2-40B4-BE49-F238E27FC236}">
+                <a16:creationId xmlns:a16="http://schemas.microsoft.com/office/drawing/2014/main" id="{6ABD5CFB-F6CD-5F57-43B4-B9C54D8B25A3}"/>
+              </a:ext>
+            </a:extLst>
+          </p:cNvPr>
           <p:cNvSpPr txBox="1"/>
           <p:nvPr/>
         </p:nvSpPr>
@@ -19326,7 +24690,13 @@
       </p:sp>
       <p:sp>
         <p:nvSpPr>
-          <p:cNvPr id="11" name="Text 7"/>
+          <p:cNvPr id="11" name="Text 7">
+            <a:extLst>
+              <a:ext uri="{FF2B5EF4-FFF2-40B4-BE49-F238E27FC236}">
+                <a16:creationId xmlns:a16="http://schemas.microsoft.com/office/drawing/2014/main" id="{41F14DD4-A221-5042-987F-9ACAD9F714C0}"/>
+              </a:ext>
+            </a:extLst>
+          </p:cNvPr>
           <p:cNvSpPr txBox="1"/>
           <p:nvPr/>
         </p:nvSpPr>
@@ -19365,7 +24735,13 @@
       </p:sp>
       <p:sp>
         <p:nvSpPr>
-          <p:cNvPr id="12" name="Text 8"/>
+          <p:cNvPr id="12" name="Text 8">
+            <a:extLst>
+              <a:ext uri="{FF2B5EF4-FFF2-40B4-BE49-F238E27FC236}">
+                <a16:creationId xmlns:a16="http://schemas.microsoft.com/office/drawing/2014/main" id="{7571033B-A8FB-5A2F-AFCF-2A53775F0B5B}"/>
+              </a:ext>
+            </a:extLst>
+          </p:cNvPr>
           <p:cNvSpPr txBox="1"/>
           <p:nvPr/>
         </p:nvSpPr>
@@ -19404,7 +24780,13 @@
       </p:sp>
       <p:sp>
         <p:nvSpPr>
-          <p:cNvPr id="5" name="Text 9"/>
+          <p:cNvPr id="5" name="Text 9">
+            <a:extLst>
+              <a:ext uri="{FF2B5EF4-FFF2-40B4-BE49-F238E27FC236}">
+                <a16:creationId xmlns:a16="http://schemas.microsoft.com/office/drawing/2014/main" id="{65267E68-D99A-3FB1-E0F5-66DB778B21A5}"/>
+              </a:ext>
+            </a:extLst>
+          </p:cNvPr>
           <p:cNvSpPr txBox="1"/>
           <p:nvPr/>
         </p:nvSpPr>
@@ -19443,7 +24825,13 @@
       </p:sp>
       <p:sp>
         <p:nvSpPr>
-          <p:cNvPr id="14" name="Footnote"/>
+          <p:cNvPr id="14" name="Footnote">
+            <a:extLst>
+              <a:ext uri="{FF2B5EF4-FFF2-40B4-BE49-F238E27FC236}">
+                <a16:creationId xmlns:a16="http://schemas.microsoft.com/office/drawing/2014/main" id="{A636E300-51C8-1DCA-4381-45AA7A34700C}"/>
+              </a:ext>
+            </a:extLst>
+          </p:cNvPr>
           <p:cNvSpPr txBox="1"/>
           <p:nvPr/>
         </p:nvSpPr>
@@ -19482,7 +24870,13 @@
       </p:sp>
       <p:sp>
         <p:nvSpPr>
-          <p:cNvPr id="25" name="Slide Number Placeholder 0"/>
+          <p:cNvPr id="25" name="Slide Number Placeholder 0">
+            <a:extLst>
+              <a:ext uri="{FF2B5EF4-FFF2-40B4-BE49-F238E27FC236}">
+                <a16:creationId xmlns:a16="http://schemas.microsoft.com/office/drawing/2014/main" id="{42D33BB9-DB8D-594A-26F0-2517F52D7F99}"/>
+              </a:ext>
+            </a:extLst>
+          </p:cNvPr>
           <p:cNvSpPr>
             <a:spLocks noGrp="1"/>
           </p:cNvSpPr>
@@ -19522,26 +24916,26 @@
             <a:pPr algn="r"/>
             <a:fld id="{F7021451-1387-4CA6-816F-3879F97B5CBC}" type="slidenum">
               <a:rPr lang="en-US" b="0"/>
-              <a:t>7</a:t>
+              <a:t>8</a:t>
             </a:fld>
             <a:endParaRPr lang="en-US"/>
           </a:p>
         </p:txBody>
       </p:sp>
     </p:spTree>
+    <p:extLst>
+      <p:ext uri="{BB962C8B-B14F-4D97-AF65-F5344CB8AC3E}">
+        <p14:creationId xmlns:p14="http://schemas.microsoft.com/office/powerpoint/2010/main" val="4037104680"/>
+      </p:ext>
+    </p:extLst>
   </p:cSld>
   <p:clrMapOvr>
     <a:masterClrMapping/>
   </p:clrMapOvr>
-  <p:extLst>
-    <p:ext uri="{6950BFC3-D8DA-4A85-94F7-54DA5524770B}">
-      <p188:commentRel xmlns:p188="http://schemas.microsoft.com/office/powerpoint/2018/8/main" r:id="rId3"/>
-    </p:ext>
-  </p:extLst>
 </p:sld>
 </file>
 
-<file path=ppt/slides/slide8.xml><?xml version="1.0" encoding="utf-8"?>
+<file path=ppt/slides/slide9.xml><?xml version="1.0" encoding="utf-8"?>
 <p:sld xmlns:a="http://schemas.openxmlformats.org/drawingml/2006/main" xmlns:r="http://schemas.openxmlformats.org/officeDocument/2006/relationships" xmlns:p="http://schemas.openxmlformats.org/presentationml/2006/main">
   <p:cSld name="Slide 7">
     <p:spTree>
@@ -19583,7 +24977,7 @@
               <a:buNone/>
             </a:pPr>
             <a:r>
-              <a:rPr lang="en-US" sz="1300" b="1" kern="0" spc="200" dirty="0">
+              <a:rPr lang="en-US" sz="3100" b="1" kern="0" spc="200" dirty="0">
                 <a:solidFill>
                   <a:schemeClr val="accent1"/>
                 </a:solidFill>
@@ -19593,7 +24987,7 @@
               </a:rPr>
               <a:t>DEMAND</a:t>
             </a:r>
-            <a:endParaRPr lang="en-US" sz="1300" dirty="0"/>
+            <a:endParaRPr lang="en-US" sz="3100" dirty="0"/>
           </a:p>
         </p:txBody>
       </p:sp>
@@ -19786,7 +25180,7 @@
                 <a:ea typeface="DM Sans" pitchFamily="34" charset="-122"/>
                 <a:cs typeface="DM Sans" pitchFamily="34" charset="-120"/>
               </a:rPr>
-              <a:t>spent sorting contacts after an event, median</a:t>
+              <a:t>Average time spent on sorting contacts after an event.</a:t>
             </a:r>
             <a:endParaRPr lang="en-US" sz="1500" dirty="0"/>
           </a:p>
@@ -19825,7 +25219,7 @@
                 <a:ea typeface="Oswald" pitchFamily="34" charset="-122"/>
                 <a:cs typeface="Oswald" pitchFamily="34" charset="-120"/>
               </a:rPr>
-              <a:t>[_ / 10]</a:t>
+              <a:t>[6 / 10]</a:t>
             </a:r>
             <a:endParaRPr lang="en-US" sz="4800" dirty="0"/>
           </a:p>
@@ -19929,780 +25323,7 @@
           </a:prstGeom>
           <a:extLst>
             <a:ext uri="{C572A759-6A51-4108-AA02-DFA0A04FC94B}">
-              <ma14:wrappingTextBoxFlag xmlns="" xmlns:ma14="http://schemas.microsoft.com/office/mac/drawingml/2011/main" val="0"/>
-            </a:ext>
-          </a:extLst>
-        </p:spPr>
-        <p:txBody>
-          <a:bodyPr/>
-          <a:lstStyle>
-            <a:lvl1pPr>
-              <a:defRPr sz="1050">
-                <a:solidFill>
-                  <a:schemeClr val="accent6"/>
-                </a:solidFill>
-                <a:latin typeface="DM Sans"/>
-                <a:ea typeface="DM Sans"/>
-                <a:cs typeface="DM Sans"/>
-              </a:defRPr>
-            </a:lvl1pPr>
-          </a:lstStyle>
-          <a:p>
-            <a:pPr algn="r"/>
-            <a:fld id="{F7021451-1387-4CA6-816F-3879F97B5CBC}" type="slidenum">
-              <a:rPr lang="en-US" b="0"/>
-              <a:t>8</a:t>
-            </a:fld>
-            <a:endParaRPr lang="en-US"/>
-          </a:p>
-        </p:txBody>
-      </p:sp>
-    </p:spTree>
-  </p:cSld>
-  <p:clrMapOvr>
-    <a:masterClrMapping/>
-  </p:clrMapOvr>
-  <p:extLst>
-    <p:ext uri="{6950BFC3-D8DA-4A85-94F7-54DA5524770B}">
-      <p188:commentRel xmlns:p188="http://schemas.microsoft.com/office/powerpoint/2018/8/main" r:id="rId3"/>
-    </p:ext>
-  </p:extLst>
-</p:sld>
-</file>
-
-<file path=ppt/slides/slide9.xml><?xml version="1.0" encoding="utf-8"?>
-<p:sld xmlns:a="http://schemas.openxmlformats.org/drawingml/2006/main" xmlns:r="http://schemas.openxmlformats.org/officeDocument/2006/relationships" xmlns:p="http://schemas.openxmlformats.org/presentationml/2006/main">
-  <p:cSld>
-    <p:bg>
-      <p:bgPr>
-        <a:solidFill>
-          <a:srgbClr val="15110E"/>
-        </a:solidFill>
-        <a:effectLst/>
-      </p:bgPr>
-    </p:bg>
-    <p:spTree>
-      <p:nvGrpSpPr>
-        <p:cNvPr id="1" name="">
-          <a:extLst>
-            <a:ext uri="{FF2B5EF4-FFF2-40B4-BE49-F238E27FC236}">
-              <a16:creationId xmlns:a16="http://schemas.microsoft.com/office/drawing/2014/main" id="{AD68547D-2975-B7FF-B6E9-ADAE8BA7CF08}"/>
-            </a:ext>
-          </a:extLst>
-        </p:cNvPr>
-        <p:cNvGrpSpPr/>
-        <p:nvPr/>
-      </p:nvGrpSpPr>
-      <p:grpSpPr>
-        <a:xfrm>
-          <a:off x="0" y="0"/>
-          <a:ext cx="0" cy="0"/>
-          <a:chOff x="0" y="0"/>
-          <a:chExt cx="0" cy="0"/>
-        </a:xfrm>
-      </p:grpSpPr>
-      <p:sp>
-        <p:nvSpPr>
-          <p:cNvPr id="2" name="Kicker">
-            <a:extLst>
-              <a:ext uri="{FF2B5EF4-FFF2-40B4-BE49-F238E27FC236}">
-                <a16:creationId xmlns:a16="http://schemas.microsoft.com/office/drawing/2014/main" id="{BEE17435-07DA-3579-D90E-321C3594A8DA}"/>
-              </a:ext>
-            </a:extLst>
-          </p:cNvPr>
-          <p:cNvSpPr txBox="1"/>
-          <p:nvPr/>
-        </p:nvSpPr>
-        <p:spPr>
-          <a:xfrm>
-            <a:off x="548640" y="384048"/>
-            <a:ext cx="8229600" cy="274320"/>
-          </a:xfrm>
-          <a:prstGeom prst="rect">
-            <a:avLst/>
-          </a:prstGeom>
-          <a:noFill/>
-          <a:ln/>
-        </p:spPr>
-        <p:txBody>
-          <a:bodyPr wrap="square" lIns="0" tIns="0" rIns="0" bIns="0" rtlCol="0" anchor="t"/>
-          <a:lstStyle/>
-          <a:p>
-            <a:pPr marL="0" indent="0">
-              <a:buNone/>
-            </a:pPr>
-            <a:r>
-              <a:rPr lang="en-US" sz="1300" b="1" kern="0" spc="200" dirty="0">
-                <a:solidFill>
-                  <a:schemeClr val="accent1"/>
-                </a:solidFill>
-                <a:latin typeface="DM Sans" pitchFamily="34" charset="0"/>
-                <a:ea typeface="DM Sans" pitchFamily="34" charset="-122"/>
-                <a:cs typeface="DM Sans" pitchFamily="34" charset="-120"/>
-              </a:rPr>
-              <a:t>FUNDING</a:t>
-            </a:r>
-            <a:endParaRPr lang="en-US" sz="1300" dirty="0"/>
-          </a:p>
-        </p:txBody>
-      </p:sp>
-      <p:sp>
-        <p:nvSpPr>
-          <p:cNvPr id="12" name="Text 10">
-            <a:extLst>
-              <a:ext uri="{FF2B5EF4-FFF2-40B4-BE49-F238E27FC236}">
-                <a16:creationId xmlns:a16="http://schemas.microsoft.com/office/drawing/2014/main" id="{D93CE3EB-235E-2BD0-6254-807FF6D01953}"/>
-              </a:ext>
-            </a:extLst>
-          </p:cNvPr>
-          <p:cNvSpPr txBox="1"/>
-          <p:nvPr/>
-        </p:nvSpPr>
-        <p:spPr>
-          <a:xfrm>
-            <a:off x="3538935" y="1709928"/>
-            <a:ext cx="3657600" cy="274320"/>
-          </a:xfrm>
-          <a:prstGeom prst="rect">
-            <a:avLst/>
-          </a:prstGeom>
-          <a:noFill/>
-          <a:ln/>
-        </p:spPr>
-        <p:txBody>
-          <a:bodyPr wrap="square" lIns="0" tIns="0" rIns="0" bIns="0" rtlCol="0" anchor="t"/>
-          <a:lstStyle/>
-          <a:p>
-            <a:pPr marL="0" indent="0">
-              <a:buNone/>
-            </a:pPr>
-            <a:r>
-              <a:rPr lang="en-US" sz="1600" b="1" kern="0" spc="200" dirty="0">
-                <a:solidFill>
-                  <a:schemeClr val="accent1"/>
-                </a:solidFill>
-                <a:latin typeface="DM Sans" pitchFamily="34" charset="0"/>
-                <a:ea typeface="DM Sans" pitchFamily="34" charset="-122"/>
-                <a:cs typeface="DM Sans" pitchFamily="34" charset="-120"/>
-              </a:rPr>
-              <a:t>YEAR 1 PLAN</a:t>
-            </a:r>
-            <a:endParaRPr lang="en-US" sz="1600" dirty="0"/>
-          </a:p>
-        </p:txBody>
-      </p:sp>
-      <p:sp>
-        <p:nvSpPr>
-          <p:cNvPr id="13" name="Text 11">
-            <a:extLst>
-              <a:ext uri="{FF2B5EF4-FFF2-40B4-BE49-F238E27FC236}">
-                <a16:creationId xmlns:a16="http://schemas.microsoft.com/office/drawing/2014/main" id="{307D6E05-4717-A039-0CBE-0F19CC6DAF38}"/>
-              </a:ext>
-            </a:extLst>
-          </p:cNvPr>
-          <p:cNvSpPr txBox="1"/>
-          <p:nvPr/>
-        </p:nvSpPr>
-        <p:spPr>
-          <a:xfrm>
-            <a:off x="3538935" y="2121408"/>
-            <a:ext cx="1371600" cy="365760"/>
-          </a:xfrm>
-          <a:prstGeom prst="rect">
-            <a:avLst/>
-          </a:prstGeom>
-          <a:noFill/>
-          <a:ln/>
-        </p:spPr>
-        <p:txBody>
-          <a:bodyPr wrap="square" lIns="0" tIns="0" rIns="0" bIns="0" rtlCol="0" anchor="t"/>
-          <a:lstStyle/>
-          <a:p>
-            <a:pPr marL="0" indent="0">
-              <a:buNone/>
-            </a:pPr>
-            <a:r>
-              <a:rPr lang="en-US" b="1" dirty="0">
-                <a:solidFill>
-                  <a:schemeClr val="accent2"/>
-                </a:solidFill>
-                <a:latin typeface="DM Sans" pitchFamily="34" charset="0"/>
-                <a:ea typeface="DM Sans" pitchFamily="34" charset="-122"/>
-                <a:cs typeface="DM Sans" pitchFamily="34" charset="-120"/>
-              </a:rPr>
-              <a:t>Dec 2026</a:t>
-            </a:r>
-            <a:endParaRPr lang="en-US" dirty="0"/>
-          </a:p>
-        </p:txBody>
-      </p:sp>
-      <p:sp>
-        <p:nvSpPr>
-          <p:cNvPr id="14" name="Text 12">
-            <a:extLst>
-              <a:ext uri="{FF2B5EF4-FFF2-40B4-BE49-F238E27FC236}">
-                <a16:creationId xmlns:a16="http://schemas.microsoft.com/office/drawing/2014/main" id="{67532D82-7F29-E1BC-2DAD-F5F56D11D8AC}"/>
-              </a:ext>
-            </a:extLst>
-          </p:cNvPr>
-          <p:cNvSpPr txBox="1"/>
-          <p:nvPr/>
-        </p:nvSpPr>
-        <p:spPr>
-          <a:xfrm>
-            <a:off x="4956255" y="2121408"/>
-            <a:ext cx="3200400" cy="365760"/>
-          </a:xfrm>
-          <a:prstGeom prst="rect">
-            <a:avLst/>
-          </a:prstGeom>
-          <a:noFill/>
-          <a:ln/>
-        </p:spPr>
-        <p:txBody>
-          <a:bodyPr wrap="square" lIns="0" tIns="0" rIns="0" bIns="0" rtlCol="0" anchor="t"/>
-          <a:lstStyle/>
-          <a:p>
-            <a:pPr marL="0" indent="0">
-              <a:buNone/>
-            </a:pPr>
-            <a:r>
-              <a:rPr lang="en-US" dirty="0">
-                <a:solidFill>
-                  <a:schemeClr val="bg1"/>
-                </a:solidFill>
-                <a:latin typeface="DM Sans" pitchFamily="34" charset="0"/>
-                <a:ea typeface="DM Sans" pitchFamily="34" charset="-122"/>
-                <a:cs typeface="DM Sans" pitchFamily="34" charset="-120"/>
-              </a:rPr>
-              <a:t>20 pilot users</a:t>
-            </a:r>
-            <a:endParaRPr lang="en-US" dirty="0"/>
-          </a:p>
-        </p:txBody>
-      </p:sp>
-      <p:sp>
-        <p:nvSpPr>
-          <p:cNvPr id="15" name="Text 13">
-            <a:extLst>
-              <a:ext uri="{FF2B5EF4-FFF2-40B4-BE49-F238E27FC236}">
-                <a16:creationId xmlns:a16="http://schemas.microsoft.com/office/drawing/2014/main" id="{AE748846-7684-0EC0-236B-DD636A99CF4C}"/>
-              </a:ext>
-            </a:extLst>
-          </p:cNvPr>
-          <p:cNvSpPr txBox="1"/>
-          <p:nvPr/>
-        </p:nvSpPr>
-        <p:spPr>
-          <a:xfrm>
-            <a:off x="3538935" y="2578608"/>
-            <a:ext cx="1371600" cy="365760"/>
-          </a:xfrm>
-          <a:prstGeom prst="rect">
-            <a:avLst/>
-          </a:prstGeom>
-          <a:noFill/>
-          <a:ln/>
-        </p:spPr>
-        <p:txBody>
-          <a:bodyPr wrap="square" lIns="0" tIns="0" rIns="0" bIns="0" rtlCol="0" anchor="t"/>
-          <a:lstStyle/>
-          <a:p>
-            <a:pPr marL="0" indent="0">
-              <a:buNone/>
-            </a:pPr>
-            <a:r>
-              <a:rPr lang="en-US" b="1" dirty="0">
-                <a:solidFill>
-                  <a:schemeClr val="accent2"/>
-                </a:solidFill>
-                <a:latin typeface="DM Sans" pitchFamily="34" charset="0"/>
-                <a:ea typeface="DM Sans" pitchFamily="34" charset="-122"/>
-                <a:cs typeface="DM Sans" pitchFamily="34" charset="-120"/>
-              </a:rPr>
-              <a:t>Jun 2027</a:t>
-            </a:r>
-            <a:endParaRPr lang="en-US" dirty="0"/>
-          </a:p>
-        </p:txBody>
-      </p:sp>
-      <p:sp>
-        <p:nvSpPr>
-          <p:cNvPr id="16" name="Text 14">
-            <a:extLst>
-              <a:ext uri="{FF2B5EF4-FFF2-40B4-BE49-F238E27FC236}">
-                <a16:creationId xmlns:a16="http://schemas.microsoft.com/office/drawing/2014/main" id="{8E7A0C8C-AB14-C3A8-9321-891665886ED4}"/>
-              </a:ext>
-            </a:extLst>
-          </p:cNvPr>
-          <p:cNvSpPr txBox="1"/>
-          <p:nvPr/>
-        </p:nvSpPr>
-        <p:spPr>
-          <a:xfrm>
-            <a:off x="4956255" y="2578608"/>
-            <a:ext cx="3200400" cy="365760"/>
-          </a:xfrm>
-          <a:prstGeom prst="rect">
-            <a:avLst/>
-          </a:prstGeom>
-          <a:noFill/>
-          <a:ln/>
-        </p:spPr>
-        <p:txBody>
-          <a:bodyPr wrap="square" lIns="0" tIns="0" rIns="0" bIns="0" rtlCol="0" anchor="t"/>
-          <a:lstStyle/>
-          <a:p>
-            <a:pPr marL="0" indent="0">
-              <a:buNone/>
-            </a:pPr>
-            <a:r>
-              <a:rPr lang="en-US" dirty="0">
-                <a:solidFill>
-                  <a:schemeClr val="bg1"/>
-                </a:solidFill>
-                <a:latin typeface="DM Sans" pitchFamily="34" charset="0"/>
-                <a:ea typeface="DM Sans" pitchFamily="34" charset="-122"/>
-                <a:cs typeface="DM Sans" pitchFamily="34" charset="-120"/>
-              </a:rPr>
-              <a:t>Paid launch</a:t>
-            </a:r>
-            <a:endParaRPr lang="en-US" dirty="0"/>
-          </a:p>
-        </p:txBody>
-      </p:sp>
-      <p:sp>
-        <p:nvSpPr>
-          <p:cNvPr id="17" name="Text 15">
-            <a:extLst>
-              <a:ext uri="{FF2B5EF4-FFF2-40B4-BE49-F238E27FC236}">
-                <a16:creationId xmlns:a16="http://schemas.microsoft.com/office/drawing/2014/main" id="{C42B4870-A955-5FEF-3785-6727413EFA8A}"/>
-              </a:ext>
-            </a:extLst>
-          </p:cNvPr>
-          <p:cNvSpPr txBox="1"/>
-          <p:nvPr/>
-        </p:nvSpPr>
-        <p:spPr>
-          <a:xfrm>
-            <a:off x="3538935" y="3035808"/>
-            <a:ext cx="1371600" cy="365760"/>
-          </a:xfrm>
-          <a:prstGeom prst="rect">
-            <a:avLst/>
-          </a:prstGeom>
-          <a:noFill/>
-          <a:ln/>
-        </p:spPr>
-        <p:txBody>
-          <a:bodyPr wrap="square" lIns="0" tIns="0" rIns="0" bIns="0" rtlCol="0" anchor="t"/>
-          <a:lstStyle/>
-          <a:p>
-            <a:pPr marL="0" indent="0">
-              <a:buNone/>
-            </a:pPr>
-            <a:r>
-              <a:rPr lang="en-US" b="1" dirty="0">
-                <a:solidFill>
-                  <a:schemeClr val="accent2"/>
-                </a:solidFill>
-                <a:latin typeface="DM Sans" pitchFamily="34" charset="0"/>
-                <a:ea typeface="DM Sans" pitchFamily="34" charset="-122"/>
-                <a:cs typeface="DM Sans" pitchFamily="34" charset="-120"/>
-              </a:rPr>
-              <a:t>Oct 2027</a:t>
-            </a:r>
-            <a:endParaRPr lang="en-US" dirty="0"/>
-          </a:p>
-        </p:txBody>
-      </p:sp>
-      <p:sp>
-        <p:nvSpPr>
-          <p:cNvPr id="18" name="Text 16">
-            <a:extLst>
-              <a:ext uri="{FF2B5EF4-FFF2-40B4-BE49-F238E27FC236}">
-                <a16:creationId xmlns:a16="http://schemas.microsoft.com/office/drawing/2014/main" id="{0EDB0802-3527-F7C6-C134-97DC3FF88DBE}"/>
-              </a:ext>
-            </a:extLst>
-          </p:cNvPr>
-          <p:cNvSpPr txBox="1"/>
-          <p:nvPr/>
-        </p:nvSpPr>
-        <p:spPr>
-          <a:xfrm>
-            <a:off x="4956255" y="3035808"/>
-            <a:ext cx="3200400" cy="365760"/>
-          </a:xfrm>
-          <a:prstGeom prst="rect">
-            <a:avLst/>
-          </a:prstGeom>
-          <a:noFill/>
-          <a:ln/>
-        </p:spPr>
-        <p:txBody>
-          <a:bodyPr wrap="square" lIns="0" tIns="0" rIns="0" bIns="0" rtlCol="0" anchor="t"/>
-          <a:lstStyle/>
-          <a:p>
-            <a:pPr marL="0" indent="0">
-              <a:buNone/>
-            </a:pPr>
-            <a:r>
-              <a:rPr lang="en-US" dirty="0">
-                <a:solidFill>
-                  <a:schemeClr val="bg1"/>
-                </a:solidFill>
-                <a:latin typeface="DM Sans" pitchFamily="34" charset="0"/>
-                <a:ea typeface="DM Sans" pitchFamily="34" charset="-122"/>
-                <a:cs typeface="DM Sans" pitchFamily="34" charset="-120"/>
-              </a:rPr>
-              <a:t>400 paying users</a:t>
-            </a:r>
-            <a:endParaRPr lang="en-US" dirty="0"/>
-          </a:p>
-        </p:txBody>
-      </p:sp>
-      <p:sp>
-        <p:nvSpPr>
-          <p:cNvPr id="19" name="Text 17">
-            <a:extLst>
-              <a:ext uri="{FF2B5EF4-FFF2-40B4-BE49-F238E27FC236}">
-                <a16:creationId xmlns:a16="http://schemas.microsoft.com/office/drawing/2014/main" id="{30E1E777-4A3A-51CA-1B8E-2FC34F5595F2}"/>
-              </a:ext>
-            </a:extLst>
-          </p:cNvPr>
-          <p:cNvSpPr txBox="1"/>
-          <p:nvPr/>
-        </p:nvSpPr>
-        <p:spPr>
-          <a:xfrm>
-            <a:off x="3376477" y="3783823"/>
-            <a:ext cx="1534058" cy="731520"/>
-          </a:xfrm>
-          <a:prstGeom prst="rect">
-            <a:avLst/>
-          </a:prstGeom>
-          <a:noFill/>
-          <a:ln/>
-        </p:spPr>
-        <p:txBody>
-          <a:bodyPr wrap="square" lIns="0" tIns="0" rIns="0" bIns="0" rtlCol="0" anchor="ctr"/>
-          <a:lstStyle/>
-          <a:p>
-            <a:pPr marL="0" indent="0">
-              <a:buNone/>
-            </a:pPr>
-            <a:r>
-              <a:rPr lang="en-US" sz="4800" b="1" dirty="0">
-                <a:solidFill>
-                  <a:schemeClr val="accent2"/>
-                </a:solidFill>
-                <a:latin typeface="Oswald" pitchFamily="34" charset="0"/>
-                <a:ea typeface="Oswald" pitchFamily="34" charset="-122"/>
-                <a:cs typeface="Oswald" pitchFamily="34" charset="-120"/>
-              </a:rPr>
-              <a:t>€11k</a:t>
-            </a:r>
-            <a:endParaRPr lang="en-US" sz="4800" dirty="0"/>
-          </a:p>
-        </p:txBody>
-      </p:sp>
-      <p:sp>
-        <p:nvSpPr>
-          <p:cNvPr id="20" name="Text 18">
-            <a:extLst>
-              <a:ext uri="{FF2B5EF4-FFF2-40B4-BE49-F238E27FC236}">
-                <a16:creationId xmlns:a16="http://schemas.microsoft.com/office/drawing/2014/main" id="{0EE5609B-66C2-D4CA-247B-B96B9D02B659}"/>
-              </a:ext>
-            </a:extLst>
-          </p:cNvPr>
-          <p:cNvSpPr txBox="1"/>
-          <p:nvPr/>
-        </p:nvSpPr>
-        <p:spPr>
-          <a:xfrm>
-            <a:off x="3376477" y="4561063"/>
-            <a:ext cx="1396898" cy="731520"/>
-          </a:xfrm>
-          <a:prstGeom prst="rect">
-            <a:avLst/>
-          </a:prstGeom>
-          <a:noFill/>
-          <a:ln/>
-        </p:spPr>
-        <p:txBody>
-          <a:bodyPr wrap="square" lIns="0" tIns="0" rIns="0" bIns="0" rtlCol="0" anchor="t"/>
-          <a:lstStyle/>
-          <a:p>
-            <a:pPr marL="0" indent="0">
-              <a:buNone/>
-            </a:pPr>
-            <a:r>
-              <a:rPr lang="en-US" dirty="0">
-                <a:solidFill>
-                  <a:schemeClr val="accent4"/>
-                </a:solidFill>
-                <a:latin typeface="DM Sans" pitchFamily="34" charset="0"/>
-                <a:ea typeface="DM Sans" pitchFamily="34" charset="-122"/>
-                <a:cs typeface="DM Sans" pitchFamily="34" charset="-120"/>
-              </a:rPr>
-              <a:t>revenue in year 1</a:t>
-            </a:r>
-            <a:endParaRPr lang="en-US" dirty="0"/>
-          </a:p>
-        </p:txBody>
-      </p:sp>
-      <p:sp>
-        <p:nvSpPr>
-          <p:cNvPr id="21" name="Text 19">
-            <a:extLst>
-              <a:ext uri="{FF2B5EF4-FFF2-40B4-BE49-F238E27FC236}">
-                <a16:creationId xmlns:a16="http://schemas.microsoft.com/office/drawing/2014/main" id="{947E5198-72DF-7329-175E-464C2C18E6AE}"/>
-              </a:ext>
-            </a:extLst>
-          </p:cNvPr>
-          <p:cNvSpPr txBox="1"/>
-          <p:nvPr/>
-        </p:nvSpPr>
-        <p:spPr>
-          <a:xfrm>
-            <a:off x="5322978" y="3708520"/>
-            <a:ext cx="1534058" cy="731520"/>
-          </a:xfrm>
-          <a:prstGeom prst="rect">
-            <a:avLst/>
-          </a:prstGeom>
-          <a:noFill/>
-          <a:ln/>
-        </p:spPr>
-        <p:txBody>
-          <a:bodyPr wrap="square" lIns="0" tIns="0" rIns="0" bIns="0" rtlCol="0" anchor="ctr"/>
-          <a:lstStyle/>
-          <a:p>
-            <a:pPr marL="0" indent="0">
-              <a:buNone/>
-            </a:pPr>
-            <a:r>
-              <a:rPr lang="en-US" sz="4800" b="1" dirty="0">
-                <a:solidFill>
-                  <a:schemeClr val="bg1"/>
-                </a:solidFill>
-                <a:latin typeface="Oswald" pitchFamily="34" charset="0"/>
-                <a:ea typeface="Oswald" pitchFamily="34" charset="-122"/>
-                <a:cs typeface="Oswald" pitchFamily="34" charset="-120"/>
-              </a:rPr>
-              <a:t>€43k</a:t>
-            </a:r>
-            <a:endParaRPr lang="en-US" sz="4800" dirty="0"/>
-          </a:p>
-        </p:txBody>
-      </p:sp>
-      <p:sp>
-        <p:nvSpPr>
-          <p:cNvPr id="22" name="Text 20">
-            <a:extLst>
-              <a:ext uri="{FF2B5EF4-FFF2-40B4-BE49-F238E27FC236}">
-                <a16:creationId xmlns:a16="http://schemas.microsoft.com/office/drawing/2014/main" id="{D40342E6-75B2-2006-4E95-54F3AF05081F}"/>
-              </a:ext>
-            </a:extLst>
-          </p:cNvPr>
-          <p:cNvSpPr txBox="1"/>
-          <p:nvPr/>
-        </p:nvSpPr>
-        <p:spPr>
-          <a:xfrm>
-            <a:off x="5322978" y="4485760"/>
-            <a:ext cx="1396898" cy="731520"/>
-          </a:xfrm>
-          <a:prstGeom prst="rect">
-            <a:avLst/>
-          </a:prstGeom>
-          <a:noFill/>
-          <a:ln/>
-        </p:spPr>
-        <p:txBody>
-          <a:bodyPr wrap="square" lIns="0" tIns="0" rIns="0" bIns="0" rtlCol="0" anchor="t"/>
-          <a:lstStyle/>
-          <a:p>
-            <a:pPr marL="0" indent="0">
-              <a:buNone/>
-            </a:pPr>
-            <a:r>
-              <a:rPr lang="en-US" dirty="0">
-                <a:solidFill>
-                  <a:schemeClr val="accent4"/>
-                </a:solidFill>
-                <a:latin typeface="DM Sans" pitchFamily="34" charset="0"/>
-                <a:ea typeface="DM Sans" pitchFamily="34" charset="-122"/>
-                <a:cs typeface="DM Sans" pitchFamily="34" charset="-120"/>
-              </a:rPr>
-              <a:t>yearly run-rate at year end</a:t>
-            </a:r>
-            <a:endParaRPr lang="en-US" dirty="0"/>
-          </a:p>
-        </p:txBody>
-      </p:sp>
-      <p:sp>
-        <p:nvSpPr>
-          <p:cNvPr id="23" name="Text 21">
-            <a:extLst>
-              <a:ext uri="{FF2B5EF4-FFF2-40B4-BE49-F238E27FC236}">
-                <a16:creationId xmlns:a16="http://schemas.microsoft.com/office/drawing/2014/main" id="{DAC75A6F-7C38-8B49-3979-B1D9D9ECD378}"/>
-              </a:ext>
-            </a:extLst>
-          </p:cNvPr>
-          <p:cNvSpPr txBox="1"/>
-          <p:nvPr/>
-        </p:nvSpPr>
-        <p:spPr>
-          <a:xfrm>
-            <a:off x="7244182" y="3783823"/>
-            <a:ext cx="1534058" cy="731520"/>
-          </a:xfrm>
-          <a:prstGeom prst="rect">
-            <a:avLst/>
-          </a:prstGeom>
-          <a:noFill/>
-          <a:ln/>
-        </p:spPr>
-        <p:txBody>
-          <a:bodyPr wrap="square" lIns="0" tIns="0" rIns="0" bIns="0" rtlCol="0" anchor="ctr"/>
-          <a:lstStyle/>
-          <a:p>
-            <a:pPr marL="0" indent="0">
-              <a:buNone/>
-            </a:pPr>
-            <a:r>
-              <a:rPr lang="en-US" sz="4800" b="1" dirty="0">
-                <a:solidFill>
-                  <a:schemeClr val="bg1"/>
-                </a:solidFill>
-                <a:latin typeface="Oswald" pitchFamily="34" charset="0"/>
-                <a:ea typeface="Oswald" pitchFamily="34" charset="-122"/>
-                <a:cs typeface="Oswald" pitchFamily="34" charset="-120"/>
-              </a:rPr>
-              <a:t>8,000</a:t>
-            </a:r>
-            <a:endParaRPr lang="en-US" sz="4800" dirty="0"/>
-          </a:p>
-        </p:txBody>
-      </p:sp>
-      <p:sp>
-        <p:nvSpPr>
-          <p:cNvPr id="24" name="Text 22">
-            <a:extLst>
-              <a:ext uri="{FF2B5EF4-FFF2-40B4-BE49-F238E27FC236}">
-                <a16:creationId xmlns:a16="http://schemas.microsoft.com/office/drawing/2014/main" id="{AD5F89B0-E494-6F82-B365-0743DBC5E9CC}"/>
-              </a:ext>
-            </a:extLst>
-          </p:cNvPr>
-          <p:cNvSpPr txBox="1"/>
-          <p:nvPr/>
-        </p:nvSpPr>
-        <p:spPr>
-          <a:xfrm>
-            <a:off x="7244182" y="4561063"/>
-            <a:ext cx="1396898" cy="731520"/>
-          </a:xfrm>
-          <a:prstGeom prst="rect">
-            <a:avLst/>
-          </a:prstGeom>
-          <a:noFill/>
-          <a:ln/>
-        </p:spPr>
-        <p:txBody>
-          <a:bodyPr wrap="square" lIns="0" tIns="0" rIns="0" bIns="0" rtlCol="0" anchor="t"/>
-          <a:lstStyle/>
-          <a:p>
-            <a:pPr marL="0" indent="0">
-              <a:buNone/>
-            </a:pPr>
-            <a:r>
-              <a:rPr lang="en-US" dirty="0">
-                <a:solidFill>
-                  <a:schemeClr val="accent4"/>
-                </a:solidFill>
-                <a:latin typeface="DM Sans" pitchFamily="34" charset="0"/>
-                <a:ea typeface="DM Sans" pitchFamily="34" charset="-122"/>
-                <a:cs typeface="DM Sans" pitchFamily="34" charset="-120"/>
-              </a:rPr>
-              <a:t>users in total, 7,600 of them free</a:t>
-            </a:r>
-            <a:endParaRPr lang="en-US" dirty="0"/>
-          </a:p>
-        </p:txBody>
-      </p:sp>
-      <p:sp>
-        <p:nvSpPr>
-          <p:cNvPr id="25" name="Footnote">
-            <a:extLst>
-              <a:ext uri="{FF2B5EF4-FFF2-40B4-BE49-F238E27FC236}">
-                <a16:creationId xmlns:a16="http://schemas.microsoft.com/office/drawing/2014/main" id="{2870B0AD-F44F-4599-F09D-C43F749B2716}"/>
-              </a:ext>
-            </a:extLst>
-          </p:cNvPr>
-          <p:cNvSpPr txBox="1"/>
-          <p:nvPr/>
-        </p:nvSpPr>
-        <p:spPr>
-          <a:xfrm>
-            <a:off x="548640" y="6327648"/>
-            <a:ext cx="10332720" cy="320040"/>
-          </a:xfrm>
-          <a:prstGeom prst="rect">
-            <a:avLst/>
-          </a:prstGeom>
-          <a:noFill/>
-          <a:ln/>
-        </p:spPr>
-        <p:txBody>
-          <a:bodyPr wrap="square" lIns="0" tIns="0" rIns="0" bIns="0" rtlCol="0" anchor="ctr"/>
-          <a:lstStyle/>
-          <a:p>
-            <a:pPr marL="0" indent="0">
-              <a:buNone/>
-            </a:pPr>
-            <a:r>
-              <a:rPr lang="en-US" sz="1050" dirty="0">
-                <a:solidFill>
-                  <a:schemeClr val="accent6"/>
-                </a:solidFill>
-                <a:latin typeface="DM Sans" pitchFamily="34" charset="0"/>
-                <a:ea typeface="DM Sans" pitchFamily="34" charset="-122"/>
-                <a:cs typeface="DM Sans" pitchFamily="34" charset="-120"/>
-              </a:rPr>
-              <a:t>Survey: 10 people we know who go to events, a first signal, not proof. Targets from the Syncy business plan; 19 free users per paying user.</a:t>
-            </a:r>
-            <a:endParaRPr lang="en-US" sz="1050" dirty="0"/>
-          </a:p>
-        </p:txBody>
-      </p:sp>
-      <p:sp>
-        <p:nvSpPr>
-          <p:cNvPr id="26" name="Slide Number Placeholder 0">
-            <a:extLst>
-              <a:ext uri="{FF2B5EF4-FFF2-40B4-BE49-F238E27FC236}">
-                <a16:creationId xmlns:a16="http://schemas.microsoft.com/office/drawing/2014/main" id="{DA93482F-4F39-A73D-5414-5CC38AE145AC}"/>
-              </a:ext>
-            </a:extLst>
-          </p:cNvPr>
-          <p:cNvSpPr>
-            <a:spLocks noGrp="1"/>
-          </p:cNvSpPr>
-          <p:nvPr>
-            <p:ph type="sldNum" sz="quarter" idx="4294967295"/>
-          </p:nvPr>
-        </p:nvSpPr>
-        <p:spPr>
-          <a:xfrm>
-            <a:off x="11201400" y="6355080"/>
-            <a:ext cx="457200" cy="274320"/>
-          </a:xfrm>
-          <a:prstGeom prst="rect">
-            <a:avLst/>
-          </a:prstGeom>
-          <a:extLst>
-            <a:ext uri="{C572A759-6A51-4108-AA02-DFA0A04FC94B}">
-              <ma14:wrappingTextBoxFlag xmlns="" xmlns:ma14="http://schemas.microsoft.com/office/mac/drawingml/2011/main" val="0"/>
+              <ma14:wrappingTextBoxFlag xmlns:ma14="http://schemas.microsoft.com/office/mac/drawingml/2011/main" xmlns="" val="0"/>
             </a:ext>
           </a:extLst>
         </p:spPr>
@@ -20731,15 +25352,15 @@
         </p:txBody>
       </p:sp>
     </p:spTree>
-    <p:extLst>
-      <p:ext uri="{BB962C8B-B14F-4D97-AF65-F5344CB8AC3E}">
-        <p14:creationId xmlns:p14="http://schemas.microsoft.com/office/powerpoint/2010/main" val="3420090857"/>
-      </p:ext>
-    </p:extLst>
   </p:cSld>
   <p:clrMapOvr>
-    <a:overrideClrMapping bg1="lt1" tx1="dk1" bg2="lt2" tx2="dk2" accent1="accent1" accent2="accent2" accent3="accent3" accent4="accent4" accent5="accent5" accent6="accent6" hlink="hlink" folHlink="folHlink"/>
+    <a:masterClrMapping/>
   </p:clrMapOvr>
+  <p:extLst>
+    <p:ext uri="{6950BFC3-D8DA-4A85-94F7-54DA5524770B}">
+      <p188:commentRel xmlns:p188="http://schemas.microsoft.com/office/powerpoint/2018/8/main" r:id="rId3"/>
+    </p:ext>
+  </p:extLst>
 </p:sld>
 </file>
 
@@ -21394,4 +26015,47 @@
     </a:folHlink>
   </a:clrScheme>
 </a:themeOverride>
+</file>
+
+<file path=ppt/theme/themeOverride2.xml><?xml version="1.0" encoding="utf-8"?>
+<a:themeOverride xmlns:a="http://schemas.openxmlformats.org/drawingml/2006/main">
+  <a:clrScheme name="Syncy">
+    <a:dk1>
+      <a:srgbClr val="15110E"/>
+    </a:dk1>
+    <a:lt1>
+      <a:srgbClr val="F7F0E4"/>
+    </a:lt1>
+    <a:dk2>
+      <a:srgbClr val="241D17"/>
+    </a:dk2>
+    <a:lt2>
+      <a:srgbClr val="EADFCB"/>
+    </a:lt2>
+    <a:accent1>
+      <a:srgbClr val="FF6B1A"/>
+    </a:accent1>
+    <a:accent2>
+      <a:srgbClr val="FFC93C"/>
+    </a:accent2>
+    <a:accent3>
+      <a:srgbClr val="C2410C"/>
+    </a:accent3>
+    <a:accent4>
+      <a:srgbClr val="CFC5B5"/>
+    </a:accent4>
+    <a:accent5>
+      <a:srgbClr val="5A4F43"/>
+    </a:accent5>
+    <a:accent6>
+      <a:srgbClr val="8F8575"/>
+    </a:accent6>
+    <a:hlink>
+      <a:srgbClr val="C2410C"/>
+    </a:hlink>
+    <a:folHlink>
+      <a:srgbClr val="8F8575"/>
+    </a:folHlink>
+  </a:clrScheme>
+</a:themeOverride>
 </file>